--- a/presentation/capstone-btc-volatility.pptx
+++ b/presentation/capstone-btc-volatility.pptx
@@ -16,6 +16,7 @@
     <p:sldId id="264" r:id="rId10"/>
     <p:sldId id="265" r:id="rId11"/>
     <p:sldId id="266" r:id="rId12"/>
+    <p:sldId id="269" r:id="rId20"/>
     <p:sldId id="267" r:id="rId13"/>
     <p:sldId id="268" r:id="rId14"/>
   </p:sldIdLst>
@@ -2976,7 +2977,7 @@
                 <a:ea typeface="Calibri" pitchFamily="34" charset="-122"/>
                 <a:cs typeface="Calibri" pitchFamily="34" charset="-120"/>
               </a:rPr>
-              <a:t>—</a:t>
+              <a:t>0.001649</a:t>
             </a:r>
             <a:endParaRPr lang="en-US" sz="1150" dirty="0"/>
           </a:p>
@@ -3040,7 +3041,7 @@
                 <a:ea typeface="Calibri" pitchFamily="34" charset="-122"/>
                 <a:cs typeface="Calibri" pitchFamily="34" charset="-120"/>
               </a:rPr>
-              <a:t>—</a:t>
+              <a:t>0.001210</a:t>
             </a:r>
             <a:endParaRPr lang="en-US" sz="1150" dirty="0"/>
           </a:p>
@@ -3104,7 +3105,7 @@
                 <a:ea typeface="Calibri" pitchFamily="34" charset="-122"/>
                 <a:cs typeface="Calibri" pitchFamily="34" charset="-120"/>
               </a:rPr>
-              <a:t>—</a:t>
+              <a:t>-0.0897</a:t>
             </a:r>
             <a:endParaRPr lang="en-US" sz="1150" dirty="0"/>
           </a:p>
@@ -3168,7 +3169,7 @@
                 <a:ea typeface="Calibri" pitchFamily="34" charset="-122"/>
                 <a:cs typeface="Calibri" pitchFamily="34" charset="-120"/>
               </a:rPr>
-              <a:t>—</a:t>
+              <a:t>Baseline</a:t>
             </a:r>
             <a:endParaRPr lang="en-US" sz="1150" dirty="0"/>
           </a:p>
@@ -3296,7 +3297,7 @@
                 <a:ea typeface="Calibri" pitchFamily="34" charset="-122"/>
                 <a:cs typeface="Calibri" pitchFamily="34" charset="-120"/>
               </a:rPr>
-              <a:t>—</a:t>
+              <a:t>0.002845</a:t>
             </a:r>
             <a:endParaRPr lang="en-US" sz="1150" dirty="0"/>
           </a:p>
@@ -3360,7 +3361,7 @@
                 <a:ea typeface="Calibri" pitchFamily="34" charset="-122"/>
                 <a:cs typeface="Calibri" pitchFamily="34" charset="-120"/>
               </a:rPr>
-              <a:t>—</a:t>
+              <a:t>0.002057</a:t>
             </a:r>
             <a:endParaRPr lang="en-US" sz="1150" dirty="0"/>
           </a:p>
@@ -3424,7 +3425,7 @@
                 <a:ea typeface="Calibri" pitchFamily="34" charset="-122"/>
                 <a:cs typeface="Calibri" pitchFamily="34" charset="-120"/>
               </a:rPr>
-              <a:t>—</a:t>
+              <a:t>-2.2448</a:t>
             </a:r>
             <a:endParaRPr lang="en-US" sz="1150" dirty="0"/>
           </a:p>
@@ -3488,7 +3489,7 @@
                 <a:ea typeface="Calibri" pitchFamily="34" charset="-122"/>
                 <a:cs typeface="Calibri" pitchFamily="34" charset="-120"/>
               </a:rPr>
-              <a:t>—</a:t>
+              <a:t>No</a:t>
             </a:r>
             <a:endParaRPr lang="en-US" sz="1150" dirty="0"/>
           </a:p>
@@ -3616,7 +3617,7 @@
                 <a:ea typeface="Calibri" pitchFamily="34" charset="-122"/>
                 <a:cs typeface="Calibri" pitchFamily="34" charset="-120"/>
               </a:rPr>
-              <a:t>—</a:t>
+              <a:t>0.003876</a:t>
             </a:r>
             <a:endParaRPr lang="en-US" sz="1150" dirty="0"/>
           </a:p>
@@ -3680,7 +3681,7 @@
                 <a:ea typeface="Calibri" pitchFamily="34" charset="-122"/>
                 <a:cs typeface="Calibri" pitchFamily="34" charset="-120"/>
               </a:rPr>
-              <a:t>—</a:t>
+              <a:t>0.003646</a:t>
             </a:r>
             <a:endParaRPr lang="en-US" sz="1150" dirty="0"/>
           </a:p>
@@ -3744,7 +3745,7 @@
                 <a:ea typeface="Calibri" pitchFamily="34" charset="-122"/>
                 <a:cs typeface="Calibri" pitchFamily="34" charset="-120"/>
               </a:rPr>
-              <a:t>—</a:t>
+              <a:t>-5.0225</a:t>
             </a:r>
             <a:endParaRPr lang="en-US" sz="1150" dirty="0"/>
           </a:p>
@@ -3808,7 +3809,7 @@
                 <a:ea typeface="Calibri" pitchFamily="34" charset="-122"/>
                 <a:cs typeface="Calibri" pitchFamily="34" charset="-120"/>
               </a:rPr>
-              <a:t>—</a:t>
+              <a:t>No</a:t>
             </a:r>
             <a:endParaRPr lang="en-US" sz="1150" dirty="0"/>
           </a:p>
@@ -3936,7 +3937,7 @@
                 <a:ea typeface="Calibri" pitchFamily="34" charset="-122"/>
                 <a:cs typeface="Calibri" pitchFamily="34" charset="-120"/>
               </a:rPr>
-              <a:t>—</a:t>
+              <a:t>0.001418</a:t>
             </a:r>
             <a:endParaRPr lang="en-US" sz="1150" dirty="0"/>
           </a:p>
@@ -4000,7 +4001,7 @@
                 <a:ea typeface="Calibri" pitchFamily="34" charset="-122"/>
                 <a:cs typeface="Calibri" pitchFamily="34" charset="-120"/>
               </a:rPr>
-              <a:t>—</a:t>
+              <a:t>0.001118</a:t>
             </a:r>
             <a:endParaRPr lang="en-US" sz="1150" dirty="0"/>
           </a:p>
@@ -4064,7 +4065,7 @@
                 <a:ea typeface="Calibri" pitchFamily="34" charset="-122"/>
                 <a:cs typeface="Calibri" pitchFamily="34" charset="-120"/>
               </a:rPr>
-              <a:t>—</a:t>
+              <a:t>0.1840</a:t>
             </a:r>
             <a:endParaRPr lang="en-US" sz="1150" dirty="0"/>
           </a:p>
@@ -4128,7 +4129,7 @@
                 <a:ea typeface="Calibri" pitchFamily="34" charset="-122"/>
                 <a:cs typeface="Calibri" pitchFamily="34" charset="-120"/>
               </a:rPr>
-              <a:t>—</a:t>
+              <a:t>Yes</a:t>
             </a:r>
             <a:endParaRPr lang="en-US" sz="1150" dirty="0"/>
           </a:p>
@@ -4192,7 +4193,7 @@
                 <a:ea typeface="Calibri" pitchFamily="34" charset="-122"/>
                 <a:cs typeface="Calibri" pitchFamily="34" charset="-120"/>
               </a:rPr>
-              <a:t>LSTM (tuned)</a:t>
+              <a:t>EWMA (λ=0.995, tuned)</a:t>
             </a:r>
             <a:endParaRPr lang="en-US" sz="1150" dirty="0"/>
           </a:p>
@@ -4256,7 +4257,7 @@
                 <a:ea typeface="Calibri" pitchFamily="34" charset="-122"/>
                 <a:cs typeface="Calibri" pitchFamily="34" charset="-120"/>
               </a:rPr>
-              <a:t>—</a:t>
+              <a:t>0.001532</a:t>
             </a:r>
             <a:endParaRPr lang="en-US" sz="1150" dirty="0"/>
           </a:p>
@@ -4320,7 +4321,7 @@
                 <a:ea typeface="Calibri" pitchFamily="34" charset="-122"/>
                 <a:cs typeface="Calibri" pitchFamily="34" charset="-120"/>
               </a:rPr>
-              <a:t>—</a:t>
+              <a:t>0.001145</a:t>
             </a:r>
             <a:endParaRPr lang="en-US" sz="1150" dirty="0"/>
           </a:p>
@@ -4384,7 +4385,7 @@
                 <a:ea typeface="Calibri" pitchFamily="34" charset="-122"/>
                 <a:cs typeface="Calibri" pitchFamily="34" charset="-120"/>
               </a:rPr>
-              <a:t>—</a:t>
+              <a:t>0.0593</a:t>
             </a:r>
             <a:endParaRPr lang="en-US" sz="1150" dirty="0"/>
           </a:p>
@@ -4448,7 +4449,7 @@
                 <a:ea typeface="Calibri" pitchFamily="34" charset="-122"/>
                 <a:cs typeface="Calibri" pitchFamily="34" charset="-120"/>
               </a:rPr>
-              <a:t>—</a:t>
+              <a:t>Yes</a:t>
             </a:r>
             <a:endParaRPr lang="en-US" sz="1150" dirty="0"/>
           </a:p>
@@ -4487,7 +4488,7 @@
                 <a:ea typeface="Calibri" pitchFamily="34" charset="-122"/>
                 <a:cs typeface="Calibri" pitchFamily="34" charset="-120"/>
               </a:rPr>
-              <a:t>Fill from the notebook's auto-generated comparison table — it is built from the results list, not typed by hand.</a:t>
+              <a:t>Same order as the preceding model sections; built directly from the notebook's results list, not typed by hand.</a:t>
             </a:r>
             <a:endParaRPr lang="en-US" sz="1050" dirty="0"/>
           </a:p>
@@ -4573,7 +4574,7 @@
                 <a:ea typeface="Calibri" pitchFamily="34" charset="-122"/>
                 <a:cs typeface="Calibri" pitchFamily="34" charset="-120"/>
               </a:rPr>
-              <a:t>[fill in after running] — chosen on RMSE, but weighing interpretability and cost too. GARCH's parameters carry precise financial meaning; the LSTM's do not. A model that wins historically but loses on live data is a different finding than one that wins on both.</a:t>
+              <a:t>HAR-RV-X (Tuned), by a margin of 14.0% lower RMSE than naive persistence — a genuine, working model, not an artifact. EWMA is a close second and also beats persistence. GARCH and Holt-Winters both underperform naive persistence badly at this horizon. The Live Testing section (next) checks whether this ranking holds on genuinely unseen data.</a:t>
             </a:r>
             <a:endParaRPr lang="en-US" sz="1200" dirty="0"/>
           </a:p>
@@ -4630,6 +4631,10 @@
           </a:solidFill>
           <a:ln/>
         </p:spPr>
+        <p:txBody>
+          <a:bodyPr/>
+          <a:p/>
+        </p:txBody>
       </p:sp>
       <p:sp>
         <p:nvSpPr>
@@ -4653,6 +4658,10 @@
             <a:prstDash val="solid"/>
           </a:ln>
         </p:spPr>
+        <p:txBody>
+          <a:bodyPr/>
+          <a:p/>
+        </p:txBody>
       </p:sp>
       <p:sp>
         <p:nvSpPr>
@@ -4676,6 +4685,10 @@
             <a:prstDash val="solid"/>
           </a:ln>
         </p:spPr>
+        <p:txBody>
+          <a:bodyPr/>
+          <a:p/>
+        </p:txBody>
       </p:sp>
       <p:sp>
         <p:nvSpPr>
@@ -4699,6 +4712,10 @@
             <a:prstDash val="solid"/>
           </a:ln>
         </p:spPr>
+        <p:txBody>
+          <a:bodyPr/>
+          <a:p/>
+        </p:txBody>
       </p:sp>
       <p:sp>
         <p:nvSpPr>
@@ -4722,6 +4739,10 @@
             <a:prstDash val="solid"/>
           </a:ln>
         </p:spPr>
+        <p:txBody>
+          <a:bodyPr/>
+          <a:p/>
+        </p:txBody>
       </p:sp>
       <p:sp>
         <p:nvSpPr>
@@ -4795,7 +4816,7 @@
                 <a:ea typeface="Calibri" pitchFamily="34" charset="-122"/>
                 <a:cs typeface="Calibri" pitchFamily="34" charset="-120"/>
               </a:rPr>
-              <a:t>The stronger validation — predictions logged before the outcome exists</a:t>
+              <a:t>The stronger validation — 5,664 predictions across an 8-month window the models never saw</a:t>
             </a:r>
             <a:endParaRPr lang="en-US" sz="1400" dirty="0"/>
           </a:p>
@@ -4905,6 +4926,10 @@
             <a:prstDash val="solid"/>
           </a:ln>
         </p:spPr>
+        <p:txBody>
+          <a:bodyPr/>
+          <a:p/>
+        </p:txBody>
       </p:sp>
       <p:sp>
         <p:nvSpPr>
@@ -4925,6 +4950,10 @@
           </a:solidFill>
           <a:ln/>
         </p:spPr>
+        <p:txBody>
+          <a:bodyPr/>
+          <a:p/>
+        </p:txBody>
       </p:sp>
       <p:sp>
         <p:nvSpPr>
@@ -4998,7 +5027,7 @@
                 <a:ea typeface="Cambria" pitchFamily="34" charset="-122"/>
                 <a:cs typeface="Cambria" pitchFamily="34" charset="-120"/>
               </a:rPr>
-              <a:t>Fetch new candles</a:t>
+              <a:t>Fetch the live-test period</a:t>
             </a:r>
             <a:endParaRPr lang="en-US" sz="1300" dirty="0"/>
           </a:p>
@@ -5040,7 +5069,7 @@
                 <a:ea typeface="Calibri" pitchFamily="34" charset="-122"/>
                 <a:cs typeface="Calibri" pitchFamily="34" charset="-120"/>
               </a:rPr>
-              <a:t>Pull only hours that did not exist when the training CSV was saved.</a:t>
+              <a:t>2026-01-02 through yesterday — never fetched during training (which stops 2026-01-01).</a:t>
             </a:r>
             <a:endParaRPr lang="en-US" sz="1100" dirty="0"/>
           </a:p>
@@ -5072,6 +5101,10 @@
             <a:prstDash val="solid"/>
           </a:ln>
         </p:spPr>
+        <p:txBody>
+          <a:bodyPr/>
+          <a:p/>
+        </p:txBody>
       </p:sp>
       <p:sp>
         <p:nvSpPr>
@@ -5092,6 +5125,10 @@
           </a:solidFill>
           <a:ln/>
         </p:spPr>
+        <p:txBody>
+          <a:bodyPr/>
+          <a:p/>
+        </p:txBody>
       </p:sp>
       <p:sp>
         <p:nvSpPr>
@@ -5165,7 +5202,7 @@
                 <a:ea typeface="Cambria" pitchFamily="34" charset="-122"/>
                 <a:cs typeface="Cambria" pitchFamily="34" charset="-120"/>
               </a:rPr>
-              <a:t>Predict and log</a:t>
+              <a:t>Predict</a:t>
             </a:r>
             <a:endParaRPr lang="en-US" sz="1300" dirty="0"/>
           </a:p>
@@ -5207,7 +5244,7 @@
                 <a:ea typeface="Calibri" pitchFamily="34" charset="-122"/>
                 <a:cs typeface="Calibri" pitchFamily="34" charset="-120"/>
               </a:rPr>
-              <a:t>Score each new hour with the saved models; append to predictions_log.csv.</a:t>
+              <a:t>Score every hour in the window with the saved GARCH, HAR-RV-X, and EWMA models.</a:t>
             </a:r>
             <a:endParaRPr lang="en-US" sz="1100" dirty="0"/>
           </a:p>
@@ -5239,6 +5276,10 @@
             <a:prstDash val="solid"/>
           </a:ln>
         </p:spPr>
+        <p:txBody>
+          <a:bodyPr/>
+          <a:p/>
+        </p:txBody>
       </p:sp>
       <p:sp>
         <p:nvSpPr>
@@ -5259,6 +5300,10 @@
           </a:solidFill>
           <a:ln/>
         </p:spPr>
+        <p:txBody>
+          <a:bodyPr/>
+          <a:p/>
+        </p:txBody>
       </p:sp>
       <p:sp>
         <p:nvSpPr>
@@ -5332,7 +5377,7 @@
                 <a:ea typeface="Cambria" pitchFamily="34" charset="-122"/>
                 <a:cs typeface="Cambria" pitchFamily="34" charset="-120"/>
               </a:rPr>
-              <a:t>Wait 168 hours</a:t>
+              <a:t>Score what's already elapsed</a:t>
             </a:r>
             <a:endParaRPr lang="en-US" sz="1300" dirty="0"/>
           </a:p>
@@ -5374,7 +5419,7 @@
                 <a:ea typeface="Calibri" pitchFamily="34" charset="-122"/>
                 <a:cs typeface="Calibri" pitchFamily="34" charset="-120"/>
               </a:rPr>
-              <a:t>The true 7-day volatility for that hour only becomes computable once a full week has passed.</a:t>
+              <a:t>A 168-hour-ahead prediction can't be checked until 168 real hours pass. 5,496 of 5,664 predictions already have a real outcome; the rest will as more days go by.</a:t>
             </a:r>
             <a:endParaRPr lang="en-US" sz="1100" dirty="0"/>
           </a:p>
@@ -5406,6 +5451,10 @@
             <a:prstDash val="solid"/>
           </a:ln>
         </p:spPr>
+        <p:txBody>
+          <a:bodyPr/>
+          <a:p/>
+        </p:txBody>
       </p:sp>
       <p:sp>
         <p:nvSpPr>
@@ -5426,6 +5475,10 @@
           </a:solidFill>
           <a:ln/>
         </p:spPr>
+        <p:txBody>
+          <a:bodyPr/>
+          <a:p/>
+        </p:txBody>
       </p:sp>
       <p:sp>
         <p:nvSpPr>
@@ -5499,7 +5552,7 @@
                 <a:ea typeface="Cambria" pitchFamily="34" charset="-122"/>
                 <a:cs typeface="Cambria" pitchFamily="34" charset="-120"/>
               </a:rPr>
-              <a:t>Score against reality</a:t>
+              <a:t>Compare to the historical ranking</a:t>
             </a:r>
             <a:endParaRPr lang="en-US" sz="1300" dirty="0"/>
           </a:p>
@@ -5541,7 +5594,7 @@
                 <a:ea typeface="Calibri" pitchFamily="34" charset="-122"/>
                 <a:cs typeface="Calibri" pitchFamily="34" charset="-120"/>
               </a:rPr>
-              <a:t>Compute genuine live RMSE/MAE — no way to peek at an answer that hasn't happened yet.</a:t>
+              <a:t>HAR-RV-X — the historical winner — wins here too, on every metric.</a:t>
             </a:r>
             <a:endParaRPr lang="en-US" sz="1100" dirty="0"/>
           </a:p>
@@ -5568,6 +5621,10 @@
           </a:solidFill>
           <a:ln/>
         </p:spPr>
+        <p:txBody>
+          <a:bodyPr/>
+          <a:p/>
+        </p:txBody>
       </p:sp>
       <p:sp>
         <p:nvSpPr>
@@ -5644,7 +5701,7 @@
                 <a:ea typeface="Calibri" pitchFamily="34" charset="-122"/>
                 <a:cs typeface="Calibri" pitchFamily="34" charset="-120"/>
               </a:rPr>
-              <a:t>A historical hold-out can still flatter a model — through subtle leakage, or simply because the analyst iterated against that test set while developing. Predictions written down before the outcome exists cannot be fooled. This is the difference between claiming a model works and demonstrating it.</a:t>
+              <a:t>A historical hold-out can still flatter a model — through subtle leakage, or simply because the analyst iterated against that test set while developing. The live-test period was never fetched during training or tuning at all, so scoring against it is a genuine test of generalization, not just another historical split.</a:t>
             </a:r>
             <a:endParaRPr lang="en-US" sz="1300" dirty="0"/>
           </a:p>
@@ -5659,6 +5716,2031 @@
 </file>
 
 <file path=ppt/slides/slide12.xml><?xml version="1.0" encoding="utf-8"?>
+<p:sld xmlns:a="http://schemas.openxmlformats.org/drawingml/2006/main" xmlns:r="http://schemas.openxmlformats.org/officeDocument/2006/relationships" xmlns:p="http://schemas.openxmlformats.org/presentationml/2006/main">
+  <p:cSld name="Slide 10">
+    <p:bg>
+      <p:bgPr>
+        <a:solidFill>
+          <a:srgbClr val="F7F8FA"/>
+        </a:solidFill>
+      </p:bgPr>
+    </p:bg>
+    <p:spTree>
+      <p:nvGrpSpPr>
+        <p:cNvPr id="1" name=""/>
+        <p:cNvGrpSpPr/>
+        <p:nvPr/>
+      </p:nvGrpSpPr>
+      <p:grpSpPr>
+        <a:xfrm>
+          <a:off x="0" y="0"/>
+          <a:ext cx="0" cy="0"/>
+          <a:chOff x="0" y="0"/>
+          <a:chExt cx="0" cy="0"/>
+        </a:xfrm>
+      </p:grpSpPr>
+      <p:sp>
+        <p:nvSpPr>
+          <p:cNvPr id="2" name="Shape 0"/>
+          <p:cNvSpPr/>
+          <p:nvPr/>
+        </p:nvSpPr>
+        <p:spPr>
+          <a:xfrm>
+            <a:off x="10972800" y="365760"/>
+            <a:ext cx="731520" cy="731520"/>
+          </a:xfrm>
+          <a:prstGeom prst="ellipse">
+            <a:avLst/>
+          </a:prstGeom>
+          <a:solidFill>
+            <a:srgbClr val="0D1B2A"/>
+          </a:solidFill>
+          <a:ln/>
+        </p:spPr>
+      </p:sp>
+      <p:sp>
+        <p:nvSpPr>
+          <p:cNvPr id="3" name="Shape 1"/>
+          <p:cNvSpPr/>
+          <p:nvPr/>
+        </p:nvSpPr>
+        <p:spPr>
+          <a:xfrm flipV="1">
+            <a:off x="11133734" y="588142"/>
+            <a:ext cx="122895" cy="204826"/>
+          </a:xfrm>
+          <a:prstGeom prst="line">
+            <a:avLst/>
+          </a:prstGeom>
+          <a:noFill/>
+          <a:ln w="25400">
+            <a:solidFill>
+              <a:srgbClr val="F7931A"/>
+            </a:solidFill>
+            <a:prstDash val="solid"/>
+          </a:ln>
+        </p:spPr>
+      </p:sp>
+      <p:sp>
+        <p:nvSpPr>
+          <p:cNvPr id="4" name="Shape 2"/>
+          <p:cNvSpPr/>
+          <p:nvPr/>
+        </p:nvSpPr>
+        <p:spPr>
+          <a:xfrm>
+            <a:off x="11256630" y="588142"/>
+            <a:ext cx="81930" cy="245791"/>
+          </a:xfrm>
+          <a:prstGeom prst="line">
+            <a:avLst/>
+          </a:prstGeom>
+          <a:noFill/>
+          <a:ln w="25400">
+            <a:solidFill>
+              <a:srgbClr val="F7931A"/>
+            </a:solidFill>
+            <a:prstDash val="solid"/>
+          </a:ln>
+        </p:spPr>
+      </p:sp>
+      <p:sp>
+        <p:nvSpPr>
+          <p:cNvPr id="5" name="Shape 3"/>
+          <p:cNvSpPr/>
+          <p:nvPr/>
+        </p:nvSpPr>
+        <p:spPr>
+          <a:xfrm flipV="1">
+            <a:off x="11338560" y="526694"/>
+            <a:ext cx="102413" cy="307238"/>
+          </a:xfrm>
+          <a:prstGeom prst="line">
+            <a:avLst/>
+          </a:prstGeom>
+          <a:noFill/>
+          <a:ln w="25400">
+            <a:solidFill>
+              <a:srgbClr val="F7931A"/>
+            </a:solidFill>
+            <a:prstDash val="solid"/>
+          </a:ln>
+        </p:spPr>
+      </p:sp>
+      <p:sp>
+        <p:nvSpPr>
+          <p:cNvPr id="6" name="Shape 4"/>
+          <p:cNvSpPr/>
+          <p:nvPr/>
+        </p:nvSpPr>
+        <p:spPr>
+          <a:xfrm>
+            <a:off x="11440973" y="526694"/>
+            <a:ext cx="102413" cy="184343"/>
+          </a:xfrm>
+          <a:prstGeom prst="line">
+            <a:avLst/>
+          </a:prstGeom>
+          <a:noFill/>
+          <a:ln w="25400">
+            <a:solidFill>
+              <a:srgbClr val="F7931A"/>
+            </a:solidFill>
+            <a:prstDash val="solid"/>
+          </a:ln>
+        </p:spPr>
+      </p:sp>
+      <p:sp>
+        <p:nvSpPr>
+          <p:cNvPr id="7" name="Text 5"/>
+          <p:cNvSpPr/>
+          <p:nvPr/>
+        </p:nvSpPr>
+        <p:spPr>
+          <a:xfrm>
+            <a:off x="548640" y="365760"/>
+            <a:ext cx="10058400" cy="640080"/>
+          </a:xfrm>
+          <a:prstGeom prst="rect">
+            <a:avLst/>
+          </a:prstGeom>
+          <a:noFill/>
+          <a:ln/>
+        </p:spPr>
+        <p:txBody>
+          <a:bodyPr wrap="square" rtlCol="0" anchor="ctr"/>
+          <a:lstStyle/>
+          <a:p>
+            <a:pPr indent="0" marL="0">
+              <a:buNone/>
+            </a:pPr>
+            <a:r>
+              <a:rPr lang="en-US" sz="3000" b="1" dirty="0">
+                <a:solidFill>
+                  <a:srgbClr val="0D1B2A"/>
+                </a:solidFill>
+                <a:latin typeface="Cambria" pitchFamily="34" charset="0"/>
+                <a:ea typeface="Cambria" pitchFamily="34" charset="-122"/>
+                <a:cs typeface="Cambria" pitchFamily="34" charset="-120"/>
+              </a:rPr>
+              <a:t>Live Test Results</a:t>
+            </a:r>
+            <a:endParaRPr lang="en-US" sz="3000" dirty="0"/>
+          </a:p>
+        </p:txBody>
+      </p:sp>
+      <p:sp>
+        <p:nvSpPr>
+          <p:cNvPr id="8" name="Text 6"/>
+          <p:cNvSpPr/>
+          <p:nvPr/>
+        </p:nvSpPr>
+        <p:spPr>
+          <a:xfrm>
+            <a:off x="548640" y="932688"/>
+            <a:ext cx="10515600" cy="365760"/>
+          </a:xfrm>
+          <a:prstGeom prst="rect">
+            <a:avLst/>
+          </a:prstGeom>
+          <a:noFill/>
+          <a:ln/>
+        </p:spPr>
+        <p:txBody>
+          <a:bodyPr wrap="square" rtlCol="0" anchor="ctr"/>
+          <a:lstStyle/>
+          <a:p>
+            <a:pPr indent="0" marL="0">
+              <a:buNone/>
+            </a:pPr>
+            <a:r>
+              <a:rPr lang="en-US" sz="1400" i="1" dirty="0">
+                <a:solidFill>
+                  <a:srgbClr val="5C6B7A"/>
+                </a:solidFill>
+                <a:latin typeface="Calibri" pitchFamily="34" charset="0"/>
+                <a:ea typeface="Calibri" pitchFamily="34" charset="-122"/>
+                <a:cs typeface="Calibri" pitchFamily="34" charset="-120"/>
+              </a:rPr>
+              <a:t>Scored on 2026-01-02 through yesterday — 5,496 of 5,664 predictions already checked</a:t>
+            </a:r>
+            <a:endParaRPr lang="en-US" sz="1400" dirty="0"/>
+          </a:p>
+        </p:txBody>
+      </p:sp>
+      <p:sp>
+        <p:nvSpPr>
+          <p:cNvPr id="9" name="Text 7"/>
+          <p:cNvSpPr/>
+          <p:nvPr/>
+        </p:nvSpPr>
+        <p:spPr>
+          <a:xfrm>
+            <a:off x="457200" y="6537960"/>
+            <a:ext cx="7315200" cy="274320"/>
+          </a:xfrm>
+          <a:prstGeom prst="rect">
+            <a:avLst/>
+          </a:prstGeom>
+          <a:noFill/>
+          <a:ln/>
+        </p:spPr>
+        <p:txBody>
+          <a:bodyPr wrap="square" rtlCol="0" anchor="ctr"/>
+          <a:lstStyle/>
+          <a:p>
+            <a:pPr indent="0" marL="0">
+              <a:buNone/>
+            </a:pPr>
+            <a:r>
+              <a:rPr lang="en-US" sz="900" dirty="0">
+                <a:solidFill>
+                  <a:srgbClr val="5C6B7A"/>
+                </a:solidFill>
+                <a:latin typeface="Calibri" pitchFamily="34" charset="0"/>
+                <a:ea typeface="Calibri" pitchFamily="34" charset="-122"/>
+                <a:cs typeface="Calibri" pitchFamily="34" charset="-120"/>
+              </a:rPr>
+              <a:t>BTC Volatility Prediction  |  Capstone</a:t>
+            </a:r>
+            <a:endParaRPr lang="en-US" sz="900" dirty="0"/>
+          </a:p>
+        </p:txBody>
+      </p:sp>
+      <p:sp>
+        <p:nvSpPr>
+          <p:cNvPr id="10" name="Text 8"/>
+          <p:cNvSpPr/>
+          <p:nvPr/>
+        </p:nvSpPr>
+        <p:spPr>
+          <a:xfrm>
+            <a:off x="11521440" y="6537960"/>
+            <a:ext cx="457200" cy="274320"/>
+          </a:xfrm>
+          <a:prstGeom prst="rect">
+            <a:avLst/>
+          </a:prstGeom>
+          <a:noFill/>
+          <a:ln/>
+        </p:spPr>
+        <p:txBody>
+          <a:bodyPr wrap="square" rtlCol="0" anchor="ctr"/>
+          <a:lstStyle/>
+          <a:p>
+            <a:pPr algn="r" indent="0" marL="0">
+              <a:buNone/>
+            </a:pPr>
+            <a:r>
+              <a:rPr lang="en-US" sz="900" dirty="0">
+                <a:solidFill>
+                  <a:srgbClr val="5C6B7A"/>
+                </a:solidFill>
+                <a:latin typeface="Calibri" pitchFamily="34" charset="0"/>
+                <a:ea typeface="Calibri" pitchFamily="34" charset="-122"/>
+                <a:cs typeface="Calibri" pitchFamily="34" charset="-120"/>
+              </a:rPr>
+              <a:t>12</a:t>
+            </a:r>
+            <a:endParaRPr lang="en-US" sz="900" dirty="0"/>
+          </a:p>
+        </p:txBody>
+      </p:sp>
+      <p:sp>
+        <p:nvSpPr>
+          <p:cNvPr id="11" name="Shape 9"/>
+          <p:cNvSpPr/>
+          <p:nvPr/>
+        </p:nvSpPr>
+        <p:spPr>
+          <a:xfrm>
+            <a:off x="548640" y="1554480"/>
+            <a:ext cx="3474720" cy="457200"/>
+          </a:xfrm>
+          <a:prstGeom prst="rect">
+            <a:avLst/>
+          </a:prstGeom>
+          <a:solidFill>
+            <a:srgbClr val="0D1B2A"/>
+          </a:solidFill>
+          <a:ln w="12700">
+            <a:solidFill>
+              <a:srgbClr val="F7F8FA"/>
+            </a:solidFill>
+            <a:prstDash val="solid"/>
+          </a:ln>
+        </p:spPr>
+      </p:sp>
+      <p:sp>
+        <p:nvSpPr>
+          <p:cNvPr id="12" name="Text 10"/>
+          <p:cNvSpPr/>
+          <p:nvPr/>
+        </p:nvSpPr>
+        <p:spPr>
+          <a:xfrm>
+            <a:off x="548640" y="1554480"/>
+            <a:ext cx="3474720" cy="457200"/>
+          </a:xfrm>
+          <a:prstGeom prst="rect">
+            <a:avLst/>
+          </a:prstGeom>
+          <a:noFill/>
+          <a:ln/>
+        </p:spPr>
+        <p:txBody>
+          <a:bodyPr wrap="square" rtlCol="0" anchor="ctr"/>
+          <a:lstStyle/>
+          <a:p>
+            <a:pPr algn="ctr" indent="0" marL="0">
+              <a:buNone/>
+            </a:pPr>
+            <a:r>
+              <a:rPr lang="en-US" sz="1200" b="1" dirty="0">
+                <a:solidFill>
+                  <a:srgbClr val="F7931A"/>
+                </a:solidFill>
+                <a:latin typeface="Calibri" pitchFamily="34" charset="0"/>
+                <a:ea typeface="Calibri" pitchFamily="34" charset="-122"/>
+                <a:cs typeface="Calibri" pitchFamily="34" charset="-120"/>
+              </a:rPr>
+              <a:t>Model</a:t>
+            </a:r>
+            <a:endParaRPr lang="en-US" sz="1200" dirty="0"/>
+          </a:p>
+        </p:txBody>
+      </p:sp>
+      <p:sp>
+        <p:nvSpPr>
+          <p:cNvPr id="13" name="Shape 11"/>
+          <p:cNvSpPr/>
+          <p:nvPr/>
+        </p:nvSpPr>
+        <p:spPr>
+          <a:xfrm>
+            <a:off x="4023360" y="1554480"/>
+            <a:ext cx="1463040" cy="457200"/>
+          </a:xfrm>
+          <a:prstGeom prst="rect">
+            <a:avLst/>
+          </a:prstGeom>
+          <a:solidFill>
+            <a:srgbClr val="0D1B2A"/>
+          </a:solidFill>
+          <a:ln w="12700">
+            <a:solidFill>
+              <a:srgbClr val="F7F8FA"/>
+            </a:solidFill>
+            <a:prstDash val="solid"/>
+          </a:ln>
+        </p:spPr>
+      </p:sp>
+      <p:sp>
+        <p:nvSpPr>
+          <p:cNvPr id="14" name="Text 12"/>
+          <p:cNvSpPr/>
+          <p:nvPr/>
+        </p:nvSpPr>
+        <p:spPr>
+          <a:xfrm>
+            <a:off x="4023360" y="1554480"/>
+            <a:ext cx="1463040" cy="457200"/>
+          </a:xfrm>
+          <a:prstGeom prst="rect">
+            <a:avLst/>
+          </a:prstGeom>
+          <a:noFill/>
+          <a:ln/>
+        </p:spPr>
+        <p:txBody>
+          <a:bodyPr wrap="square" rtlCol="0" anchor="ctr"/>
+          <a:lstStyle/>
+          <a:p>
+            <a:pPr algn="ctr" indent="0" marL="0">
+              <a:buNone/>
+            </a:pPr>
+            <a:r>
+              <a:rPr lang="en-US" sz="1200" b="1" dirty="0">
+                <a:solidFill>
+                  <a:srgbClr val="F7931A"/>
+                </a:solidFill>
+                <a:latin typeface="Calibri" pitchFamily="34" charset="0"/>
+                <a:ea typeface="Calibri" pitchFamily="34" charset="-122"/>
+                <a:cs typeface="Calibri" pitchFamily="34" charset="-120"/>
+              </a:rPr>
+              <a:t>RMSE</a:t>
+            </a:r>
+            <a:endParaRPr lang="en-US" sz="1200" dirty="0"/>
+          </a:p>
+        </p:txBody>
+      </p:sp>
+      <p:sp>
+        <p:nvSpPr>
+          <p:cNvPr id="15" name="Shape 13"/>
+          <p:cNvSpPr/>
+          <p:nvPr/>
+        </p:nvSpPr>
+        <p:spPr>
+          <a:xfrm>
+            <a:off x="5486400" y="1554480"/>
+            <a:ext cx="1463040" cy="457200"/>
+          </a:xfrm>
+          <a:prstGeom prst="rect">
+            <a:avLst/>
+          </a:prstGeom>
+          <a:solidFill>
+            <a:srgbClr val="0D1B2A"/>
+          </a:solidFill>
+          <a:ln w="12700">
+            <a:solidFill>
+              <a:srgbClr val="F7F8FA"/>
+            </a:solidFill>
+            <a:prstDash val="solid"/>
+          </a:ln>
+        </p:spPr>
+      </p:sp>
+      <p:sp>
+        <p:nvSpPr>
+          <p:cNvPr id="16" name="Text 14"/>
+          <p:cNvSpPr/>
+          <p:nvPr/>
+        </p:nvSpPr>
+        <p:spPr>
+          <a:xfrm>
+            <a:off x="5486400" y="1554480"/>
+            <a:ext cx="1463040" cy="457200"/>
+          </a:xfrm>
+          <a:prstGeom prst="rect">
+            <a:avLst/>
+          </a:prstGeom>
+          <a:noFill/>
+          <a:ln/>
+        </p:spPr>
+        <p:txBody>
+          <a:bodyPr wrap="square" rtlCol="0" anchor="ctr"/>
+          <a:lstStyle/>
+          <a:p>
+            <a:pPr algn="ctr" indent="0" marL="0">
+              <a:buNone/>
+            </a:pPr>
+            <a:r>
+              <a:rPr lang="en-US" sz="1200" b="1" dirty="0">
+                <a:solidFill>
+                  <a:srgbClr val="F7931A"/>
+                </a:solidFill>
+                <a:latin typeface="Calibri" pitchFamily="34" charset="0"/>
+                <a:ea typeface="Calibri" pitchFamily="34" charset="-122"/>
+                <a:cs typeface="Calibri" pitchFamily="34" charset="-120"/>
+              </a:rPr>
+              <a:t>MAE</a:t>
+            </a:r>
+            <a:endParaRPr lang="en-US" sz="1200" dirty="0"/>
+          </a:p>
+        </p:txBody>
+      </p:sp>
+      <p:sp>
+        <p:nvSpPr>
+          <p:cNvPr id="17" name="Shape 15"/>
+          <p:cNvSpPr/>
+          <p:nvPr/>
+        </p:nvSpPr>
+        <p:spPr>
+          <a:xfrm>
+            <a:off x="6949440" y="1554480"/>
+            <a:ext cx="1463040" cy="457200"/>
+          </a:xfrm>
+          <a:prstGeom prst="rect">
+            <a:avLst/>
+          </a:prstGeom>
+          <a:solidFill>
+            <a:srgbClr val="0D1B2A"/>
+          </a:solidFill>
+          <a:ln w="12700">
+            <a:solidFill>
+              <a:srgbClr val="F7F8FA"/>
+            </a:solidFill>
+            <a:prstDash val="solid"/>
+          </a:ln>
+        </p:spPr>
+      </p:sp>
+      <p:sp>
+        <p:nvSpPr>
+          <p:cNvPr id="18" name="Text 16"/>
+          <p:cNvSpPr/>
+          <p:nvPr/>
+        </p:nvSpPr>
+        <p:spPr>
+          <a:xfrm>
+            <a:off x="6949440" y="1554480"/>
+            <a:ext cx="1463040" cy="457200"/>
+          </a:xfrm>
+          <a:prstGeom prst="rect">
+            <a:avLst/>
+          </a:prstGeom>
+          <a:noFill/>
+          <a:ln/>
+        </p:spPr>
+        <p:txBody>
+          <a:bodyPr wrap="square" rtlCol="0" anchor="ctr"/>
+          <a:lstStyle/>
+          <a:p>
+            <a:pPr algn="ctr" indent="0" marL="0">
+              <a:buNone/>
+            </a:pPr>
+            <a:r>
+              <a:rPr lang="en-US" sz="1200" b="1" dirty="0">
+                <a:solidFill>
+                  <a:srgbClr val="F7931A"/>
+                </a:solidFill>
+                <a:latin typeface="Calibri" pitchFamily="34" charset="0"/>
+                <a:ea typeface="Calibri" pitchFamily="34" charset="-122"/>
+                <a:cs typeface="Calibri" pitchFamily="34" charset="-120"/>
+              </a:rPr>
+              <a:t>R²</a:t>
+            </a:r>
+            <a:endParaRPr lang="en-US" sz="1200" dirty="0"/>
+          </a:p>
+        </p:txBody>
+      </p:sp>
+      <p:sp>
+        <p:nvSpPr>
+          <p:cNvPr id="19" name="Shape 17"/>
+          <p:cNvSpPr/>
+          <p:nvPr/>
+        </p:nvSpPr>
+        <p:spPr>
+          <a:xfrm>
+            <a:off x="8412480" y="1554480"/>
+            <a:ext cx="3200400" cy="457200"/>
+          </a:xfrm>
+          <a:prstGeom prst="rect">
+            <a:avLst/>
+          </a:prstGeom>
+          <a:solidFill>
+            <a:srgbClr val="0D1B2A"/>
+          </a:solidFill>
+          <a:ln w="12700">
+            <a:solidFill>
+              <a:srgbClr val="F7F8FA"/>
+            </a:solidFill>
+            <a:prstDash val="solid"/>
+          </a:ln>
+        </p:spPr>
+      </p:sp>
+      <p:sp>
+        <p:nvSpPr>
+          <p:cNvPr id="20" name="Text 18"/>
+          <p:cNvSpPr/>
+          <p:nvPr/>
+        </p:nvSpPr>
+        <p:spPr>
+          <a:xfrm>
+            <a:off x="8412480" y="1554480"/>
+            <a:ext cx="3200400" cy="457200"/>
+          </a:xfrm>
+          <a:prstGeom prst="rect">
+            <a:avLst/>
+          </a:prstGeom>
+          <a:noFill/>
+          <a:ln/>
+        </p:spPr>
+        <p:txBody>
+          <a:bodyPr wrap="square" rtlCol="0" anchor="ctr"/>
+          <a:lstStyle/>
+          <a:p>
+            <a:pPr algn="ctr" indent="0" marL="0">
+              <a:buNone/>
+            </a:pPr>
+            <a:r>
+              <a:rPr lang="en-US" sz="1200" b="1" dirty="0">
+                <a:solidFill>
+                  <a:srgbClr val="F7931A"/>
+                </a:solidFill>
+                <a:latin typeface="Calibri" pitchFamily="34" charset="0"/>
+                <a:ea typeface="Calibri" pitchFamily="34" charset="-122"/>
+                <a:cs typeface="Calibri" pitchFamily="34" charset="-120"/>
+              </a:rPr>
+              <a:t>Beats persistence?</a:t>
+            </a:r>
+            <a:endParaRPr lang="en-US" sz="1200" dirty="0"/>
+          </a:p>
+        </p:txBody>
+      </p:sp>
+      <p:sp>
+        <p:nvSpPr>
+          <p:cNvPr id="21" name="Shape 19"/>
+          <p:cNvSpPr/>
+          <p:nvPr/>
+        </p:nvSpPr>
+        <p:spPr>
+          <a:xfrm>
+            <a:off x="548640" y="2011680"/>
+            <a:ext cx="3474720" cy="566928"/>
+          </a:xfrm>
+          <a:prstGeom prst="rect">
+            <a:avLst/>
+          </a:prstGeom>
+          <a:solidFill>
+            <a:srgbClr val="FFFFFF"/>
+          </a:solidFill>
+          <a:ln w="12700">
+            <a:solidFill>
+              <a:srgbClr val="CADCFC"/>
+            </a:solidFill>
+            <a:prstDash val="solid"/>
+          </a:ln>
+        </p:spPr>
+      </p:sp>
+      <p:sp>
+        <p:nvSpPr>
+          <p:cNvPr id="22" name="Text 20"/>
+          <p:cNvSpPr/>
+          <p:nvPr/>
+        </p:nvSpPr>
+        <p:spPr>
+          <a:xfrm>
+            <a:off x="548640" y="2011680"/>
+            <a:ext cx="3474720" cy="566928"/>
+          </a:xfrm>
+          <a:prstGeom prst="rect">
+            <a:avLst/>
+          </a:prstGeom>
+          <a:noFill/>
+          <a:ln/>
+        </p:spPr>
+        <p:txBody>
+          <a:bodyPr wrap="square" lIns="91440" tIns="91440" rIns="91440" bIns="91440" rtlCol="0" anchor="ctr"/>
+          <a:lstStyle/>
+          <a:p>
+            <a:pPr algn="l" indent="0" marL="0">
+              <a:buNone/>
+            </a:pPr>
+            <a:r>
+              <a:rPr lang="en-US" sz="1150" b="1" dirty="0">
+                <a:solidFill>
+                  <a:srgbClr val="0D1B2A"/>
+                </a:solidFill>
+                <a:latin typeface="Calibri" pitchFamily="34" charset="0"/>
+                <a:ea typeface="Calibri" pitchFamily="34" charset="-122"/>
+                <a:cs typeface="Calibri" pitchFamily="34" charset="-120"/>
+              </a:rPr>
+              <a:t>HAR-RV-X [live test]</a:t>
+            </a:r>
+            <a:endParaRPr lang="en-US" sz="1150" dirty="0"/>
+          </a:p>
+        </p:txBody>
+      </p:sp>
+      <p:sp>
+        <p:nvSpPr>
+          <p:cNvPr id="23" name="Shape 21"/>
+          <p:cNvSpPr/>
+          <p:nvPr/>
+        </p:nvSpPr>
+        <p:spPr>
+          <a:xfrm>
+            <a:off x="4023360" y="2011680"/>
+            <a:ext cx="1463040" cy="566928"/>
+          </a:xfrm>
+          <a:prstGeom prst="rect">
+            <a:avLst/>
+          </a:prstGeom>
+          <a:solidFill>
+            <a:srgbClr val="FFFFFF"/>
+          </a:solidFill>
+          <a:ln w="12700">
+            <a:solidFill>
+              <a:srgbClr val="CADCFC"/>
+            </a:solidFill>
+            <a:prstDash val="solid"/>
+          </a:ln>
+        </p:spPr>
+      </p:sp>
+      <p:sp>
+        <p:nvSpPr>
+          <p:cNvPr id="24" name="Text 22"/>
+          <p:cNvSpPr/>
+          <p:nvPr/>
+        </p:nvSpPr>
+        <p:spPr>
+          <a:xfrm>
+            <a:off x="4023360" y="2011680"/>
+            <a:ext cx="1463040" cy="566928"/>
+          </a:xfrm>
+          <a:prstGeom prst="rect">
+            <a:avLst/>
+          </a:prstGeom>
+          <a:noFill/>
+          <a:ln/>
+        </p:spPr>
+        <p:txBody>
+          <a:bodyPr wrap="square" lIns="0" tIns="0" rIns="0" bIns="0" rtlCol="0" anchor="ctr"/>
+          <a:lstStyle/>
+          <a:p>
+            <a:pPr algn="ctr" indent="0" marL="0">
+              <a:buNone/>
+            </a:pPr>
+            <a:r>
+              <a:rPr lang="en-US" sz="1150" dirty="0">
+                <a:solidFill>
+                  <a:srgbClr val="0D1B2A"/>
+                </a:solidFill>
+                <a:latin typeface="Calibri" pitchFamily="34" charset="0"/>
+                <a:ea typeface="Calibri" pitchFamily="34" charset="-122"/>
+                <a:cs typeface="Calibri" pitchFamily="34" charset="-120"/>
+              </a:rPr>
+              <a:t>0.001502</a:t>
+            </a:r>
+            <a:endParaRPr lang="en-US" sz="1150" dirty="0"/>
+          </a:p>
+        </p:txBody>
+      </p:sp>
+      <p:sp>
+        <p:nvSpPr>
+          <p:cNvPr id="25" name="Shape 23"/>
+          <p:cNvSpPr/>
+          <p:nvPr/>
+        </p:nvSpPr>
+        <p:spPr>
+          <a:xfrm>
+            <a:off x="5486400" y="2011680"/>
+            <a:ext cx="1463040" cy="566928"/>
+          </a:xfrm>
+          <a:prstGeom prst="rect">
+            <a:avLst/>
+          </a:prstGeom>
+          <a:solidFill>
+            <a:srgbClr val="FFFFFF"/>
+          </a:solidFill>
+          <a:ln w="12700">
+            <a:solidFill>
+              <a:srgbClr val="CADCFC"/>
+            </a:solidFill>
+            <a:prstDash val="solid"/>
+          </a:ln>
+        </p:spPr>
+      </p:sp>
+      <p:sp>
+        <p:nvSpPr>
+          <p:cNvPr id="26" name="Text 24"/>
+          <p:cNvSpPr/>
+          <p:nvPr/>
+        </p:nvSpPr>
+        <p:spPr>
+          <a:xfrm>
+            <a:off x="5486400" y="2011680"/>
+            <a:ext cx="1463040" cy="566928"/>
+          </a:xfrm>
+          <a:prstGeom prst="rect">
+            <a:avLst/>
+          </a:prstGeom>
+          <a:noFill/>
+          <a:ln/>
+        </p:spPr>
+        <p:txBody>
+          <a:bodyPr wrap="square" lIns="0" tIns="0" rIns="0" bIns="0" rtlCol="0" anchor="ctr"/>
+          <a:lstStyle/>
+          <a:p>
+            <a:pPr algn="ctr" indent="0" marL="0">
+              <a:buNone/>
+            </a:pPr>
+            <a:r>
+              <a:rPr lang="en-US" sz="1150" dirty="0">
+                <a:solidFill>
+                  <a:srgbClr val="0D1B2A"/>
+                </a:solidFill>
+                <a:latin typeface="Calibri" pitchFamily="34" charset="0"/>
+                <a:ea typeface="Calibri" pitchFamily="34" charset="-122"/>
+                <a:cs typeface="Calibri" pitchFamily="34" charset="-120"/>
+              </a:rPr>
+              <a:t>0.001259</a:t>
+            </a:r>
+            <a:endParaRPr lang="en-US" sz="1150" dirty="0"/>
+          </a:p>
+        </p:txBody>
+      </p:sp>
+      <p:sp>
+        <p:nvSpPr>
+          <p:cNvPr id="27" name="Shape 25"/>
+          <p:cNvSpPr/>
+          <p:nvPr/>
+        </p:nvSpPr>
+        <p:spPr>
+          <a:xfrm>
+            <a:off x="6949440" y="2011680"/>
+            <a:ext cx="1463040" cy="566928"/>
+          </a:xfrm>
+          <a:prstGeom prst="rect">
+            <a:avLst/>
+          </a:prstGeom>
+          <a:solidFill>
+            <a:srgbClr val="FFFFFF"/>
+          </a:solidFill>
+          <a:ln w="12700">
+            <a:solidFill>
+              <a:srgbClr val="CADCFC"/>
+            </a:solidFill>
+            <a:prstDash val="solid"/>
+          </a:ln>
+        </p:spPr>
+      </p:sp>
+      <p:sp>
+        <p:nvSpPr>
+          <p:cNvPr id="28" name="Text 26"/>
+          <p:cNvSpPr/>
+          <p:nvPr/>
+        </p:nvSpPr>
+        <p:spPr>
+          <a:xfrm>
+            <a:off x="6949440" y="2011680"/>
+            <a:ext cx="1463040" cy="566928"/>
+          </a:xfrm>
+          <a:prstGeom prst="rect">
+            <a:avLst/>
+          </a:prstGeom>
+          <a:noFill/>
+          <a:ln/>
+        </p:spPr>
+        <p:txBody>
+          <a:bodyPr wrap="square" lIns="0" tIns="0" rIns="0" bIns="0" rtlCol="0" anchor="ctr"/>
+          <a:lstStyle/>
+          <a:p>
+            <a:pPr algn="ctr" indent="0" marL="0">
+              <a:buNone/>
+            </a:pPr>
+            <a:r>
+              <a:rPr lang="en-US" sz="1150" dirty="0">
+                <a:solidFill>
+                  <a:srgbClr val="0D1B2A"/>
+                </a:solidFill>
+                <a:latin typeface="Calibri" pitchFamily="34" charset="0"/>
+                <a:ea typeface="Calibri" pitchFamily="34" charset="-122"/>
+                <a:cs typeface="Calibri" pitchFamily="34" charset="-120"/>
+              </a:rPr>
+              <a:t>0.0610</a:t>
+            </a:r>
+            <a:endParaRPr lang="en-US" sz="1150" dirty="0"/>
+          </a:p>
+        </p:txBody>
+      </p:sp>
+      <p:sp>
+        <p:nvSpPr>
+          <p:cNvPr id="29" name="Shape 27"/>
+          <p:cNvSpPr/>
+          <p:nvPr/>
+        </p:nvSpPr>
+        <p:spPr>
+          <a:xfrm>
+            <a:off x="8412480" y="2011680"/>
+            <a:ext cx="3200400" cy="566928"/>
+          </a:xfrm>
+          <a:prstGeom prst="rect">
+            <a:avLst/>
+          </a:prstGeom>
+          <a:solidFill>
+            <a:srgbClr val="FFFFFF"/>
+          </a:solidFill>
+          <a:ln w="12700">
+            <a:solidFill>
+              <a:srgbClr val="CADCFC"/>
+            </a:solidFill>
+            <a:prstDash val="solid"/>
+          </a:ln>
+        </p:spPr>
+      </p:sp>
+      <p:sp>
+        <p:nvSpPr>
+          <p:cNvPr id="30" name="Text 28"/>
+          <p:cNvSpPr/>
+          <p:nvPr/>
+        </p:nvSpPr>
+        <p:spPr>
+          <a:xfrm>
+            <a:off x="8412480" y="2011680"/>
+            <a:ext cx="3200400" cy="566928"/>
+          </a:xfrm>
+          <a:prstGeom prst="rect">
+            <a:avLst/>
+          </a:prstGeom>
+          <a:noFill/>
+          <a:ln/>
+        </p:spPr>
+        <p:txBody>
+          <a:bodyPr wrap="square" lIns="0" tIns="0" rIns="0" bIns="0" rtlCol="0" anchor="ctr"/>
+          <a:lstStyle/>
+          <a:p>
+            <a:pPr algn="ctr" indent="0" marL="0">
+              <a:buNone/>
+            </a:pPr>
+            <a:r>
+              <a:rPr lang="en-US" sz="1150" dirty="0">
+                <a:solidFill>
+                  <a:srgbClr val="0D1B2A"/>
+                </a:solidFill>
+                <a:latin typeface="Calibri" pitchFamily="34" charset="0"/>
+                <a:ea typeface="Calibri" pitchFamily="34" charset="-122"/>
+                <a:cs typeface="Calibri" pitchFamily="34" charset="-120"/>
+              </a:rPr>
+              <a:t>Yes</a:t>
+            </a:r>
+            <a:endParaRPr lang="en-US" sz="1150" dirty="0"/>
+          </a:p>
+        </p:txBody>
+      </p:sp>
+      <p:sp>
+        <p:nvSpPr>
+          <p:cNvPr id="31" name="Shape 29"/>
+          <p:cNvSpPr/>
+          <p:nvPr/>
+        </p:nvSpPr>
+        <p:spPr>
+          <a:xfrm>
+            <a:off x="548640" y="2578608"/>
+            <a:ext cx="3474720" cy="566928"/>
+          </a:xfrm>
+          <a:prstGeom prst="rect">
+            <a:avLst/>
+          </a:prstGeom>
+          <a:solidFill>
+            <a:srgbClr val="EEF1F5"/>
+          </a:solidFill>
+          <a:ln w="12700">
+            <a:solidFill>
+              <a:srgbClr val="CADCFC"/>
+            </a:solidFill>
+            <a:prstDash val="solid"/>
+          </a:ln>
+        </p:spPr>
+      </p:sp>
+      <p:sp>
+        <p:nvSpPr>
+          <p:cNvPr id="32" name="Text 30"/>
+          <p:cNvSpPr/>
+          <p:nvPr/>
+        </p:nvSpPr>
+        <p:spPr>
+          <a:xfrm>
+            <a:off x="548640" y="2578608"/>
+            <a:ext cx="3474720" cy="566928"/>
+          </a:xfrm>
+          <a:prstGeom prst="rect">
+            <a:avLst/>
+          </a:prstGeom>
+          <a:noFill/>
+          <a:ln/>
+        </p:spPr>
+        <p:txBody>
+          <a:bodyPr wrap="square" lIns="91440" tIns="91440" rIns="91440" bIns="91440" rtlCol="0" anchor="ctr"/>
+          <a:lstStyle/>
+          <a:p>
+            <a:pPr algn="l" indent="0" marL="0">
+              <a:buNone/>
+            </a:pPr>
+            <a:r>
+              <a:rPr lang="en-US" sz="1150" b="1" dirty="0">
+                <a:solidFill>
+                  <a:srgbClr val="0D1B2A"/>
+                </a:solidFill>
+                <a:latin typeface="Calibri" pitchFamily="34" charset="0"/>
+                <a:ea typeface="Calibri" pitchFamily="34" charset="-122"/>
+                <a:cs typeface="Calibri" pitchFamily="34" charset="-120"/>
+              </a:rPr>
+              <a:t>EWMA (λ=0.995) [live test]</a:t>
+            </a:r>
+            <a:endParaRPr lang="en-US" sz="1150" dirty="0"/>
+          </a:p>
+        </p:txBody>
+      </p:sp>
+      <p:sp>
+        <p:nvSpPr>
+          <p:cNvPr id="33" name="Shape 31"/>
+          <p:cNvSpPr/>
+          <p:nvPr/>
+        </p:nvSpPr>
+        <p:spPr>
+          <a:xfrm>
+            <a:off x="4023360" y="2578608"/>
+            <a:ext cx="1463040" cy="566928"/>
+          </a:xfrm>
+          <a:prstGeom prst="rect">
+            <a:avLst/>
+          </a:prstGeom>
+          <a:solidFill>
+            <a:srgbClr val="EEF1F5"/>
+          </a:solidFill>
+          <a:ln w="12700">
+            <a:solidFill>
+              <a:srgbClr val="CADCFC"/>
+            </a:solidFill>
+            <a:prstDash val="solid"/>
+          </a:ln>
+        </p:spPr>
+      </p:sp>
+      <p:sp>
+        <p:nvSpPr>
+          <p:cNvPr id="34" name="Text 32"/>
+          <p:cNvSpPr/>
+          <p:nvPr/>
+        </p:nvSpPr>
+        <p:spPr>
+          <a:xfrm>
+            <a:off x="4023360" y="2578608"/>
+            <a:ext cx="1463040" cy="566928"/>
+          </a:xfrm>
+          <a:prstGeom prst="rect">
+            <a:avLst/>
+          </a:prstGeom>
+          <a:noFill/>
+          <a:ln/>
+        </p:spPr>
+        <p:txBody>
+          <a:bodyPr wrap="square" lIns="0" tIns="0" rIns="0" bIns="0" rtlCol="0" anchor="ctr"/>
+          <a:lstStyle/>
+          <a:p>
+            <a:pPr algn="ctr" indent="0" marL="0">
+              <a:buNone/>
+            </a:pPr>
+            <a:r>
+              <a:rPr lang="en-US" sz="1150" dirty="0">
+                <a:solidFill>
+                  <a:srgbClr val="0D1B2A"/>
+                </a:solidFill>
+                <a:latin typeface="Calibri" pitchFamily="34" charset="0"/>
+                <a:ea typeface="Calibri" pitchFamily="34" charset="-122"/>
+                <a:cs typeface="Calibri" pitchFamily="34" charset="-120"/>
+              </a:rPr>
+              <a:t>0.001540</a:t>
+            </a:r>
+            <a:endParaRPr lang="en-US" sz="1150" dirty="0"/>
+          </a:p>
+        </p:txBody>
+      </p:sp>
+      <p:sp>
+        <p:nvSpPr>
+          <p:cNvPr id="35" name="Shape 33"/>
+          <p:cNvSpPr/>
+          <p:nvPr/>
+        </p:nvSpPr>
+        <p:spPr>
+          <a:xfrm>
+            <a:off x="5486400" y="2578608"/>
+            <a:ext cx="1463040" cy="566928"/>
+          </a:xfrm>
+          <a:prstGeom prst="rect">
+            <a:avLst/>
+          </a:prstGeom>
+          <a:solidFill>
+            <a:srgbClr val="EEF1F5"/>
+          </a:solidFill>
+          <a:ln w="12700">
+            <a:solidFill>
+              <a:srgbClr val="CADCFC"/>
+            </a:solidFill>
+            <a:prstDash val="solid"/>
+          </a:ln>
+        </p:spPr>
+      </p:sp>
+      <p:sp>
+        <p:nvSpPr>
+          <p:cNvPr id="36" name="Text 34"/>
+          <p:cNvSpPr/>
+          <p:nvPr/>
+        </p:nvSpPr>
+        <p:spPr>
+          <a:xfrm>
+            <a:off x="5486400" y="2578608"/>
+            <a:ext cx="1463040" cy="566928"/>
+          </a:xfrm>
+          <a:prstGeom prst="rect">
+            <a:avLst/>
+          </a:prstGeom>
+          <a:noFill/>
+          <a:ln/>
+        </p:spPr>
+        <p:txBody>
+          <a:bodyPr wrap="square" lIns="0" tIns="0" rIns="0" bIns="0" rtlCol="0" anchor="ctr"/>
+          <a:lstStyle/>
+          <a:p>
+            <a:pPr algn="ctr" indent="0" marL="0">
+              <a:buNone/>
+            </a:pPr>
+            <a:r>
+              <a:rPr lang="en-US" sz="1150" dirty="0">
+                <a:solidFill>
+                  <a:srgbClr val="0D1B2A"/>
+                </a:solidFill>
+                <a:latin typeface="Calibri" pitchFamily="34" charset="0"/>
+                <a:ea typeface="Calibri" pitchFamily="34" charset="-122"/>
+                <a:cs typeface="Calibri" pitchFamily="34" charset="-120"/>
+              </a:rPr>
+              <a:t>0.001112</a:t>
+            </a:r>
+            <a:endParaRPr lang="en-US" sz="1150" dirty="0"/>
+          </a:p>
+        </p:txBody>
+      </p:sp>
+      <p:sp>
+        <p:nvSpPr>
+          <p:cNvPr id="37" name="Shape 35"/>
+          <p:cNvSpPr/>
+          <p:nvPr/>
+        </p:nvSpPr>
+        <p:spPr>
+          <a:xfrm>
+            <a:off x="6949440" y="2578608"/>
+            <a:ext cx="1463040" cy="566928"/>
+          </a:xfrm>
+          <a:prstGeom prst="rect">
+            <a:avLst/>
+          </a:prstGeom>
+          <a:solidFill>
+            <a:srgbClr val="EEF1F5"/>
+          </a:solidFill>
+          <a:ln w="12700">
+            <a:solidFill>
+              <a:srgbClr val="CADCFC"/>
+            </a:solidFill>
+            <a:prstDash val="solid"/>
+          </a:ln>
+        </p:spPr>
+      </p:sp>
+      <p:sp>
+        <p:nvSpPr>
+          <p:cNvPr id="38" name="Text 36"/>
+          <p:cNvSpPr/>
+          <p:nvPr/>
+        </p:nvSpPr>
+        <p:spPr>
+          <a:xfrm>
+            <a:off x="6949440" y="2578608"/>
+            <a:ext cx="1463040" cy="566928"/>
+          </a:xfrm>
+          <a:prstGeom prst="rect">
+            <a:avLst/>
+          </a:prstGeom>
+          <a:noFill/>
+          <a:ln/>
+        </p:spPr>
+        <p:txBody>
+          <a:bodyPr wrap="square" lIns="0" tIns="0" rIns="0" bIns="0" rtlCol="0" anchor="ctr"/>
+          <a:lstStyle/>
+          <a:p>
+            <a:pPr algn="ctr" indent="0" marL="0">
+              <a:buNone/>
+            </a:pPr>
+            <a:r>
+              <a:rPr lang="en-US" sz="1150" dirty="0">
+                <a:solidFill>
+                  <a:srgbClr val="0D1B2A"/>
+                </a:solidFill>
+                <a:latin typeface="Calibri" pitchFamily="34" charset="0"/>
+                <a:ea typeface="Calibri" pitchFamily="34" charset="-122"/>
+                <a:cs typeface="Calibri" pitchFamily="34" charset="-120"/>
+              </a:rPr>
+              <a:t>0.0133</a:t>
+            </a:r>
+            <a:endParaRPr lang="en-US" sz="1150" dirty="0"/>
+          </a:p>
+        </p:txBody>
+      </p:sp>
+      <p:sp>
+        <p:nvSpPr>
+          <p:cNvPr id="39" name="Shape 37"/>
+          <p:cNvSpPr/>
+          <p:nvPr/>
+        </p:nvSpPr>
+        <p:spPr>
+          <a:xfrm>
+            <a:off x="8412480" y="2578608"/>
+            <a:ext cx="3200400" cy="566928"/>
+          </a:xfrm>
+          <a:prstGeom prst="rect">
+            <a:avLst/>
+          </a:prstGeom>
+          <a:solidFill>
+            <a:srgbClr val="EEF1F5"/>
+          </a:solidFill>
+          <a:ln w="12700">
+            <a:solidFill>
+              <a:srgbClr val="CADCFC"/>
+            </a:solidFill>
+            <a:prstDash val="solid"/>
+          </a:ln>
+        </p:spPr>
+      </p:sp>
+      <p:sp>
+        <p:nvSpPr>
+          <p:cNvPr id="40" name="Text 38"/>
+          <p:cNvSpPr/>
+          <p:nvPr/>
+        </p:nvSpPr>
+        <p:spPr>
+          <a:xfrm>
+            <a:off x="8412480" y="2578608"/>
+            <a:ext cx="3200400" cy="566928"/>
+          </a:xfrm>
+          <a:prstGeom prst="rect">
+            <a:avLst/>
+          </a:prstGeom>
+          <a:noFill/>
+          <a:ln/>
+        </p:spPr>
+        <p:txBody>
+          <a:bodyPr wrap="square" lIns="0" tIns="0" rIns="0" bIns="0" rtlCol="0" anchor="ctr"/>
+          <a:lstStyle/>
+          <a:p>
+            <a:pPr algn="ctr" indent="0" marL="0">
+              <a:buNone/>
+            </a:pPr>
+            <a:r>
+              <a:rPr lang="en-US" sz="1150" dirty="0">
+                <a:solidFill>
+                  <a:srgbClr val="0D1B2A"/>
+                </a:solidFill>
+                <a:latin typeface="Calibri" pitchFamily="34" charset="0"/>
+                <a:ea typeface="Calibri" pitchFamily="34" charset="-122"/>
+                <a:cs typeface="Calibri" pitchFamily="34" charset="-120"/>
+              </a:rPr>
+              <a:t>Yes</a:t>
+            </a:r>
+            <a:endParaRPr lang="en-US" sz="1150" dirty="0"/>
+          </a:p>
+        </p:txBody>
+      </p:sp>
+      <p:sp>
+        <p:nvSpPr>
+          <p:cNvPr id="41" name="Shape 39"/>
+          <p:cNvSpPr/>
+          <p:nvPr/>
+        </p:nvSpPr>
+        <p:spPr>
+          <a:xfrm>
+            <a:off x="548640" y="3145536"/>
+            <a:ext cx="3474720" cy="566928"/>
+          </a:xfrm>
+          <a:prstGeom prst="rect">
+            <a:avLst/>
+          </a:prstGeom>
+          <a:solidFill>
+            <a:srgbClr val="FFFFFF"/>
+          </a:solidFill>
+          <a:ln w="12700">
+            <a:solidFill>
+              <a:srgbClr val="CADCFC"/>
+            </a:solidFill>
+            <a:prstDash val="solid"/>
+          </a:ln>
+        </p:spPr>
+      </p:sp>
+      <p:sp>
+        <p:nvSpPr>
+          <p:cNvPr id="42" name="Text 40"/>
+          <p:cNvSpPr/>
+          <p:nvPr/>
+        </p:nvSpPr>
+        <p:spPr>
+          <a:xfrm>
+            <a:off x="548640" y="3145536"/>
+            <a:ext cx="3474720" cy="566928"/>
+          </a:xfrm>
+          <a:prstGeom prst="rect">
+            <a:avLst/>
+          </a:prstGeom>
+          <a:noFill/>
+          <a:ln/>
+        </p:spPr>
+        <p:txBody>
+          <a:bodyPr wrap="square" lIns="91440" tIns="91440" rIns="91440" bIns="91440" rtlCol="0" anchor="ctr"/>
+          <a:lstStyle/>
+          <a:p>
+            <a:pPr algn="l" indent="0" marL="0">
+              <a:buNone/>
+            </a:pPr>
+            <a:r>
+              <a:rPr lang="en-US" sz="1150" b="1" dirty="0">
+                <a:solidFill>
+                  <a:srgbClr val="0D1B2A"/>
+                </a:solidFill>
+                <a:latin typeface="Calibri" pitchFamily="34" charset="0"/>
+                <a:ea typeface="Calibri" pitchFamily="34" charset="-122"/>
+                <a:cs typeface="Calibri" pitchFamily="34" charset="-120"/>
+              </a:rPr>
+              <a:t>Naive persistence [live test]</a:t>
+            </a:r>
+            <a:endParaRPr lang="en-US" sz="1150" dirty="0"/>
+          </a:p>
+        </p:txBody>
+      </p:sp>
+      <p:sp>
+        <p:nvSpPr>
+          <p:cNvPr id="43" name="Shape 41"/>
+          <p:cNvSpPr/>
+          <p:nvPr/>
+        </p:nvSpPr>
+        <p:spPr>
+          <a:xfrm>
+            <a:off x="4023360" y="3145536"/>
+            <a:ext cx="1463040" cy="566928"/>
+          </a:xfrm>
+          <a:prstGeom prst="rect">
+            <a:avLst/>
+          </a:prstGeom>
+          <a:solidFill>
+            <a:srgbClr val="FFFFFF"/>
+          </a:solidFill>
+          <a:ln w="12700">
+            <a:solidFill>
+              <a:srgbClr val="CADCFC"/>
+            </a:solidFill>
+            <a:prstDash val="solid"/>
+          </a:ln>
+        </p:spPr>
+      </p:sp>
+      <p:sp>
+        <p:nvSpPr>
+          <p:cNvPr id="44" name="Text 42"/>
+          <p:cNvSpPr/>
+          <p:nvPr/>
+        </p:nvSpPr>
+        <p:spPr>
+          <a:xfrm>
+            <a:off x="4023360" y="3145536"/>
+            <a:ext cx="1463040" cy="566928"/>
+          </a:xfrm>
+          <a:prstGeom prst="rect">
+            <a:avLst/>
+          </a:prstGeom>
+          <a:noFill/>
+          <a:ln/>
+        </p:spPr>
+        <p:txBody>
+          <a:bodyPr wrap="square" lIns="0" tIns="0" rIns="0" bIns="0" rtlCol="0" anchor="ctr"/>
+          <a:lstStyle/>
+          <a:p>
+            <a:pPr algn="ctr" indent="0" marL="0">
+              <a:buNone/>
+            </a:pPr>
+            <a:r>
+              <a:rPr lang="en-US" sz="1150" dirty="0">
+                <a:solidFill>
+                  <a:srgbClr val="0D1B2A"/>
+                </a:solidFill>
+                <a:latin typeface="Calibri" pitchFamily="34" charset="0"/>
+                <a:ea typeface="Calibri" pitchFamily="34" charset="-122"/>
+                <a:cs typeface="Calibri" pitchFamily="34" charset="-120"/>
+              </a:rPr>
+              <a:t>0.001676</a:t>
+            </a:r>
+            <a:endParaRPr lang="en-US" sz="1150" dirty="0"/>
+          </a:p>
+        </p:txBody>
+      </p:sp>
+      <p:sp>
+        <p:nvSpPr>
+          <p:cNvPr id="45" name="Shape 43"/>
+          <p:cNvSpPr/>
+          <p:nvPr/>
+        </p:nvSpPr>
+        <p:spPr>
+          <a:xfrm>
+            <a:off x="5486400" y="3145536"/>
+            <a:ext cx="1463040" cy="566928"/>
+          </a:xfrm>
+          <a:prstGeom prst="rect">
+            <a:avLst/>
+          </a:prstGeom>
+          <a:solidFill>
+            <a:srgbClr val="FFFFFF"/>
+          </a:solidFill>
+          <a:ln w="12700">
+            <a:solidFill>
+              <a:srgbClr val="CADCFC"/>
+            </a:solidFill>
+            <a:prstDash val="solid"/>
+          </a:ln>
+        </p:spPr>
+      </p:sp>
+      <p:sp>
+        <p:nvSpPr>
+          <p:cNvPr id="46" name="Text 44"/>
+          <p:cNvSpPr/>
+          <p:nvPr/>
+        </p:nvSpPr>
+        <p:spPr>
+          <a:xfrm>
+            <a:off x="5486400" y="3145536"/>
+            <a:ext cx="1463040" cy="566928"/>
+          </a:xfrm>
+          <a:prstGeom prst="rect">
+            <a:avLst/>
+          </a:prstGeom>
+          <a:noFill/>
+          <a:ln/>
+        </p:spPr>
+        <p:txBody>
+          <a:bodyPr wrap="square" lIns="0" tIns="0" rIns="0" bIns="0" rtlCol="0" anchor="ctr"/>
+          <a:lstStyle/>
+          <a:p>
+            <a:pPr algn="ctr" indent="0" marL="0">
+              <a:buNone/>
+            </a:pPr>
+            <a:r>
+              <a:rPr lang="en-US" sz="1150" dirty="0">
+                <a:solidFill>
+                  <a:srgbClr val="0D1B2A"/>
+                </a:solidFill>
+                <a:latin typeface="Calibri" pitchFamily="34" charset="0"/>
+                <a:ea typeface="Calibri" pitchFamily="34" charset="-122"/>
+                <a:cs typeface="Calibri" pitchFamily="34" charset="-120"/>
+              </a:rPr>
+              <a:t>0.001138</a:t>
+            </a:r>
+            <a:endParaRPr lang="en-US" sz="1150" dirty="0"/>
+          </a:p>
+        </p:txBody>
+      </p:sp>
+      <p:sp>
+        <p:nvSpPr>
+          <p:cNvPr id="47" name="Shape 45"/>
+          <p:cNvSpPr/>
+          <p:nvPr/>
+        </p:nvSpPr>
+        <p:spPr>
+          <a:xfrm>
+            <a:off x="6949440" y="3145536"/>
+            <a:ext cx="1463040" cy="566928"/>
+          </a:xfrm>
+          <a:prstGeom prst="rect">
+            <a:avLst/>
+          </a:prstGeom>
+          <a:solidFill>
+            <a:srgbClr val="FFFFFF"/>
+          </a:solidFill>
+          <a:ln w="12700">
+            <a:solidFill>
+              <a:srgbClr val="CADCFC"/>
+            </a:solidFill>
+            <a:prstDash val="solid"/>
+          </a:ln>
+        </p:spPr>
+      </p:sp>
+      <p:sp>
+        <p:nvSpPr>
+          <p:cNvPr id="48" name="Text 46"/>
+          <p:cNvSpPr/>
+          <p:nvPr/>
+        </p:nvSpPr>
+        <p:spPr>
+          <a:xfrm>
+            <a:off x="6949440" y="3145536"/>
+            <a:ext cx="1463040" cy="566928"/>
+          </a:xfrm>
+          <a:prstGeom prst="rect">
+            <a:avLst/>
+          </a:prstGeom>
+          <a:noFill/>
+          <a:ln/>
+        </p:spPr>
+        <p:txBody>
+          <a:bodyPr wrap="square" lIns="0" tIns="0" rIns="0" bIns="0" rtlCol="0" anchor="ctr"/>
+          <a:lstStyle/>
+          <a:p>
+            <a:pPr algn="ctr" indent="0" marL="0">
+              <a:buNone/>
+            </a:pPr>
+            <a:r>
+              <a:rPr lang="en-US" sz="1150" dirty="0">
+                <a:solidFill>
+                  <a:srgbClr val="0D1B2A"/>
+                </a:solidFill>
+                <a:latin typeface="Calibri" pitchFamily="34" charset="0"/>
+                <a:ea typeface="Calibri" pitchFamily="34" charset="-122"/>
+                <a:cs typeface="Calibri" pitchFamily="34" charset="-120"/>
+              </a:rPr>
+              <a:t>-0.1686</a:t>
+            </a:r>
+            <a:endParaRPr lang="en-US" sz="1150" dirty="0"/>
+          </a:p>
+        </p:txBody>
+      </p:sp>
+      <p:sp>
+        <p:nvSpPr>
+          <p:cNvPr id="49" name="Shape 47"/>
+          <p:cNvSpPr/>
+          <p:nvPr/>
+        </p:nvSpPr>
+        <p:spPr>
+          <a:xfrm>
+            <a:off x="8412480" y="3145536"/>
+            <a:ext cx="3200400" cy="566928"/>
+          </a:xfrm>
+          <a:prstGeom prst="rect">
+            <a:avLst/>
+          </a:prstGeom>
+          <a:solidFill>
+            <a:srgbClr val="FFFFFF"/>
+          </a:solidFill>
+          <a:ln w="12700">
+            <a:solidFill>
+              <a:srgbClr val="CADCFC"/>
+            </a:solidFill>
+            <a:prstDash val="solid"/>
+          </a:ln>
+        </p:spPr>
+      </p:sp>
+      <p:sp>
+        <p:nvSpPr>
+          <p:cNvPr id="50" name="Text 48"/>
+          <p:cNvSpPr/>
+          <p:nvPr/>
+        </p:nvSpPr>
+        <p:spPr>
+          <a:xfrm>
+            <a:off x="8412480" y="3145536"/>
+            <a:ext cx="3200400" cy="566928"/>
+          </a:xfrm>
+          <a:prstGeom prst="rect">
+            <a:avLst/>
+          </a:prstGeom>
+          <a:noFill/>
+          <a:ln/>
+        </p:spPr>
+        <p:txBody>
+          <a:bodyPr wrap="square" lIns="0" tIns="0" rIns="0" bIns="0" rtlCol="0" anchor="ctr"/>
+          <a:lstStyle/>
+          <a:p>
+            <a:pPr algn="ctr" indent="0" marL="0">
+              <a:buNone/>
+            </a:pPr>
+            <a:r>
+              <a:rPr lang="en-US" sz="1150" dirty="0">
+                <a:solidFill>
+                  <a:srgbClr val="0D1B2A"/>
+                </a:solidFill>
+                <a:latin typeface="Calibri" pitchFamily="34" charset="0"/>
+                <a:ea typeface="Calibri" pitchFamily="34" charset="-122"/>
+                <a:cs typeface="Calibri" pitchFamily="34" charset="-120"/>
+              </a:rPr>
+              <a:t>Baseline</a:t>
+            </a:r>
+            <a:endParaRPr lang="en-US" sz="1150" dirty="0"/>
+          </a:p>
+        </p:txBody>
+      </p:sp>
+      <p:sp>
+        <p:nvSpPr>
+          <p:cNvPr id="51" name="Shape 49"/>
+          <p:cNvSpPr/>
+          <p:nvPr/>
+        </p:nvSpPr>
+        <p:spPr>
+          <a:xfrm>
+            <a:off x="548640" y="3712464"/>
+            <a:ext cx="3474720" cy="566928"/>
+          </a:xfrm>
+          <a:prstGeom prst="rect">
+            <a:avLst/>
+          </a:prstGeom>
+          <a:solidFill>
+            <a:srgbClr val="EEF1F5"/>
+          </a:solidFill>
+          <a:ln w="12700">
+            <a:solidFill>
+              <a:srgbClr val="CADCFC"/>
+            </a:solidFill>
+            <a:prstDash val="solid"/>
+          </a:ln>
+        </p:spPr>
+      </p:sp>
+      <p:sp>
+        <p:nvSpPr>
+          <p:cNvPr id="52" name="Text 50"/>
+          <p:cNvSpPr/>
+          <p:nvPr/>
+        </p:nvSpPr>
+        <p:spPr>
+          <a:xfrm>
+            <a:off x="548640" y="3712464"/>
+            <a:ext cx="3474720" cy="566928"/>
+          </a:xfrm>
+          <a:prstGeom prst="rect">
+            <a:avLst/>
+          </a:prstGeom>
+          <a:noFill/>
+          <a:ln/>
+        </p:spPr>
+        <p:txBody>
+          <a:bodyPr wrap="square" lIns="91440" tIns="91440" rIns="91440" bIns="91440" rtlCol="0" anchor="ctr"/>
+          <a:lstStyle/>
+          <a:p>
+            <a:pPr algn="l" indent="0" marL="0">
+              <a:buNone/>
+            </a:pPr>
+            <a:r>
+              <a:rPr lang="en-US" sz="1150" b="1" dirty="0">
+                <a:solidFill>
+                  <a:srgbClr val="0D1B2A"/>
+                </a:solidFill>
+                <a:latin typeface="Calibri" pitchFamily="34" charset="0"/>
+                <a:ea typeface="Calibri" pitchFamily="34" charset="-122"/>
+                <a:cs typeface="Calibri" pitchFamily="34" charset="-120"/>
+              </a:rPr>
+              <a:t>GARCH [live test]</a:t>
+            </a:r>
+            <a:endParaRPr lang="en-US" sz="1150" dirty="0"/>
+          </a:p>
+        </p:txBody>
+      </p:sp>
+      <p:sp>
+        <p:nvSpPr>
+          <p:cNvPr id="53" name="Shape 51"/>
+          <p:cNvSpPr/>
+          <p:nvPr/>
+        </p:nvSpPr>
+        <p:spPr>
+          <a:xfrm>
+            <a:off x="4023360" y="3712464"/>
+            <a:ext cx="1463040" cy="566928"/>
+          </a:xfrm>
+          <a:prstGeom prst="rect">
+            <a:avLst/>
+          </a:prstGeom>
+          <a:solidFill>
+            <a:srgbClr val="EEF1F5"/>
+          </a:solidFill>
+          <a:ln w="12700">
+            <a:solidFill>
+              <a:srgbClr val="CADCFC"/>
+            </a:solidFill>
+            <a:prstDash val="solid"/>
+          </a:ln>
+        </p:spPr>
+      </p:sp>
+      <p:sp>
+        <p:nvSpPr>
+          <p:cNvPr id="54" name="Text 52"/>
+          <p:cNvSpPr/>
+          <p:nvPr/>
+        </p:nvSpPr>
+        <p:spPr>
+          <a:xfrm>
+            <a:off x="4023360" y="3712464"/>
+            <a:ext cx="1463040" cy="566928"/>
+          </a:xfrm>
+          <a:prstGeom prst="rect">
+            <a:avLst/>
+          </a:prstGeom>
+          <a:noFill/>
+          <a:ln/>
+        </p:spPr>
+        <p:txBody>
+          <a:bodyPr wrap="square" lIns="0" tIns="0" rIns="0" bIns="0" rtlCol="0" anchor="ctr"/>
+          <a:lstStyle/>
+          <a:p>
+            <a:pPr algn="ctr" indent="0" marL="0">
+              <a:buNone/>
+            </a:pPr>
+            <a:r>
+              <a:rPr lang="en-US" sz="1150" dirty="0">
+                <a:solidFill>
+                  <a:srgbClr val="0D1B2A"/>
+                </a:solidFill>
+                <a:latin typeface="Calibri" pitchFamily="34" charset="0"/>
+                <a:ea typeface="Calibri" pitchFamily="34" charset="-122"/>
+                <a:cs typeface="Calibri" pitchFamily="34" charset="-120"/>
+              </a:rPr>
+              <a:t>0.016385</a:t>
+            </a:r>
+            <a:endParaRPr lang="en-US" sz="1150" dirty="0"/>
+          </a:p>
+        </p:txBody>
+      </p:sp>
+      <p:sp>
+        <p:nvSpPr>
+          <p:cNvPr id="55" name="Shape 53"/>
+          <p:cNvSpPr/>
+          <p:nvPr/>
+        </p:nvSpPr>
+        <p:spPr>
+          <a:xfrm>
+            <a:off x="5486400" y="3712464"/>
+            <a:ext cx="1463040" cy="566928"/>
+          </a:xfrm>
+          <a:prstGeom prst="rect">
+            <a:avLst/>
+          </a:prstGeom>
+          <a:solidFill>
+            <a:srgbClr val="EEF1F5"/>
+          </a:solidFill>
+          <a:ln w="12700">
+            <a:solidFill>
+              <a:srgbClr val="CADCFC"/>
+            </a:solidFill>
+            <a:prstDash val="solid"/>
+          </a:ln>
+        </p:spPr>
+      </p:sp>
+      <p:sp>
+        <p:nvSpPr>
+          <p:cNvPr id="56" name="Text 54"/>
+          <p:cNvSpPr/>
+          <p:nvPr/>
+        </p:nvSpPr>
+        <p:spPr>
+          <a:xfrm>
+            <a:off x="5486400" y="3712464"/>
+            <a:ext cx="1463040" cy="566928"/>
+          </a:xfrm>
+          <a:prstGeom prst="rect">
+            <a:avLst/>
+          </a:prstGeom>
+          <a:noFill/>
+          <a:ln/>
+        </p:spPr>
+        <p:txBody>
+          <a:bodyPr wrap="square" lIns="0" tIns="0" rIns="0" bIns="0" rtlCol="0" anchor="ctr"/>
+          <a:lstStyle/>
+          <a:p>
+            <a:pPr algn="ctr" indent="0" marL="0">
+              <a:buNone/>
+            </a:pPr>
+            <a:r>
+              <a:rPr lang="en-US" sz="1150" dirty="0">
+                <a:solidFill>
+                  <a:srgbClr val="0D1B2A"/>
+                </a:solidFill>
+                <a:latin typeface="Calibri" pitchFamily="34" charset="0"/>
+                <a:ea typeface="Calibri" pitchFamily="34" charset="-122"/>
+                <a:cs typeface="Calibri" pitchFamily="34" charset="-120"/>
+              </a:rPr>
+              <a:t>0.016308</a:t>
+            </a:r>
+            <a:endParaRPr lang="en-US" sz="1150" dirty="0"/>
+          </a:p>
+        </p:txBody>
+      </p:sp>
+      <p:sp>
+        <p:nvSpPr>
+          <p:cNvPr id="57" name="Shape 55"/>
+          <p:cNvSpPr/>
+          <p:nvPr/>
+        </p:nvSpPr>
+        <p:spPr>
+          <a:xfrm>
+            <a:off x="6949440" y="3712464"/>
+            <a:ext cx="1463040" cy="566928"/>
+          </a:xfrm>
+          <a:prstGeom prst="rect">
+            <a:avLst/>
+          </a:prstGeom>
+          <a:solidFill>
+            <a:srgbClr val="EEF1F5"/>
+          </a:solidFill>
+          <a:ln w="12700">
+            <a:solidFill>
+              <a:srgbClr val="CADCFC"/>
+            </a:solidFill>
+            <a:prstDash val="solid"/>
+          </a:ln>
+        </p:spPr>
+      </p:sp>
+      <p:sp>
+        <p:nvSpPr>
+          <p:cNvPr id="58" name="Text 56"/>
+          <p:cNvSpPr/>
+          <p:nvPr/>
+        </p:nvSpPr>
+        <p:spPr>
+          <a:xfrm>
+            <a:off x="6949440" y="3712464"/>
+            <a:ext cx="1463040" cy="566928"/>
+          </a:xfrm>
+          <a:prstGeom prst="rect">
+            <a:avLst/>
+          </a:prstGeom>
+          <a:noFill/>
+          <a:ln/>
+        </p:spPr>
+        <p:txBody>
+          <a:bodyPr wrap="square" lIns="0" tIns="0" rIns="0" bIns="0" rtlCol="0" anchor="ctr"/>
+          <a:lstStyle/>
+          <a:p>
+            <a:pPr algn="ctr" indent="0" marL="0">
+              <a:buNone/>
+            </a:pPr>
+            <a:r>
+              <a:rPr lang="en-US" sz="1150" dirty="0">
+                <a:solidFill>
+                  <a:srgbClr val="0D1B2A"/>
+                </a:solidFill>
+                <a:latin typeface="Calibri" pitchFamily="34" charset="0"/>
+                <a:ea typeface="Calibri" pitchFamily="34" charset="-122"/>
+                <a:cs typeface="Calibri" pitchFamily="34" charset="-120"/>
+              </a:rPr>
+              <a:t>-110.6779</a:t>
+            </a:r>
+            <a:endParaRPr lang="en-US" sz="1150" dirty="0"/>
+          </a:p>
+        </p:txBody>
+      </p:sp>
+      <p:sp>
+        <p:nvSpPr>
+          <p:cNvPr id="59" name="Shape 57"/>
+          <p:cNvSpPr/>
+          <p:nvPr/>
+        </p:nvSpPr>
+        <p:spPr>
+          <a:xfrm>
+            <a:off x="8412480" y="3712464"/>
+            <a:ext cx="3200400" cy="566928"/>
+          </a:xfrm>
+          <a:prstGeom prst="rect">
+            <a:avLst/>
+          </a:prstGeom>
+          <a:solidFill>
+            <a:srgbClr val="EEF1F5"/>
+          </a:solidFill>
+          <a:ln w="12700">
+            <a:solidFill>
+              <a:srgbClr val="CADCFC"/>
+            </a:solidFill>
+            <a:prstDash val="solid"/>
+          </a:ln>
+        </p:spPr>
+      </p:sp>
+      <p:sp>
+        <p:nvSpPr>
+          <p:cNvPr id="60" name="Text 58"/>
+          <p:cNvSpPr/>
+          <p:nvPr/>
+        </p:nvSpPr>
+        <p:spPr>
+          <a:xfrm>
+            <a:off x="8412480" y="3712464"/>
+            <a:ext cx="3200400" cy="566928"/>
+          </a:xfrm>
+          <a:prstGeom prst="rect">
+            <a:avLst/>
+          </a:prstGeom>
+          <a:noFill/>
+          <a:ln/>
+        </p:spPr>
+        <p:txBody>
+          <a:bodyPr wrap="square" lIns="0" tIns="0" rIns="0" bIns="0" rtlCol="0" anchor="ctr"/>
+          <a:lstStyle/>
+          <a:p>
+            <a:pPr algn="ctr" indent="0" marL="0">
+              <a:buNone/>
+            </a:pPr>
+            <a:r>
+              <a:rPr lang="en-US" sz="1150" dirty="0">
+                <a:solidFill>
+                  <a:srgbClr val="0D1B2A"/>
+                </a:solidFill>
+                <a:latin typeface="Calibri" pitchFamily="34" charset="0"/>
+                <a:ea typeface="Calibri" pitchFamily="34" charset="-122"/>
+                <a:cs typeface="Calibri" pitchFamily="34" charset="-120"/>
+              </a:rPr>
+              <a:t>No</a:t>
+            </a:r>
+            <a:endParaRPr lang="en-US" sz="1150" dirty="0"/>
+          </a:p>
+        </p:txBody>
+      </p:sp>
+      <p:sp>
+        <p:nvSpPr>
+          <p:cNvPr id="71" name="Text 69"/>
+          <p:cNvSpPr/>
+          <p:nvPr/>
+        </p:nvSpPr>
+        <p:spPr>
+          <a:xfrm>
+            <a:off x="548640" y="4389120"/>
+            <a:ext cx="11064240" cy="274320"/>
+          </a:xfrm>
+          <a:prstGeom prst="rect">
+            <a:avLst/>
+          </a:prstGeom>
+          <a:noFill/>
+          <a:ln/>
+        </p:spPr>
+        <p:txBody>
+          <a:bodyPr wrap="square" rtlCol="0" anchor="ctr"/>
+          <a:lstStyle/>
+          <a:p>
+            <a:pPr algn="ctr" indent="0" marL="0">
+              <a:buNone/>
+            </a:pPr>
+            <a:r>
+              <a:rPr lang="en-US" sz="1050" i="1" dirty="0">
+                <a:solidFill>
+                  <a:srgbClr val="5C6B7A"/>
+                </a:solidFill>
+                <a:latin typeface="Calibri" pitchFamily="34" charset="0"/>
+                <a:ea typeface="Calibri" pitchFamily="34" charset="-122"/>
+                <a:cs typeface="Calibri" pitchFamily="34" charset="-120"/>
+              </a:rPr>
+              <a:t>Sorted by RMSE; only the 3 purpose-built models tested prospectively (Holt-Winters was not).</a:t>
+            </a:r>
+            <a:endParaRPr lang="en-US" sz="1050" dirty="0"/>
+          </a:p>
+        </p:txBody>
+      </p:sp>
+      <p:sp>
+        <p:nvSpPr>
+          <p:cNvPr id="72" name="Shape 70"/>
+          <p:cNvSpPr/>
+          <p:nvPr/>
+        </p:nvSpPr>
+        <p:spPr>
+          <a:xfrm>
+            <a:off x="548640" y="4782312"/>
+            <a:ext cx="11064240" cy="914400"/>
+          </a:xfrm>
+          <a:prstGeom prst="roundRect">
+            <a:avLst>
+              <a:gd name="adj" fmla="val 8000"/>
+            </a:avLst>
+          </a:prstGeom>
+          <a:solidFill>
+            <a:srgbClr val="FFFFFF"/>
+          </a:solidFill>
+          <a:ln w="19050">
+            <a:solidFill>
+              <a:srgbClr val="F7931A"/>
+            </a:solidFill>
+            <a:prstDash val="solid"/>
+          </a:ln>
+        </p:spPr>
+      </p:sp>
+      <p:sp>
+        <p:nvSpPr>
+          <p:cNvPr id="73" name="Text 71"/>
+          <p:cNvSpPr/>
+          <p:nvPr/>
+        </p:nvSpPr>
+        <p:spPr>
+          <a:xfrm>
+            <a:off x="822960" y="4901184"/>
+            <a:ext cx="10515600" cy="731520"/>
+          </a:xfrm>
+          <a:prstGeom prst="rect">
+            <a:avLst/>
+          </a:prstGeom>
+          <a:noFill/>
+          <a:ln/>
+        </p:spPr>
+        <p:txBody>
+          <a:bodyPr wrap="square" rtlCol="0" anchor="t"/>
+          <a:lstStyle/>
+          <a:p>
+            <a:pPr indent="0" marL="0">
+              <a:lnSpc>
+                <a:spcPct val="112000"/>
+              </a:lnSpc>
+              <a:buNone/>
+            </a:pPr>
+            <a:r>
+              <a:rPr lang="en-US" sz="1200" b="1" dirty="0">
+                <a:solidFill>
+                  <a:srgbClr val="F7931A"/>
+                </a:solidFill>
+                <a:latin typeface="Calibri" pitchFamily="34" charset="0"/>
+                <a:ea typeface="Calibri" pitchFamily="34" charset="-122"/>
+                <a:cs typeface="Calibri" pitchFamily="34" charset="-120"/>
+              </a:rPr>
+              <a:t>Best model:  </a:t>
+            </a:r>
+            <a:pPr indent="0" marL="0">
+              <a:lnSpc>
+                <a:spcPct val="112000"/>
+              </a:lnSpc>
+              <a:buNone/>
+            </a:pPr>
+            <a:r>
+              <a:rPr lang="en-US" sz="1200" dirty="0">
+                <a:solidFill>
+                  <a:srgbClr val="0D1B2A"/>
+                </a:solidFill>
+                <a:latin typeface="Calibri" pitchFamily="34" charset="0"/>
+                <a:ea typeface="Calibri" pitchFamily="34" charset="-122"/>
+                <a:cs typeface="Calibri" pitchFamily="34" charset="-120"/>
+              </a:rPr>
+              <a:t>HAR-RV-X, the strongest model on every metric on genuinely unseen data (RMSE 0.001502, R² 0.0610). EWMA is a close second and has the lowest MAPE of any model (22.90%). Naive persistence, no longer propped up by an easy horizon, posts a negative R². GARCH collapses entirely (R² -110.7, MAPE 409%) — a structural weakness at this horizon, not a bug.</a:t>
+            </a:r>
+            <a:endParaRPr lang="en-US" sz="1200" dirty="0"/>
+          </a:p>
+        </p:txBody>
+      </p:sp>
+    </p:spTree>
+  </p:cSld>
+  <p:clrMapOvr>
+    <a:masterClrMapping/>
+  </p:clrMapOvr>
+</p:sld>
+</file>
+
+<file path=ppt/slides/slide13.xml><?xml version="1.0" encoding="utf-8"?>
 <p:sld xmlns:a="http://schemas.openxmlformats.org/drawingml/2006/main" xmlns:r="http://schemas.openxmlformats.org/officeDocument/2006/relationships" xmlns:p="http://schemas.openxmlformats.org/presentationml/2006/main">
   <p:cSld name="Slide 12">
     <p:bg>
@@ -5944,7 +8026,7 @@
                 <a:ea typeface="Calibri" pitchFamily="34" charset="-122"/>
                 <a:cs typeface="Calibri" pitchFamily="34" charset="-120"/>
               </a:rPr>
-              <a:t>12</a:t>
+              <a:t>13</a:t>
             </a:r>
             <a:endParaRPr lang="en-US" sz="900" dirty="0"/>
           </a:p>
@@ -6312,7 +8394,7 @@
                 <a:ea typeface="Calibri" pitchFamily="34" charset="-122"/>
                 <a:cs typeface="Calibri" pitchFamily="34" charset="-120"/>
               </a:rPr>
-              <a:t>GARCH forecast is a static fit, not a rolling refit</a:t>
+              <a:t>GARCH's forecast mean-reverts toward a long-run average well before 168 hours are up — a structural weakness at this horizon, not a bug</a:t>
             </a:r>
             <a:endParaRPr lang="en-US" sz="1100" dirty="0"/>
           </a:p>
@@ -6336,7 +8418,7 @@
                 <a:ea typeface="Calibri" pitchFamily="34" charset="-122"/>
                 <a:cs typeface="Calibri" pitchFamily="34" charset="-120"/>
               </a:rPr>
-              <a:t>Single asset: no cross-asset spillover signal</a:t>
+              <a:t>RSI/EMA/MACD/Bollinger width as extra regressors, and a HAR-RV-X + EWMA ensemble, were both tested and didn't survive proper validation</a:t>
             </a:r>
             <a:endParaRPr lang="en-US" sz="1100" dirty="0"/>
           </a:p>
@@ -6360,7 +8442,7 @@
                 <a:ea typeface="Calibri" pitchFamily="34" charset="-122"/>
                 <a:cs typeface="Calibri" pitchFamily="34" charset="-120"/>
               </a:rPr>
-              <a:t>LSTM is data-hungry and overfits a noisy target</a:t>
+              <a:t>Single asset: no cross-asset spillover signal from other coins is used</a:t>
             </a:r>
             <a:endParaRPr lang="en-US" sz="1100" dirty="0"/>
           </a:p>
@@ -6568,7 +8650,7 @@
                 <a:ea typeface="Calibri" pitchFamily="34" charset="-122"/>
                 <a:cs typeface="Calibri" pitchFamily="34" charset="-120"/>
               </a:rPr>
-              <a:t>Ensemble the three tuned models</a:t>
+              <a:t>A genuine stacked ensemble (learned, not the fixed blend that failed validation)</a:t>
             </a:r>
             <a:endParaRPr lang="en-US" sz="1100" dirty="0"/>
           </a:p>
@@ -6582,7 +8664,7 @@
 </p:sld>
 </file>
 
-<file path=ppt/slides/slide13.xml><?xml version="1.0" encoding="utf-8"?>
+<file path=ppt/slides/slide14.xml><?xml version="1.0" encoding="utf-8"?>
 <p:sld xmlns:a="http://schemas.openxmlformats.org/drawingml/2006/main" xmlns:r="http://schemas.openxmlformats.org/officeDocument/2006/relationships" xmlns:p="http://schemas.openxmlformats.org/presentationml/2006/main">
   <p:cSld name="Slide 13">
     <p:bg>
@@ -7462,7 +9544,7 @@
                 <a:ea typeface="Cambria" pitchFamily="34" charset="-122"/>
                 <a:cs typeface="Cambria" pitchFamily="34" charset="-120"/>
               </a:rPr>
-              <a:t>The target: 7-day realised volatility, updated hourly.</a:t>
+              <a:t>The target: 7-day realised volatility, 168 hours ahead.</a:t>
             </a:r>
             <a:endParaRPr lang="en-US" sz="1500" dirty="0"/>
           </a:p>
@@ -7501,7 +9583,7 @@
                 <a:ea typeface="Calibri" pitchFamily="34" charset="-122"/>
                 <a:cs typeface="Calibri" pitchFamily="34" charset="-120"/>
               </a:rPr>
-              <a:t>Rolling standard deviation of hourly returns over a 168-hour window.</a:t>
+              <a:t>Rolling std. dev. of hourly returns over a 168-hour window — forecast 168 hours (7 days) into the future, not the next hour.</a:t>
             </a:r>
             <a:endParaRPr lang="en-US" sz="1250" dirty="0"/>
           </a:p>
@@ -7599,7 +9681,7 @@
                 <a:ea typeface="Cambria" pitchFamily="34" charset="-122"/>
                 <a:cs typeface="Cambria" pitchFamily="34" charset="-120"/>
               </a:rPr>
-              <a:t>Data: 10 years of hourly BTC/USDT from Binance via CCXT.</a:t>
+              <a:t>Data: hourly BTC/USDT from Binance via CCXT, 2017–2026.</a:t>
             </a:r>
             <a:endParaRPr lang="en-US" sz="1500" dirty="0"/>
           </a:p>
@@ -8132,7 +10214,7 @@
                 <a:ea typeface="Calibri" pitchFamily="34" charset="-122"/>
                 <a:cs typeface="Calibri" pitchFamily="34" charset="-120"/>
               </a:rPr>
-              <a:t>Predict Bitcoin's next 7-day realised volatility (rolling std. dev. of hourly returns over 168 hours), using lagged price/volume history and technical indicators sourced via CCXT at hourly resolution. This gives traders and risk desks a continuous, hourly-updating volatility estimate usable directly in position-sizing and margin decisions, targeting an RMSE that beats both a naive-persistence baseline and a seasonality-aware Holt-Winters baseline.</a:t>
+              <a:t>Predict Bitcoin's 7-day realised volatility 168 hours (7 days) ahead of the features used to predict it (rolling std. dev. of hourly returns over 168 hours), using lagged price/volume history and technical indicators sourced via CCXT at hourly resolution. This gives traders and risk desks a continuous, hourly-updating estimate of next week's volatility usable directly in position-sizing and margin decisions, targeting an RMSE that beats both a naive-persistence baseline and a seasonality-aware Holt-Winters baseline.</a:t>
             </a:r>
             <a:endParaRPr lang="en-US" sz="1350" dirty="0"/>
           </a:p>
@@ -8842,7 +10924,7 @@
                 <a:ea typeface="Cambria" pitchFamily="34" charset="-122"/>
                 <a:cs typeface="Cambria" pitchFamily="34" charset="-120"/>
               </a:rPr>
-              <a:t>10 yr</a:t>
+              <a:t>8+ yr</a:t>
             </a:r>
             <a:endParaRPr lang="en-US" sz="3200" dirty="0"/>
           </a:p>
@@ -8898,7 +10980,7 @@
                 <a:ea typeface="Calibri" pitchFamily="34" charset="-122"/>
                 <a:cs typeface="Calibri" pitchFamily="34" charset="-120"/>
               </a:rPr>
-              <a:t>fetched via CCXT</a:t>
+              <a:t>through 2026-01-01</a:t>
             </a:r>
             <a:endParaRPr lang="en-US" sz="1100" dirty="0"/>
           </a:p>
@@ -9181,6 +11263,30 @@
                 <a:cs typeface="Calibri" pitchFamily="34" charset="-120"/>
               </a:rPr>
               <a:t>Every feature is lagged 1–3 hours — the model only ever sees the past</a:t>
+            </a:r>
+            <a:endParaRPr lang="en-US" sz="1200" dirty="0"/>
+          </a:p>
+          <a:p>
+            <a:pPr marL="342900" indent="-342900">
+              <a:lnSpc>
+                <a:spcPct val="115000"/>
+              </a:lnSpc>
+              <a:spcAft>
+                <a:spcPts val="1000"/>
+              </a:spcAft>
+              <a:buSzPct val="100000"/>
+              <a:buChar char="●"/>
+            </a:pPr>
+            <a:r>
+              <a:rPr lang="en-US" sz="1200" dirty="0">
+                <a:solidFill>
+                  <a:srgbClr val="0D1B2A"/>
+                </a:solidFill>
+                <a:latin typeface="Calibri" pitchFamily="34" charset="0"/>
+                <a:ea typeface="Calibri" pitchFamily="34" charset="-122"/>
+                <a:cs typeface="Calibri" pitchFamily="34" charset="-120"/>
+              </a:rPr>
+              <a:t>Target = volatility_7d shifted 168 hours into the future, not the current value</a:t>
             </a:r>
             <a:endParaRPr lang="en-US" sz="1200" dirty="0"/>
           </a:p>
@@ -9950,7 +12056,7 @@
                 <a:ea typeface="Cambria" pitchFamily="34" charset="-122"/>
                 <a:cs typeface="Cambria" pitchFamily="34" charset="-120"/>
               </a:rPr>
-              <a:t>Session-time effects exist</a:t>
+              <a:t>Session-time effects: not significant</a:t>
             </a:r>
             <a:endParaRPr lang="en-US" sz="1400" dirty="0"/>
           </a:p>
@@ -9992,7 +12098,7 @@
                 <a:ea typeface="Calibri" pitchFamily="34" charset="-122"/>
                 <a:cs typeface="Calibri" pitchFamily="34" charset="-120"/>
               </a:rPr>
-              <a:t>Volatility varies by hour of day (Asia/Europe/US overlaps). Chi-square confirms hour-of-day is associated with volatility regime — motivating the Holt-Winters seasonal baseline.</a:t>
+              <a:t>Volatility does vary visually by hour of day in the boxplots, but chi-square found no significant association with volatility regime (p ≈ 1.0) — corroborated by Holt-Winters' own seasonal parameter converging to ≈0.</a:t>
             </a:r>
             <a:endParaRPr lang="en-US" sz="1200" dirty="0"/>
           </a:p>
@@ -10596,7 +12702,7 @@
                 <a:ea typeface="Calibri" pitchFamily="34" charset="-122"/>
                 <a:cs typeface="Calibri" pitchFamily="34" charset="-120"/>
               </a:rPr>
-              <a:t>StandardScaler fit on train only</a:t>
+              <a:t>No feature scaling needed — every model fits directly on returns or already-comparable regressors</a:t>
             </a:r>
             <a:endParaRPr lang="en-US" sz="1100" dirty="0"/>
           </a:p>
@@ -11012,7 +13118,7 @@
                 <a:ea typeface="Calibri" pitchFamily="34" charset="-122"/>
                 <a:cs typeface="Calibri" pitchFamily="34" charset="-120"/>
               </a:rPr>
-              <a:t>LSTM (baseline → tuned)</a:t>
+              <a:t>EWMA (basic → tuned)</a:t>
             </a:r>
             <a:endParaRPr lang="en-US" sz="1100" dirty="0"/>
           </a:p>
@@ -12083,7 +14189,7 @@
                 <a:ea typeface="Calibri" pitchFamily="34" charset="-122"/>
                 <a:cs typeface="Calibri" pitchFamily="34" charset="-120"/>
               </a:rPr>
-              <a:t>—</a:t>
+              <a:t>0.007293</a:t>
             </a:r>
             <a:endParaRPr lang="en-US" sz="1050" dirty="0"/>
           </a:p>
@@ -12147,7 +14253,7 @@
                 <a:ea typeface="Calibri" pitchFamily="34" charset="-122"/>
                 <a:cs typeface="Calibri" pitchFamily="34" charset="-120"/>
               </a:rPr>
-              <a:t>—</a:t>
+              <a:t>0.007142</a:t>
             </a:r>
             <a:endParaRPr lang="en-US" sz="1050" dirty="0"/>
           </a:p>
@@ -12211,7 +14317,7 @@
                 <a:ea typeface="Calibri" pitchFamily="34" charset="-122"/>
                 <a:cs typeface="Calibri" pitchFamily="34" charset="-120"/>
               </a:rPr>
-              <a:t>—</a:t>
+              <a:t>-20.3228</a:t>
             </a:r>
             <a:endParaRPr lang="en-US" sz="1050" dirty="0"/>
           </a:p>
@@ -12339,7 +14445,7 @@
                 <a:ea typeface="Calibri" pitchFamily="34" charset="-122"/>
                 <a:cs typeface="Calibri" pitchFamily="34" charset="-120"/>
               </a:rPr>
-              <a:t>—</a:t>
+              <a:t>0.003876</a:t>
             </a:r>
             <a:endParaRPr lang="en-US" sz="1050" dirty="0"/>
           </a:p>
@@ -12403,7 +14509,7 @@
                 <a:ea typeface="Calibri" pitchFamily="34" charset="-122"/>
                 <a:cs typeface="Calibri" pitchFamily="34" charset="-120"/>
               </a:rPr>
-              <a:t>—</a:t>
+              <a:t>0.003646</a:t>
             </a:r>
             <a:endParaRPr lang="en-US" sz="1050" dirty="0"/>
           </a:p>
@@ -12467,7 +14573,7 @@
                 <a:ea typeface="Calibri" pitchFamily="34" charset="-122"/>
                 <a:cs typeface="Calibri" pitchFamily="34" charset="-120"/>
               </a:rPr>
-              <a:t>—</a:t>
+              <a:t>-5.0225</a:t>
             </a:r>
             <a:endParaRPr lang="en-US" sz="1050" dirty="0"/>
           </a:p>
@@ -12506,7 +14612,7 @@
                 <a:ea typeface="Calibri" pitchFamily="34" charset="-122"/>
                 <a:cs typeface="Calibri" pitchFamily="34" charset="-120"/>
               </a:rPr>
-              <a:t>Fill from the notebook's comparison table after running.</a:t>
+              <a:t>Selected: GJR-GARCH with Student-t errors — AIC 96,565 vs. 115,563 for basic GARCH(1,1).</a:t>
             </a:r>
             <a:endParaRPr lang="en-US" sz="900" dirty="0"/>
           </a:p>
@@ -12614,7 +14720,7 @@
                 <a:ea typeface="Calibri" pitchFamily="34" charset="-122"/>
                 <a:cs typeface="Calibri" pitchFamily="34" charset="-120"/>
               </a:rPr>
-              <a:t>Interpretable by construction: α + β measures how long volatility shocks persist; the γ leverage term quantifies the asymmetry between down-moves and up-moves.</a:t>
+              <a:t>Interpretable by construction, but structurally weak at this horizon: GARCH's forecast mean-reverts toward a long-run average variance well before 168 hours are up — a documented property of GARCH at long horizons, not a defect in this implementation.</a:t>
             </a:r>
             <a:endParaRPr lang="en-US" sz="1050" dirty="0"/>
           </a:p>
@@ -13130,7 +15236,7 @@
                 <a:ea typeface="Calibri" pitchFamily="34" charset="-122"/>
                 <a:cs typeface="Calibri" pitchFamily="34" charset="-120"/>
               </a:rPr>
-              <a:t>Adds ATR (Average True Range) as an exogenous regressor. ATR is range-based (high/low), while the target is close-to-close — so it adds genuinely new intraday information, not a restatement.</a:t>
+              <a:t>Adds ATR as a percentage of price (atr_14 / Close). The original raw-dollar ATR was a real bug: a ~45,000x scale mismatch against every other regressor that made HAR-RV-X score worse than plain HAR-RV until fixed.</a:t>
             </a:r>
             <a:endParaRPr lang="en-US" sz="1150" dirty="0"/>
           </a:p>
@@ -13661,7 +15767,7 @@
                 <a:ea typeface="Calibri" pitchFamily="34" charset="-122"/>
                 <a:cs typeface="Calibri" pitchFamily="34" charset="-120"/>
               </a:rPr>
-              <a:t>—</a:t>
+              <a:t>0.001513</a:t>
             </a:r>
             <a:endParaRPr lang="en-US" sz="1050" dirty="0"/>
           </a:p>
@@ -13725,7 +15831,7 @@
                 <a:ea typeface="Calibri" pitchFamily="34" charset="-122"/>
                 <a:cs typeface="Calibri" pitchFamily="34" charset="-120"/>
               </a:rPr>
-              <a:t>—</a:t>
+              <a:t>0.001226</a:t>
             </a:r>
             <a:endParaRPr lang="en-US" sz="1050" dirty="0"/>
           </a:p>
@@ -13789,7 +15895,7 @@
                 <a:ea typeface="Calibri" pitchFamily="34" charset="-122"/>
                 <a:cs typeface="Calibri" pitchFamily="34" charset="-120"/>
               </a:rPr>
-              <a:t>—</a:t>
+              <a:t>0.0710</a:t>
             </a:r>
             <a:endParaRPr lang="en-US" sz="1050" dirty="0"/>
           </a:p>
@@ -13917,7 +16023,7 @@
                 <a:ea typeface="Calibri" pitchFamily="34" charset="-122"/>
                 <a:cs typeface="Calibri" pitchFamily="34" charset="-120"/>
               </a:rPr>
-              <a:t>—</a:t>
+              <a:t>0.001418</a:t>
             </a:r>
             <a:endParaRPr lang="en-US" sz="1050" dirty="0"/>
           </a:p>
@@ -13981,7 +16087,7 @@
                 <a:ea typeface="Calibri" pitchFamily="34" charset="-122"/>
                 <a:cs typeface="Calibri" pitchFamily="34" charset="-120"/>
               </a:rPr>
-              <a:t>—</a:t>
+              <a:t>0.001118</a:t>
             </a:r>
             <a:endParaRPr lang="en-US" sz="1050" dirty="0"/>
           </a:p>
@@ -14045,7 +16151,7 @@
                 <a:ea typeface="Calibri" pitchFamily="34" charset="-122"/>
                 <a:cs typeface="Calibri" pitchFamily="34" charset="-120"/>
               </a:rPr>
-              <a:t>—</a:t>
+              <a:t>0.1840</a:t>
             </a:r>
             <a:endParaRPr lang="en-US" sz="1050" dirty="0"/>
           </a:p>
@@ -14084,7 +16190,7 @@
                 <a:ea typeface="Calibri" pitchFamily="34" charset="-122"/>
                 <a:cs typeface="Calibri" pitchFamily="34" charset="-120"/>
               </a:rPr>
-              <a:t>Fill from the notebook's comparison table after running.</a:t>
+              <a:t>Ridge alpha selected: 0.01. The ATR scale fix alone took R² from -0.65 to +0.18.</a:t>
             </a:r>
             <a:endParaRPr lang="en-US" sz="900" dirty="0"/>
           </a:p>
@@ -14192,7 +16298,7 @@
                 <a:ea typeface="Calibri" pitchFamily="34" charset="-122"/>
                 <a:cs typeface="Calibri" pitchFamily="34" charset="-120"/>
               </a:rPr>
-              <a:t>Coefficients are directly readable: β_d, β_w, β_m show how much the day / week / month horizons each contribute, and β_x shows what the intraday range adds on top.</a:t>
+              <a:t>The best model in this deck on both the historical split and live, unseen data — coefficients are directly readable, and the fix that got it here came from investigating a suspicious result rather than accepting it.</a:t>
             </a:r>
             <a:endParaRPr lang="en-US" sz="1050" dirty="0"/>
           </a:p>
@@ -14375,7 +16481,7 @@
                 <a:ea typeface="Cambria" pitchFamily="34" charset="-122"/>
                 <a:cs typeface="Cambria" pitchFamily="34" charset="-120"/>
               </a:rPr>
-              <a:t>Model 3 — LSTM</a:t>
+              <a:t>Model 3 — EWMA (RiskMetrics)</a:t>
             </a:r>
             <a:endParaRPr lang="en-US" sz="3000" dirty="0"/>
           </a:p>
@@ -14414,7 +16520,7 @@
                 <a:ea typeface="Calibri" pitchFamily="34" charset="-122"/>
                 <a:cs typeface="Calibri" pitchFamily="34" charset="-120"/>
               </a:rPr>
-              <a:t>Best version: tuned architecture and lookback window</a:t>
+              <a:t>Best version: λ backtested via TimeSeriesSplit</a:t>
             </a:r>
             <a:endParaRPr lang="en-US" sz="1400" dirty="0"/>
           </a:p>
@@ -14558,7 +16664,7 @@
                 <a:ea typeface="Cambria" pitchFamily="34" charset="-122"/>
                 <a:cs typeface="Cambria" pitchFamily="34" charset="-120"/>
               </a:rPr>
-              <a:t>Base version</a:t>
+              <a:t>Base version: λ = 0.94</a:t>
             </a:r>
             <a:endParaRPr lang="en-US" sz="1300" dirty="0"/>
           </a:p>
@@ -14600,7 +16706,7 @@
                 <a:ea typeface="Calibri" pitchFamily="34" charset="-122"/>
                 <a:cs typeface="Calibri" pitchFamily="34" charset="-120"/>
               </a:rPr>
-              <a:t>Single LSTM layer, 50 units, no dropout, 30-hour lookback, default Adam optimiser. Reads a rolling window of past hours as a sequence rather than a flat row.</a:t>
+              <a:t>The RiskMetrics (J.P. Morgan, 1996) industry-standard decay factor, used exactly as published — zero fitting to this dataset. σ²(t) = λσ²(t−1) + (1−λ)r²(t−1).</a:t>
             </a:r>
             <a:endParaRPr lang="en-US" sz="1150" dirty="0"/>
           </a:p>
@@ -14666,7 +16772,7 @@
                 <a:ea typeface="Cambria" pitchFamily="34" charset="-122"/>
                 <a:cs typeface="Cambria" pitchFamily="34" charset="-120"/>
               </a:rPr>
-              <a:t>Improvement: architecture search</a:t>
+              <a:t>Improvement: backtested λ</a:t>
             </a:r>
             <a:endParaRPr lang="en-US" sz="1300" dirty="0"/>
           </a:p>
@@ -14708,7 +16814,7 @@
                 <a:ea typeface="Calibri" pitchFamily="34" charset="-122"/>
                 <a:cs typeface="Calibri" pitchFamily="34" charset="-120"/>
               </a:rPr>
-              <a:t>Searched units (32/50/64), dropout (0.1–0.3), and lookback (12/24/48/72 hours) on a validation slice carved from the training period only — the test set stayed untouched until the final fit.</a:t>
+              <a:t>Grid search over λ (0.85–0.995 — widened after 0.99 won at the original grid's edge, a signal the true optimum was higher), scored via TimeSeriesSplit folds on the training period only.</a:t>
             </a:r>
             <a:endParaRPr lang="en-US" sz="1150" dirty="0"/>
           </a:p>
@@ -14816,7 +16922,7 @@
                 <a:ea typeface="Calibri" pitchFamily="34" charset="-122"/>
                 <a:cs typeface="Calibri" pitchFamily="34" charset="-120"/>
               </a:rPr>
-              <a:t>GARCH and HAR both impose a fixed functional form. The LSTM can in principle discover nonlinear interactions they cannot express — directly testing whether the classical models leave structure on the table.</a:t>
+              <a:t>An LSTM originally sat here; it was dropped for carrying no financial theory of its own. EWMA is the exact estimator risk desks already trust — one transparent parameter, no black box.</a:t>
             </a:r>
             <a:endParaRPr lang="en-US" sz="1150" dirty="0"/>
           </a:p>
@@ -15175,7 +17281,7 @@
                 <a:ea typeface="Calibri" pitchFamily="34" charset="-122"/>
                 <a:cs typeface="Calibri" pitchFamily="34" charset="-120"/>
               </a:rPr>
-              <a:t>LSTM — base</a:t>
+              <a:t>EWMA — basic (λ=0.94)</a:t>
             </a:r>
             <a:endParaRPr lang="en-US" sz="1050" dirty="0"/>
           </a:p>
@@ -15239,7 +17345,7 @@
                 <a:ea typeface="Calibri" pitchFamily="34" charset="-122"/>
                 <a:cs typeface="Calibri" pitchFamily="34" charset="-120"/>
               </a:rPr>
-              <a:t>—</a:t>
+              <a:t>0.001964</a:t>
             </a:r>
             <a:endParaRPr lang="en-US" sz="1050" dirty="0"/>
           </a:p>
@@ -15303,7 +17409,7 @@
                 <a:ea typeface="Calibri" pitchFamily="34" charset="-122"/>
                 <a:cs typeface="Calibri" pitchFamily="34" charset="-120"/>
               </a:rPr>
-              <a:t>—</a:t>
+              <a:t>0.001460</a:t>
             </a:r>
             <a:endParaRPr lang="en-US" sz="1050" dirty="0"/>
           </a:p>
@@ -15367,7 +17473,7 @@
                 <a:ea typeface="Calibri" pitchFamily="34" charset="-122"/>
                 <a:cs typeface="Calibri" pitchFamily="34" charset="-120"/>
               </a:rPr>
-              <a:t>—</a:t>
+              <a:t>-0.5459</a:t>
             </a:r>
             <a:endParaRPr lang="en-US" sz="1050" dirty="0"/>
           </a:p>
@@ -15431,7 +17537,7 @@
                 <a:ea typeface="Calibri" pitchFamily="34" charset="-122"/>
                 <a:cs typeface="Calibri" pitchFamily="34" charset="-120"/>
               </a:rPr>
-              <a:t>LSTM — tuned</a:t>
+              <a:t>EWMA — tuned (λ=0.995)</a:t>
             </a:r>
             <a:endParaRPr lang="en-US" sz="1050" dirty="0"/>
           </a:p>
@@ -15495,7 +17601,7 @@
                 <a:ea typeface="Calibri" pitchFamily="34" charset="-122"/>
                 <a:cs typeface="Calibri" pitchFamily="34" charset="-120"/>
               </a:rPr>
-              <a:t>—</a:t>
+              <a:t>0.001532</a:t>
             </a:r>
             <a:endParaRPr lang="en-US" sz="1050" dirty="0"/>
           </a:p>
@@ -15559,7 +17665,7 @@
                 <a:ea typeface="Calibri" pitchFamily="34" charset="-122"/>
                 <a:cs typeface="Calibri" pitchFamily="34" charset="-120"/>
               </a:rPr>
-              <a:t>—</a:t>
+              <a:t>0.001145</a:t>
             </a:r>
             <a:endParaRPr lang="en-US" sz="1050" dirty="0"/>
           </a:p>
@@ -15623,7 +17729,7 @@
                 <a:ea typeface="Calibri" pitchFamily="34" charset="-122"/>
                 <a:cs typeface="Calibri" pitchFamily="34" charset="-120"/>
               </a:rPr>
-              <a:t>—</a:t>
+              <a:t>0.0593</a:t>
             </a:r>
             <a:endParaRPr lang="en-US" sz="1050" dirty="0"/>
           </a:p>
@@ -15662,7 +17768,7 @@
                 <a:ea typeface="Calibri" pitchFamily="34" charset="-122"/>
                 <a:cs typeface="Calibri" pitchFamily="34" charset="-120"/>
               </a:rPr>
-              <a:t>Fill from the notebook's comparison table after running.</a:t>
+              <a:t>Selected: λ = 0.995 — confirmed as an interior optimum this time, not another edge case.</a:t>
             </a:r>
             <a:endParaRPr lang="en-US" sz="900" dirty="0"/>
           </a:p>
@@ -15770,7 +17876,7 @@
                 <a:ea typeface="Calibri" pitchFamily="34" charset="-122"/>
                 <a:cs typeface="Calibri" pitchFamily="34" charset="-120"/>
               </a:rPr>
-              <a:t>Trade-off stated honestly: the LSTM forfeits interpretability (thousands of opaque weights vs. GARCH's meaningful α, β) and is the most prone to overfitting a target this noisy.</a:t>
+              <a:t>A single, fully transparent parameter: λ controls how much weight recent shocks get vs. long-run history. No hidden layers, nothing opaque.</a:t>
             </a:r>
             <a:endParaRPr lang="en-US" sz="1050" dirty="0"/>
           </a:p>

--- a/presentation/capstone-btc-volatility.pptx
+++ b/presentation/capstone-btc-volatility.pptx
@@ -17,6 +17,7 @@
     <p:sldId id="265" r:id="rId11"/>
     <p:sldId id="266" r:id="rId12"/>
     <p:sldId id="269" r:id="rId20"/>
+    <p:sldId id="270" r:id="rId21"/>
     <p:sldId id="267" r:id="rId13"/>
     <p:sldId id="268" r:id="rId14"/>
   </p:sldIdLst>
@@ -7741,6 +7742,2017 @@
 </file>
 
 <file path=ppt/slides/slide13.xml><?xml version="1.0" encoding="utf-8"?>
+<p:sld xmlns:a="http://schemas.openxmlformats.org/drawingml/2006/main" xmlns:p="http://schemas.openxmlformats.org/presentationml/2006/main" xmlns:r="http://schemas.openxmlformats.org/officeDocument/2006/relationships">
+  <p:cSld>
+    <p:spTree>
+      <p:nvGrpSpPr>
+        <p:cNvPr id="1" name=""/>
+        <p:cNvGrpSpPr/>
+        <p:nvPr/>
+      </p:nvGrpSpPr>
+      <p:grpSpPr/>
+      <p:sp>
+        <p:nvSpPr>
+          <p:cNvPr id="2" name="Shape 0"/>
+          <p:cNvSpPr/>
+          <p:nvPr/>
+        </p:nvSpPr>
+        <p:spPr>
+          <a:xfrm>
+            <a:off x="10972800" y="365760"/>
+            <a:ext cx="731520" cy="731520"/>
+          </a:xfrm>
+          <a:prstGeom prst="ellipse">
+            <a:avLst/>
+          </a:prstGeom>
+          <a:solidFill>
+            <a:srgbClr val="0D1B2A"/>
+          </a:solidFill>
+          <a:ln/>
+        </p:spPr>
+      </p:sp>
+      <p:sp>
+        <p:nvSpPr>
+          <p:cNvPr id="3" name="Shape 1"/>
+          <p:cNvSpPr/>
+          <p:nvPr/>
+        </p:nvSpPr>
+        <p:spPr>
+          <a:xfrm flipV="1">
+            <a:off x="11133734" y="588142"/>
+            <a:ext cx="122895" cy="204826"/>
+          </a:xfrm>
+          <a:prstGeom prst="line">
+            <a:avLst/>
+          </a:prstGeom>
+          <a:noFill/>
+          <a:ln w="25400">
+            <a:solidFill>
+              <a:srgbClr val="F7931A"/>
+            </a:solidFill>
+            <a:prstDash val="solid"/>
+          </a:ln>
+        </p:spPr>
+      </p:sp>
+      <p:sp>
+        <p:nvSpPr>
+          <p:cNvPr id="4" name="Shape 2"/>
+          <p:cNvSpPr/>
+          <p:nvPr/>
+        </p:nvSpPr>
+        <p:spPr>
+          <a:xfrm>
+            <a:off x="11256630" y="588142"/>
+            <a:ext cx="81930" cy="245791"/>
+          </a:xfrm>
+          <a:prstGeom prst="line">
+            <a:avLst/>
+          </a:prstGeom>
+          <a:noFill/>
+          <a:ln w="25400">
+            <a:solidFill>
+              <a:srgbClr val="F7931A"/>
+            </a:solidFill>
+            <a:prstDash val="solid"/>
+          </a:ln>
+        </p:spPr>
+      </p:sp>
+      <p:sp>
+        <p:nvSpPr>
+          <p:cNvPr id="5" name="Shape 3"/>
+          <p:cNvSpPr/>
+          <p:nvPr/>
+        </p:nvSpPr>
+        <p:spPr>
+          <a:xfrm flipV="1">
+            <a:off x="11338560" y="526694"/>
+            <a:ext cx="102413" cy="307238"/>
+          </a:xfrm>
+          <a:prstGeom prst="line">
+            <a:avLst/>
+          </a:prstGeom>
+          <a:noFill/>
+          <a:ln w="25400">
+            <a:solidFill>
+              <a:srgbClr val="F7931A"/>
+            </a:solidFill>
+            <a:prstDash val="solid"/>
+          </a:ln>
+        </p:spPr>
+      </p:sp>
+      <p:sp>
+        <p:nvSpPr>
+          <p:cNvPr id="6" name="Shape 4"/>
+          <p:cNvSpPr/>
+          <p:nvPr/>
+        </p:nvSpPr>
+        <p:spPr>
+          <a:xfrm>
+            <a:off x="11440973" y="526694"/>
+            <a:ext cx="102413" cy="184343"/>
+          </a:xfrm>
+          <a:prstGeom prst="line">
+            <a:avLst/>
+          </a:prstGeom>
+          <a:noFill/>
+          <a:ln w="25400">
+            <a:solidFill>
+              <a:srgbClr val="F7931A"/>
+            </a:solidFill>
+            <a:prstDash val="solid"/>
+          </a:ln>
+        </p:spPr>
+      </p:sp>
+      <p:sp>
+        <p:nvSpPr>
+          <p:cNvPr id="7" name="Text 5"/>
+          <p:cNvSpPr/>
+          <p:nvPr/>
+        </p:nvSpPr>
+        <p:spPr>
+          <a:xfrm>
+            <a:off x="548640" y="365760"/>
+            <a:ext cx="10058400" cy="640080"/>
+          </a:xfrm>
+          <a:prstGeom prst="rect">
+            <a:avLst/>
+          </a:prstGeom>
+          <a:noFill/>
+          <a:ln/>
+        </p:spPr>
+        <p:txBody>
+          <a:bodyPr wrap="square" rtlCol="0" anchor="ctr"/>
+          <a:lstStyle/>
+          <a:p>
+            <a:pPr indent="0" marL="0">
+              <a:buNone/>
+            </a:pPr>
+            <a:r>
+              <a:rPr lang="en-US" sz="3000" b="1" dirty="0">
+                <a:solidFill>
+                  <a:srgbClr val="0D1B2A"/>
+                </a:solidFill>
+                <a:latin typeface="Cambria" pitchFamily="34" charset="0"/>
+                <a:ea typeface="Cambria" pitchFamily="34" charset="-122"/>
+                <a:cs typeface="Cambria" pitchFamily="34" charset="-120"/>
+              </a:rPr>
+              <a:t>Resolution Sensitivity</a:t>
+            </a:r>
+            <a:endParaRPr lang="en-US" sz="3000" dirty="0"/>
+          </a:p>
+        </p:txBody>
+      </p:sp>
+      <p:sp>
+        <p:nvSpPr>
+          <p:cNvPr id="8" name="Text 6"/>
+          <p:cNvSpPr/>
+          <p:nvPr/>
+        </p:nvSpPr>
+        <p:spPr>
+          <a:xfrm>
+            <a:off x="548640" y="932688"/>
+            <a:ext cx="10515600" cy="365760"/>
+          </a:xfrm>
+          <a:prstGeom prst="rect">
+            <a:avLst/>
+          </a:prstGeom>
+          <a:noFill/>
+          <a:ln/>
+        </p:spPr>
+        <p:txBody>
+          <a:bodyPr wrap="square" rtlCol="0" anchor="ctr"/>
+          <a:lstStyle/>
+          <a:p>
+            <a:pPr indent="0" marL="0">
+              <a:buNone/>
+            </a:pPr>
+            <a:r>
+              <a:rPr lang="en-US" sz="1400" i="1" dirty="0">
+                <a:solidFill>
+                  <a:srgbClr val="5C6B7A"/>
+                </a:solidFill>
+                <a:latin typeface="Calibri" pitchFamily="34" charset="0"/>
+                <a:ea typeface="Calibri" pitchFamily="34" charset="-122"/>
+                <a:cs typeface="Calibri" pitchFamily="34" charset="-120"/>
+              </a:rPr>
+              <a:t>A 5-minute companion migration — does sampling frequency change the R² ceiling?</a:t>
+            </a:r>
+            <a:endParaRPr lang="en-US" sz="1400" dirty="0"/>
+          </a:p>
+        </p:txBody>
+      </p:sp>
+      <p:sp>
+        <p:nvSpPr>
+          <p:cNvPr id="9" name="Text 7"/>
+          <p:cNvSpPr/>
+          <p:nvPr/>
+        </p:nvSpPr>
+        <p:spPr>
+          <a:xfrm>
+            <a:off x="457200" y="6537960"/>
+            <a:ext cx="7315200" cy="274320"/>
+          </a:xfrm>
+          <a:prstGeom prst="rect">
+            <a:avLst/>
+          </a:prstGeom>
+          <a:noFill/>
+          <a:ln/>
+        </p:spPr>
+        <p:txBody>
+          <a:bodyPr wrap="square" rtlCol="0" anchor="ctr"/>
+          <a:lstStyle/>
+          <a:p>
+            <a:pPr indent="0" marL="0">
+              <a:buNone/>
+            </a:pPr>
+            <a:r>
+              <a:rPr lang="en-US" sz="900" dirty="0">
+                <a:solidFill>
+                  <a:srgbClr val="5C6B7A"/>
+                </a:solidFill>
+                <a:latin typeface="Calibri" pitchFamily="34" charset="0"/>
+                <a:ea typeface="Calibri" pitchFamily="34" charset="-122"/>
+                <a:cs typeface="Calibri" pitchFamily="34" charset="-120"/>
+              </a:rPr>
+              <a:t>BTC Volatility Prediction  |  Capstone</a:t>
+            </a:r>
+            <a:endParaRPr lang="en-US" sz="900" dirty="0"/>
+          </a:p>
+        </p:txBody>
+      </p:sp>
+      <p:sp>
+        <p:nvSpPr>
+          <p:cNvPr id="10" name="Text 8"/>
+          <p:cNvSpPr/>
+          <p:nvPr/>
+        </p:nvSpPr>
+        <p:spPr>
+          <a:xfrm>
+            <a:off x="11521440" y="6537960"/>
+            <a:ext cx="457200" cy="274320"/>
+          </a:xfrm>
+          <a:prstGeom prst="rect">
+            <a:avLst/>
+          </a:prstGeom>
+          <a:noFill/>
+          <a:ln/>
+        </p:spPr>
+        <p:txBody>
+          <a:bodyPr wrap="square" rtlCol="0" anchor="ctr"/>
+          <a:lstStyle/>
+          <a:p>
+            <a:pPr algn="r" indent="0" marL="0">
+              <a:buNone/>
+            </a:pPr>
+            <a:r>
+              <a:rPr lang="en-US" sz="900" dirty="0">
+                <a:solidFill>
+                  <a:srgbClr val="5C6B7A"/>
+                </a:solidFill>
+                <a:latin typeface="Calibri" pitchFamily="34" charset="0"/>
+                <a:ea typeface="Calibri" pitchFamily="34" charset="-122"/>
+                <a:cs typeface="Calibri" pitchFamily="34" charset="-120"/>
+              </a:rPr>
+              <a:t>13</a:t>
+            </a:r>
+            <a:endParaRPr lang="en-US" sz="900" dirty="0"/>
+          </a:p>
+        </p:txBody>
+      </p:sp>
+      <p:sp>
+        <p:nvSpPr>
+          <p:cNvPr id="11" name="Shape 9"/>
+          <p:cNvSpPr/>
+          <p:nvPr/>
+        </p:nvSpPr>
+        <p:spPr>
+          <a:xfrm>
+            <a:off x="548640" y="1554480"/>
+            <a:ext cx="3474720" cy="457200"/>
+          </a:xfrm>
+          <a:prstGeom prst="rect">
+            <a:avLst/>
+          </a:prstGeom>
+          <a:solidFill>
+            <a:srgbClr val="0D1B2A"/>
+          </a:solidFill>
+          <a:ln w="12700">
+            <a:solidFill>
+              <a:srgbClr val="F7F8FA"/>
+            </a:solidFill>
+            <a:prstDash val="solid"/>
+          </a:ln>
+        </p:spPr>
+      </p:sp>
+      <p:sp>
+        <p:nvSpPr>
+          <p:cNvPr id="12" name="Text 10"/>
+          <p:cNvSpPr/>
+          <p:nvPr/>
+        </p:nvSpPr>
+        <p:spPr>
+          <a:xfrm>
+            <a:off x="548640" y="1554480"/>
+            <a:ext cx="3474720" cy="457200"/>
+          </a:xfrm>
+          <a:prstGeom prst="rect">
+            <a:avLst/>
+          </a:prstGeom>
+          <a:noFill/>
+          <a:ln/>
+        </p:spPr>
+        <p:txBody>
+          <a:bodyPr wrap="square" rtlCol="0" anchor="ctr"/>
+          <a:lstStyle/>
+          <a:p>
+            <a:pPr algn="ctr" indent="0" marL="0">
+              <a:buNone/>
+            </a:pPr>
+            <a:r>
+              <a:rPr lang="en-US" sz="1200" b="1" dirty="0">
+                <a:solidFill>
+                  <a:srgbClr val="F7931A"/>
+                </a:solidFill>
+                <a:latin typeface="Calibri" pitchFamily="34" charset="0"/>
+                <a:ea typeface="Calibri" pitchFamily="34" charset="-122"/>
+                <a:cs typeface="Calibri" pitchFamily="34" charset="-120"/>
+              </a:rPr>
+              <a:t>Model</a:t>
+            </a:r>
+            <a:endParaRPr lang="en-US" sz="1200" dirty="0"/>
+          </a:p>
+        </p:txBody>
+      </p:sp>
+      <p:sp>
+        <p:nvSpPr>
+          <p:cNvPr id="13" name="Shape 11"/>
+          <p:cNvSpPr/>
+          <p:nvPr/>
+        </p:nvSpPr>
+        <p:spPr>
+          <a:xfrm>
+            <a:off x="4023360" y="1554480"/>
+            <a:ext cx="1463040" cy="457200"/>
+          </a:xfrm>
+          <a:prstGeom prst="rect">
+            <a:avLst/>
+          </a:prstGeom>
+          <a:solidFill>
+            <a:srgbClr val="0D1B2A"/>
+          </a:solidFill>
+          <a:ln w="12700">
+            <a:solidFill>
+              <a:srgbClr val="F7F8FA"/>
+            </a:solidFill>
+            <a:prstDash val="solid"/>
+          </a:ln>
+        </p:spPr>
+      </p:sp>
+      <p:sp>
+        <p:nvSpPr>
+          <p:cNvPr id="14" name="Text 12"/>
+          <p:cNvSpPr/>
+          <p:nvPr/>
+        </p:nvSpPr>
+        <p:spPr>
+          <a:xfrm>
+            <a:off x="4023360" y="1554480"/>
+            <a:ext cx="1463040" cy="457200"/>
+          </a:xfrm>
+          <a:prstGeom prst="rect">
+            <a:avLst/>
+          </a:prstGeom>
+          <a:noFill/>
+          <a:ln/>
+        </p:spPr>
+        <p:txBody>
+          <a:bodyPr wrap="square" rtlCol="0" anchor="ctr"/>
+          <a:lstStyle/>
+          <a:p>
+            <a:pPr algn="ctr" indent="0" marL="0">
+              <a:buNone/>
+            </a:pPr>
+            <a:r>
+              <a:rPr lang="en-US" sz="1200" b="1" dirty="0">
+                <a:solidFill>
+                  <a:srgbClr val="F7931A"/>
+                </a:solidFill>
+                <a:latin typeface="Calibri" pitchFamily="34" charset="0"/>
+                <a:ea typeface="Calibri" pitchFamily="34" charset="-122"/>
+                <a:cs typeface="Calibri" pitchFamily="34" charset="-120"/>
+              </a:rPr>
+              <a:t>RMSE</a:t>
+            </a:r>
+            <a:endParaRPr lang="en-US" sz="1200" dirty="0"/>
+          </a:p>
+        </p:txBody>
+      </p:sp>
+      <p:sp>
+        <p:nvSpPr>
+          <p:cNvPr id="15" name="Shape 13"/>
+          <p:cNvSpPr/>
+          <p:nvPr/>
+        </p:nvSpPr>
+        <p:spPr>
+          <a:xfrm>
+            <a:off x="5486400" y="1554480"/>
+            <a:ext cx="1463040" cy="457200"/>
+          </a:xfrm>
+          <a:prstGeom prst="rect">
+            <a:avLst/>
+          </a:prstGeom>
+          <a:solidFill>
+            <a:srgbClr val="0D1B2A"/>
+          </a:solidFill>
+          <a:ln w="12700">
+            <a:solidFill>
+              <a:srgbClr val="F7F8FA"/>
+            </a:solidFill>
+            <a:prstDash val="solid"/>
+          </a:ln>
+        </p:spPr>
+      </p:sp>
+      <p:sp>
+        <p:nvSpPr>
+          <p:cNvPr id="16" name="Text 14"/>
+          <p:cNvSpPr/>
+          <p:nvPr/>
+        </p:nvSpPr>
+        <p:spPr>
+          <a:xfrm>
+            <a:off x="5486400" y="1554480"/>
+            <a:ext cx="1463040" cy="457200"/>
+          </a:xfrm>
+          <a:prstGeom prst="rect">
+            <a:avLst/>
+          </a:prstGeom>
+          <a:noFill/>
+          <a:ln/>
+        </p:spPr>
+        <p:txBody>
+          <a:bodyPr wrap="square" rtlCol="0" anchor="ctr"/>
+          <a:lstStyle/>
+          <a:p>
+            <a:pPr algn="ctr" indent="0" marL="0">
+              <a:buNone/>
+            </a:pPr>
+            <a:r>
+              <a:rPr lang="en-US" sz="1200" b="1" dirty="0">
+                <a:solidFill>
+                  <a:srgbClr val="F7931A"/>
+                </a:solidFill>
+                <a:latin typeface="Calibri" pitchFamily="34" charset="0"/>
+                <a:ea typeface="Calibri" pitchFamily="34" charset="-122"/>
+                <a:cs typeface="Calibri" pitchFamily="34" charset="-120"/>
+              </a:rPr>
+              <a:t>MAE</a:t>
+            </a:r>
+            <a:endParaRPr lang="en-US" sz="1200" dirty="0"/>
+          </a:p>
+        </p:txBody>
+      </p:sp>
+      <p:sp>
+        <p:nvSpPr>
+          <p:cNvPr id="17" name="Shape 15"/>
+          <p:cNvSpPr/>
+          <p:nvPr/>
+        </p:nvSpPr>
+        <p:spPr>
+          <a:xfrm>
+            <a:off x="6949440" y="1554480"/>
+            <a:ext cx="1463040" cy="457200"/>
+          </a:xfrm>
+          <a:prstGeom prst="rect">
+            <a:avLst/>
+          </a:prstGeom>
+          <a:solidFill>
+            <a:srgbClr val="0D1B2A"/>
+          </a:solidFill>
+          <a:ln w="12700">
+            <a:solidFill>
+              <a:srgbClr val="F7F8FA"/>
+            </a:solidFill>
+            <a:prstDash val="solid"/>
+          </a:ln>
+        </p:spPr>
+      </p:sp>
+      <p:sp>
+        <p:nvSpPr>
+          <p:cNvPr id="18" name="Text 16"/>
+          <p:cNvSpPr/>
+          <p:nvPr/>
+        </p:nvSpPr>
+        <p:spPr>
+          <a:xfrm>
+            <a:off x="6949440" y="1554480"/>
+            <a:ext cx="1463040" cy="457200"/>
+          </a:xfrm>
+          <a:prstGeom prst="rect">
+            <a:avLst/>
+          </a:prstGeom>
+          <a:noFill/>
+          <a:ln/>
+        </p:spPr>
+        <p:txBody>
+          <a:bodyPr wrap="square" rtlCol="0" anchor="ctr"/>
+          <a:lstStyle/>
+          <a:p>
+            <a:pPr algn="ctr" indent="0" marL="0">
+              <a:buNone/>
+            </a:pPr>
+            <a:r>
+              <a:rPr lang="en-US" sz="1200" b="1" dirty="0">
+                <a:solidFill>
+                  <a:srgbClr val="F7931A"/>
+                </a:solidFill>
+                <a:latin typeface="Calibri" pitchFamily="34" charset="0"/>
+                <a:ea typeface="Calibri" pitchFamily="34" charset="-122"/>
+                <a:cs typeface="Calibri" pitchFamily="34" charset="-120"/>
+              </a:rPr>
+              <a:t>R²</a:t>
+            </a:r>
+            <a:endParaRPr lang="en-US" sz="1200" dirty="0"/>
+          </a:p>
+        </p:txBody>
+      </p:sp>
+      <p:sp>
+        <p:nvSpPr>
+          <p:cNvPr id="19" name="Shape 17"/>
+          <p:cNvSpPr/>
+          <p:nvPr/>
+        </p:nvSpPr>
+        <p:spPr>
+          <a:xfrm>
+            <a:off x="8412480" y="1554480"/>
+            <a:ext cx="3200400" cy="457200"/>
+          </a:xfrm>
+          <a:prstGeom prst="rect">
+            <a:avLst/>
+          </a:prstGeom>
+          <a:solidFill>
+            <a:srgbClr val="0D1B2A"/>
+          </a:solidFill>
+          <a:ln w="12700">
+            <a:solidFill>
+              <a:srgbClr val="F7F8FA"/>
+            </a:solidFill>
+            <a:prstDash val="solid"/>
+          </a:ln>
+        </p:spPr>
+      </p:sp>
+      <p:sp>
+        <p:nvSpPr>
+          <p:cNvPr id="20" name="Text 18"/>
+          <p:cNvSpPr/>
+          <p:nvPr/>
+        </p:nvSpPr>
+        <p:spPr>
+          <a:xfrm>
+            <a:off x="8412480" y="1554480"/>
+            <a:ext cx="3200400" cy="457200"/>
+          </a:xfrm>
+          <a:prstGeom prst="rect">
+            <a:avLst/>
+          </a:prstGeom>
+          <a:noFill/>
+          <a:ln/>
+        </p:spPr>
+        <p:txBody>
+          <a:bodyPr wrap="square" rtlCol="0" anchor="ctr"/>
+          <a:lstStyle/>
+          <a:p>
+            <a:pPr algn="ctr" indent="0" marL="0">
+              <a:buNone/>
+            </a:pPr>
+            <a:r>
+              <a:rPr lang="en-US" sz="1200" b="1" dirty="0">
+                <a:solidFill>
+                  <a:srgbClr val="F7931A"/>
+                </a:solidFill>
+                <a:latin typeface="Calibri" pitchFamily="34" charset="0"/>
+                <a:ea typeface="Calibri" pitchFamily="34" charset="-122"/>
+                <a:cs typeface="Calibri" pitchFamily="34" charset="-120"/>
+              </a:rPr>
+              <a:t>Resolution</a:t>
+            </a:r>
+            <a:endParaRPr lang="en-US" sz="1200" dirty="0"/>
+          </a:p>
+        </p:txBody>
+      </p:sp>
+      <p:sp>
+        <p:nvSpPr>
+          <p:cNvPr id="21" name="Shape 19"/>
+          <p:cNvSpPr/>
+          <p:nvPr/>
+        </p:nvSpPr>
+        <p:spPr>
+          <a:xfrm>
+            <a:off x="548640" y="2011680"/>
+            <a:ext cx="3474720" cy="566928"/>
+          </a:xfrm>
+          <a:prstGeom prst="rect">
+            <a:avLst/>
+          </a:prstGeom>
+          <a:solidFill>
+            <a:srgbClr val="FFFFFF"/>
+          </a:solidFill>
+          <a:ln w="12700">
+            <a:solidFill>
+              <a:srgbClr val="CADCFC"/>
+            </a:solidFill>
+            <a:prstDash val="solid"/>
+          </a:ln>
+        </p:spPr>
+      </p:sp>
+      <p:sp>
+        <p:nvSpPr>
+          <p:cNvPr id="22" name="Text 20"/>
+          <p:cNvSpPr/>
+          <p:nvPr/>
+        </p:nvSpPr>
+        <p:spPr>
+          <a:xfrm>
+            <a:off x="548640" y="2011680"/>
+            <a:ext cx="3474720" cy="566928"/>
+          </a:xfrm>
+          <a:prstGeom prst="rect">
+            <a:avLst/>
+          </a:prstGeom>
+          <a:noFill/>
+          <a:ln/>
+        </p:spPr>
+        <p:txBody>
+          <a:bodyPr wrap="square" lIns="91440" tIns="91440" rIns="91440" bIns="91440" rtlCol="0" anchor="ctr"/>
+          <a:lstStyle/>
+          <a:p>
+            <a:pPr algn="l" indent="0" marL="0">
+              <a:buNone/>
+            </a:pPr>
+            <a:r>
+              <a:rPr lang="en-US" sz="1150" b="1" dirty="0">
+                <a:solidFill>
+                  <a:srgbClr val="0D1B2A"/>
+                </a:solidFill>
+                <a:latin typeface="Calibri" pitchFamily="34" charset="0"/>
+                <a:ea typeface="Calibri" pitchFamily="34" charset="-122"/>
+                <a:cs typeface="Calibri" pitchFamily="34" charset="-120"/>
+              </a:rPr>
+              <a:t>HAR-RV-X — hourly</a:t>
+            </a:r>
+            <a:endParaRPr lang="en-US" sz="1150" dirty="0"/>
+          </a:p>
+        </p:txBody>
+      </p:sp>
+      <p:sp>
+        <p:nvSpPr>
+          <p:cNvPr id="23" name="Shape 21"/>
+          <p:cNvSpPr/>
+          <p:nvPr/>
+        </p:nvSpPr>
+        <p:spPr>
+          <a:xfrm>
+            <a:off x="4023360" y="2011680"/>
+            <a:ext cx="1463040" cy="566928"/>
+          </a:xfrm>
+          <a:prstGeom prst="rect">
+            <a:avLst/>
+          </a:prstGeom>
+          <a:solidFill>
+            <a:srgbClr val="FFFFFF"/>
+          </a:solidFill>
+          <a:ln w="12700">
+            <a:solidFill>
+              <a:srgbClr val="CADCFC"/>
+            </a:solidFill>
+            <a:prstDash val="solid"/>
+          </a:ln>
+        </p:spPr>
+      </p:sp>
+      <p:sp>
+        <p:nvSpPr>
+          <p:cNvPr id="24" name="Text 22"/>
+          <p:cNvSpPr/>
+          <p:nvPr/>
+        </p:nvSpPr>
+        <p:spPr>
+          <a:xfrm>
+            <a:off x="4023360" y="2011680"/>
+            <a:ext cx="1463040" cy="566928"/>
+          </a:xfrm>
+          <a:prstGeom prst="rect">
+            <a:avLst/>
+          </a:prstGeom>
+          <a:noFill/>
+          <a:ln/>
+        </p:spPr>
+        <p:txBody>
+          <a:bodyPr wrap="square" lIns="0" tIns="0" rIns="0" bIns="0" rtlCol="0" anchor="ctr"/>
+          <a:lstStyle/>
+          <a:p>
+            <a:pPr algn="ctr" indent="0" marL="0">
+              <a:buNone/>
+            </a:pPr>
+            <a:r>
+              <a:rPr lang="en-US" sz="1150" dirty="0">
+                <a:solidFill>
+                  <a:srgbClr val="0D1B2A"/>
+                </a:solidFill>
+                <a:latin typeface="Calibri" pitchFamily="34" charset="0"/>
+                <a:ea typeface="Calibri" pitchFamily="34" charset="-122"/>
+                <a:cs typeface="Calibri" pitchFamily="34" charset="-120"/>
+              </a:rPr>
+              <a:t>0.001502</a:t>
+            </a:r>
+            <a:endParaRPr lang="en-US" sz="1150" dirty="0"/>
+          </a:p>
+        </p:txBody>
+      </p:sp>
+      <p:sp>
+        <p:nvSpPr>
+          <p:cNvPr id="25" name="Shape 23"/>
+          <p:cNvSpPr/>
+          <p:nvPr/>
+        </p:nvSpPr>
+        <p:spPr>
+          <a:xfrm>
+            <a:off x="5486400" y="2011680"/>
+            <a:ext cx="1463040" cy="566928"/>
+          </a:xfrm>
+          <a:prstGeom prst="rect">
+            <a:avLst/>
+          </a:prstGeom>
+          <a:solidFill>
+            <a:srgbClr val="FFFFFF"/>
+          </a:solidFill>
+          <a:ln w="12700">
+            <a:solidFill>
+              <a:srgbClr val="CADCFC"/>
+            </a:solidFill>
+            <a:prstDash val="solid"/>
+          </a:ln>
+        </p:spPr>
+      </p:sp>
+      <p:sp>
+        <p:nvSpPr>
+          <p:cNvPr id="26" name="Text 24"/>
+          <p:cNvSpPr/>
+          <p:nvPr/>
+        </p:nvSpPr>
+        <p:spPr>
+          <a:xfrm>
+            <a:off x="5486400" y="2011680"/>
+            <a:ext cx="1463040" cy="566928"/>
+          </a:xfrm>
+          <a:prstGeom prst="rect">
+            <a:avLst/>
+          </a:prstGeom>
+          <a:noFill/>
+          <a:ln/>
+        </p:spPr>
+        <p:txBody>
+          <a:bodyPr wrap="square" lIns="0" tIns="0" rIns="0" bIns="0" rtlCol="0" anchor="ctr"/>
+          <a:lstStyle/>
+          <a:p>
+            <a:pPr algn="ctr" indent="0" marL="0">
+              <a:buNone/>
+            </a:pPr>
+            <a:r>
+              <a:rPr lang="en-US" sz="1150" dirty="0">
+                <a:solidFill>
+                  <a:srgbClr val="0D1B2A"/>
+                </a:solidFill>
+                <a:latin typeface="Calibri" pitchFamily="34" charset="0"/>
+                <a:ea typeface="Calibri" pitchFamily="34" charset="-122"/>
+                <a:cs typeface="Calibri" pitchFamily="34" charset="-120"/>
+              </a:rPr>
+              <a:t>0.001259</a:t>
+            </a:r>
+            <a:endParaRPr lang="en-US" sz="1150" dirty="0"/>
+          </a:p>
+        </p:txBody>
+      </p:sp>
+      <p:sp>
+        <p:nvSpPr>
+          <p:cNvPr id="27" name="Shape 25"/>
+          <p:cNvSpPr/>
+          <p:nvPr/>
+        </p:nvSpPr>
+        <p:spPr>
+          <a:xfrm>
+            <a:off x="6949440" y="2011680"/>
+            <a:ext cx="1463040" cy="566928"/>
+          </a:xfrm>
+          <a:prstGeom prst="rect">
+            <a:avLst/>
+          </a:prstGeom>
+          <a:solidFill>
+            <a:srgbClr val="FFFFFF"/>
+          </a:solidFill>
+          <a:ln w="12700">
+            <a:solidFill>
+              <a:srgbClr val="CADCFC"/>
+            </a:solidFill>
+            <a:prstDash val="solid"/>
+          </a:ln>
+        </p:spPr>
+      </p:sp>
+      <p:sp>
+        <p:nvSpPr>
+          <p:cNvPr id="28" name="Text 26"/>
+          <p:cNvSpPr/>
+          <p:nvPr/>
+        </p:nvSpPr>
+        <p:spPr>
+          <a:xfrm>
+            <a:off x="6949440" y="2011680"/>
+            <a:ext cx="1463040" cy="566928"/>
+          </a:xfrm>
+          <a:prstGeom prst="rect">
+            <a:avLst/>
+          </a:prstGeom>
+          <a:noFill/>
+          <a:ln/>
+        </p:spPr>
+        <p:txBody>
+          <a:bodyPr wrap="square" lIns="0" tIns="0" rIns="0" bIns="0" rtlCol="0" anchor="ctr"/>
+          <a:lstStyle/>
+          <a:p>
+            <a:pPr algn="ctr" indent="0" marL="0">
+              <a:buNone/>
+            </a:pPr>
+            <a:r>
+              <a:rPr lang="en-US" sz="1150" dirty="0">
+                <a:solidFill>
+                  <a:srgbClr val="0D1B2A"/>
+                </a:solidFill>
+                <a:latin typeface="Calibri" pitchFamily="34" charset="0"/>
+                <a:ea typeface="Calibri" pitchFamily="34" charset="-122"/>
+                <a:cs typeface="Calibri" pitchFamily="34" charset="-120"/>
+              </a:rPr>
+              <a:t>0.0610</a:t>
+            </a:r>
+            <a:endParaRPr lang="en-US" sz="1150" dirty="0"/>
+          </a:p>
+        </p:txBody>
+      </p:sp>
+      <p:sp>
+        <p:nvSpPr>
+          <p:cNvPr id="29" name="Shape 27"/>
+          <p:cNvSpPr/>
+          <p:nvPr/>
+        </p:nvSpPr>
+        <p:spPr>
+          <a:xfrm>
+            <a:off x="8412480" y="2011680"/>
+            <a:ext cx="3200400" cy="566928"/>
+          </a:xfrm>
+          <a:prstGeom prst="rect">
+            <a:avLst/>
+          </a:prstGeom>
+          <a:solidFill>
+            <a:srgbClr val="FFFFFF"/>
+          </a:solidFill>
+          <a:ln w="12700">
+            <a:solidFill>
+              <a:srgbClr val="CADCFC"/>
+            </a:solidFill>
+            <a:prstDash val="solid"/>
+          </a:ln>
+        </p:spPr>
+      </p:sp>
+      <p:sp>
+        <p:nvSpPr>
+          <p:cNvPr id="30" name="Text 28"/>
+          <p:cNvSpPr/>
+          <p:nvPr/>
+        </p:nvSpPr>
+        <p:spPr>
+          <a:xfrm>
+            <a:off x="8412480" y="2011680"/>
+            <a:ext cx="3200400" cy="566928"/>
+          </a:xfrm>
+          <a:prstGeom prst="rect">
+            <a:avLst/>
+          </a:prstGeom>
+          <a:noFill/>
+          <a:ln/>
+        </p:spPr>
+        <p:txBody>
+          <a:bodyPr wrap="square" lIns="0" tIns="0" rIns="0" bIns="0" rtlCol="0" anchor="ctr"/>
+          <a:lstStyle/>
+          <a:p>
+            <a:pPr algn="ctr" indent="0" marL="0">
+              <a:buNone/>
+            </a:pPr>
+            <a:r>
+              <a:rPr lang="en-US" sz="1150" dirty="0">
+                <a:solidFill>
+                  <a:srgbClr val="0D1B2A"/>
+                </a:solidFill>
+                <a:latin typeface="Calibri" pitchFamily="34" charset="0"/>
+                <a:ea typeface="Calibri" pitchFamily="34" charset="-122"/>
+                <a:cs typeface="Calibri" pitchFamily="34" charset="-120"/>
+              </a:rPr>
+              <a:t>Hourly</a:t>
+            </a:r>
+            <a:endParaRPr lang="en-US" sz="1150" dirty="0"/>
+          </a:p>
+        </p:txBody>
+      </p:sp>
+      <p:sp>
+        <p:nvSpPr>
+          <p:cNvPr id="31" name="Shape 29"/>
+          <p:cNvSpPr/>
+          <p:nvPr/>
+        </p:nvSpPr>
+        <p:spPr>
+          <a:xfrm>
+            <a:off x="548640" y="2578608"/>
+            <a:ext cx="3474720" cy="566928"/>
+          </a:xfrm>
+          <a:prstGeom prst="rect">
+            <a:avLst/>
+          </a:prstGeom>
+          <a:solidFill>
+            <a:srgbClr val="EEF1F5"/>
+          </a:solidFill>
+          <a:ln w="12700">
+            <a:solidFill>
+              <a:srgbClr val="CADCFC"/>
+            </a:solidFill>
+            <a:prstDash val="solid"/>
+          </a:ln>
+        </p:spPr>
+      </p:sp>
+      <p:sp>
+        <p:nvSpPr>
+          <p:cNvPr id="32" name="Text 30"/>
+          <p:cNvSpPr/>
+          <p:nvPr/>
+        </p:nvSpPr>
+        <p:spPr>
+          <a:xfrm>
+            <a:off x="548640" y="2578608"/>
+            <a:ext cx="3474720" cy="566928"/>
+          </a:xfrm>
+          <a:prstGeom prst="rect">
+            <a:avLst/>
+          </a:prstGeom>
+          <a:noFill/>
+          <a:ln/>
+        </p:spPr>
+        <p:txBody>
+          <a:bodyPr wrap="square" lIns="91440" tIns="91440" rIns="91440" bIns="91440" rtlCol="0" anchor="ctr"/>
+          <a:lstStyle/>
+          <a:p>
+            <a:pPr algn="l" indent="0" marL="0">
+              <a:buNone/>
+            </a:pPr>
+            <a:r>
+              <a:rPr lang="en-US" sz="1150" b="1" dirty="0">
+                <a:solidFill>
+                  <a:srgbClr val="0D1B2A"/>
+                </a:solidFill>
+                <a:latin typeface="Calibri" pitchFamily="34" charset="0"/>
+                <a:ea typeface="Calibri" pitchFamily="34" charset="-122"/>
+                <a:cs typeface="Calibri" pitchFamily="34" charset="-120"/>
+              </a:rPr>
+              <a:t>HAR-RV-X — 5-minute</a:t>
+            </a:r>
+            <a:endParaRPr lang="en-US" sz="1150" dirty="0"/>
+          </a:p>
+        </p:txBody>
+      </p:sp>
+      <p:sp>
+        <p:nvSpPr>
+          <p:cNvPr id="33" name="Shape 31"/>
+          <p:cNvSpPr/>
+          <p:nvPr/>
+        </p:nvSpPr>
+        <p:spPr>
+          <a:xfrm>
+            <a:off x="4023360" y="2578608"/>
+            <a:ext cx="1463040" cy="566928"/>
+          </a:xfrm>
+          <a:prstGeom prst="rect">
+            <a:avLst/>
+          </a:prstGeom>
+          <a:solidFill>
+            <a:srgbClr val="EEF1F5"/>
+          </a:solidFill>
+          <a:ln w="12700">
+            <a:solidFill>
+              <a:srgbClr val="CADCFC"/>
+            </a:solidFill>
+            <a:prstDash val="solid"/>
+          </a:ln>
+        </p:spPr>
+      </p:sp>
+      <p:sp>
+        <p:nvSpPr>
+          <p:cNvPr id="34" name="Text 32"/>
+          <p:cNvSpPr/>
+          <p:nvPr/>
+        </p:nvSpPr>
+        <p:spPr>
+          <a:xfrm>
+            <a:off x="4023360" y="2578608"/>
+            <a:ext cx="1463040" cy="566928"/>
+          </a:xfrm>
+          <a:prstGeom prst="rect">
+            <a:avLst/>
+          </a:prstGeom>
+          <a:noFill/>
+          <a:ln/>
+        </p:spPr>
+        <p:txBody>
+          <a:bodyPr wrap="square" lIns="0" tIns="0" rIns="0" bIns="0" rtlCol="0" anchor="ctr"/>
+          <a:lstStyle/>
+          <a:p>
+            <a:pPr algn="ctr" indent="0" marL="0">
+              <a:buNone/>
+            </a:pPr>
+            <a:r>
+              <a:rPr lang="en-US" sz="1150" dirty="0">
+                <a:solidFill>
+                  <a:srgbClr val="0D1B2A"/>
+                </a:solidFill>
+                <a:latin typeface="Calibri" pitchFamily="34" charset="0"/>
+                <a:ea typeface="Calibri" pitchFamily="34" charset="-122"/>
+                <a:cs typeface="Calibri" pitchFamily="34" charset="-120"/>
+              </a:rPr>
+              <a:t>0.019080</a:t>
+            </a:r>
+            <a:endParaRPr lang="en-US" sz="1150" dirty="0"/>
+          </a:p>
+        </p:txBody>
+      </p:sp>
+      <p:sp>
+        <p:nvSpPr>
+          <p:cNvPr id="35" name="Shape 33"/>
+          <p:cNvSpPr/>
+          <p:nvPr/>
+        </p:nvSpPr>
+        <p:spPr>
+          <a:xfrm>
+            <a:off x="5486400" y="2578608"/>
+            <a:ext cx="1463040" cy="566928"/>
+          </a:xfrm>
+          <a:prstGeom prst="rect">
+            <a:avLst/>
+          </a:prstGeom>
+          <a:solidFill>
+            <a:srgbClr val="EEF1F5"/>
+          </a:solidFill>
+          <a:ln w="12700">
+            <a:solidFill>
+              <a:srgbClr val="CADCFC"/>
+            </a:solidFill>
+            <a:prstDash val="solid"/>
+          </a:ln>
+        </p:spPr>
+      </p:sp>
+      <p:sp>
+        <p:nvSpPr>
+          <p:cNvPr id="36" name="Text 34"/>
+          <p:cNvSpPr/>
+          <p:nvPr/>
+        </p:nvSpPr>
+        <p:spPr>
+          <a:xfrm>
+            <a:off x="5486400" y="2578608"/>
+            <a:ext cx="1463040" cy="566928"/>
+          </a:xfrm>
+          <a:prstGeom prst="rect">
+            <a:avLst/>
+          </a:prstGeom>
+          <a:noFill/>
+          <a:ln/>
+        </p:spPr>
+        <p:txBody>
+          <a:bodyPr wrap="square" lIns="0" tIns="0" rIns="0" bIns="0" rtlCol="0" anchor="ctr"/>
+          <a:lstStyle/>
+          <a:p>
+            <a:pPr algn="ctr" indent="0" marL="0">
+              <a:buNone/>
+            </a:pPr>
+            <a:r>
+              <a:rPr lang="en-US" sz="1150" dirty="0">
+                <a:solidFill>
+                  <a:srgbClr val="0D1B2A"/>
+                </a:solidFill>
+                <a:latin typeface="Calibri" pitchFamily="34" charset="0"/>
+                <a:ea typeface="Calibri" pitchFamily="34" charset="-122"/>
+                <a:cs typeface="Calibri" pitchFamily="34" charset="-120"/>
+              </a:rPr>
+              <a:t>0.015477</a:t>
+            </a:r>
+            <a:endParaRPr lang="en-US" sz="1150" dirty="0"/>
+          </a:p>
+        </p:txBody>
+      </p:sp>
+      <p:sp>
+        <p:nvSpPr>
+          <p:cNvPr id="37" name="Shape 35"/>
+          <p:cNvSpPr/>
+          <p:nvPr/>
+        </p:nvSpPr>
+        <p:spPr>
+          <a:xfrm>
+            <a:off x="6949440" y="2578608"/>
+            <a:ext cx="1463040" cy="566928"/>
+          </a:xfrm>
+          <a:prstGeom prst="rect">
+            <a:avLst/>
+          </a:prstGeom>
+          <a:solidFill>
+            <a:srgbClr val="EEF1F5"/>
+          </a:solidFill>
+          <a:ln w="12700">
+            <a:solidFill>
+              <a:srgbClr val="CADCFC"/>
+            </a:solidFill>
+            <a:prstDash val="solid"/>
+          </a:ln>
+        </p:spPr>
+      </p:sp>
+      <p:sp>
+        <p:nvSpPr>
+          <p:cNvPr id="38" name="Text 36"/>
+          <p:cNvSpPr/>
+          <p:nvPr/>
+        </p:nvSpPr>
+        <p:spPr>
+          <a:xfrm>
+            <a:off x="6949440" y="2578608"/>
+            <a:ext cx="1463040" cy="566928"/>
+          </a:xfrm>
+          <a:prstGeom prst="rect">
+            <a:avLst/>
+          </a:prstGeom>
+          <a:noFill/>
+          <a:ln/>
+        </p:spPr>
+        <p:txBody>
+          <a:bodyPr wrap="square" lIns="0" tIns="0" rIns="0" bIns="0" rtlCol="0" anchor="ctr"/>
+          <a:lstStyle/>
+          <a:p>
+            <a:pPr algn="ctr" indent="0" marL="0">
+              <a:buNone/>
+            </a:pPr>
+            <a:r>
+              <a:rPr lang="en-US" sz="1150" dirty="0">
+                <a:solidFill>
+                  <a:srgbClr val="0D1B2A"/>
+                </a:solidFill>
+                <a:latin typeface="Calibri" pitchFamily="34" charset="0"/>
+                <a:ea typeface="Calibri" pitchFamily="34" charset="-122"/>
+                <a:cs typeface="Calibri" pitchFamily="34" charset="-120"/>
+              </a:rPr>
+              <a:t>0.2043</a:t>
+            </a:r>
+            <a:endParaRPr lang="en-US" sz="1150" dirty="0"/>
+          </a:p>
+        </p:txBody>
+      </p:sp>
+      <p:sp>
+        <p:nvSpPr>
+          <p:cNvPr id="39" name="Shape 37"/>
+          <p:cNvSpPr/>
+          <p:nvPr/>
+        </p:nvSpPr>
+        <p:spPr>
+          <a:xfrm>
+            <a:off x="8412480" y="2578608"/>
+            <a:ext cx="3200400" cy="566928"/>
+          </a:xfrm>
+          <a:prstGeom prst="rect">
+            <a:avLst/>
+          </a:prstGeom>
+          <a:solidFill>
+            <a:srgbClr val="EEF1F5"/>
+          </a:solidFill>
+          <a:ln w="12700">
+            <a:solidFill>
+              <a:srgbClr val="CADCFC"/>
+            </a:solidFill>
+            <a:prstDash val="solid"/>
+          </a:ln>
+        </p:spPr>
+      </p:sp>
+      <p:sp>
+        <p:nvSpPr>
+          <p:cNvPr id="40" name="Text 38"/>
+          <p:cNvSpPr/>
+          <p:nvPr/>
+        </p:nvSpPr>
+        <p:spPr>
+          <a:xfrm>
+            <a:off x="8412480" y="2578608"/>
+            <a:ext cx="3200400" cy="566928"/>
+          </a:xfrm>
+          <a:prstGeom prst="rect">
+            <a:avLst/>
+          </a:prstGeom>
+          <a:noFill/>
+          <a:ln/>
+        </p:spPr>
+        <p:txBody>
+          <a:bodyPr wrap="square" lIns="0" tIns="0" rIns="0" bIns="0" rtlCol="0" anchor="ctr"/>
+          <a:lstStyle/>
+          <a:p>
+            <a:pPr algn="ctr" indent="0" marL="0">
+              <a:buNone/>
+            </a:pPr>
+            <a:r>
+              <a:rPr lang="en-US" sz="1150" dirty="0">
+                <a:solidFill>
+                  <a:srgbClr val="0D1B2A"/>
+                </a:solidFill>
+                <a:latin typeface="Calibri" pitchFamily="34" charset="0"/>
+                <a:ea typeface="Calibri" pitchFamily="34" charset="-122"/>
+                <a:cs typeface="Calibri" pitchFamily="34" charset="-120"/>
+              </a:rPr>
+              <a:t>5-minute</a:t>
+            </a:r>
+            <a:endParaRPr lang="en-US" sz="1150" dirty="0"/>
+          </a:p>
+        </p:txBody>
+      </p:sp>
+      <p:sp>
+        <p:nvSpPr>
+          <p:cNvPr id="41" name="Shape 39"/>
+          <p:cNvSpPr/>
+          <p:nvPr/>
+        </p:nvSpPr>
+        <p:spPr>
+          <a:xfrm>
+            <a:off x="548640" y="3145536"/>
+            <a:ext cx="3474720" cy="566928"/>
+          </a:xfrm>
+          <a:prstGeom prst="rect">
+            <a:avLst/>
+          </a:prstGeom>
+          <a:solidFill>
+            <a:srgbClr val="FFFFFF"/>
+          </a:solidFill>
+          <a:ln w="12700">
+            <a:solidFill>
+              <a:srgbClr val="CADCFC"/>
+            </a:solidFill>
+            <a:prstDash val="solid"/>
+          </a:ln>
+        </p:spPr>
+      </p:sp>
+      <p:sp>
+        <p:nvSpPr>
+          <p:cNvPr id="42" name="Text 40"/>
+          <p:cNvSpPr/>
+          <p:nvPr/>
+        </p:nvSpPr>
+        <p:spPr>
+          <a:xfrm>
+            <a:off x="548640" y="3145536"/>
+            <a:ext cx="3474720" cy="566928"/>
+          </a:xfrm>
+          <a:prstGeom prst="rect">
+            <a:avLst/>
+          </a:prstGeom>
+          <a:noFill/>
+          <a:ln/>
+        </p:spPr>
+        <p:txBody>
+          <a:bodyPr wrap="square" lIns="91440" tIns="91440" rIns="91440" bIns="91440" rtlCol="0" anchor="ctr"/>
+          <a:lstStyle/>
+          <a:p>
+            <a:pPr algn="l" indent="0" marL="0">
+              <a:buNone/>
+            </a:pPr>
+            <a:r>
+              <a:rPr lang="en-US" sz="1150" b="1" dirty="0">
+                <a:solidFill>
+                  <a:srgbClr val="0D1B2A"/>
+                </a:solidFill>
+                <a:latin typeface="Calibri" pitchFamily="34" charset="0"/>
+                <a:ea typeface="Calibri" pitchFamily="34" charset="-122"/>
+                <a:cs typeface="Calibri" pitchFamily="34" charset="-120"/>
+              </a:rPr>
+              <a:t>EWMA — hourly</a:t>
+            </a:r>
+            <a:endParaRPr lang="en-US" sz="1150" dirty="0"/>
+          </a:p>
+        </p:txBody>
+      </p:sp>
+      <p:sp>
+        <p:nvSpPr>
+          <p:cNvPr id="43" name="Shape 41"/>
+          <p:cNvSpPr/>
+          <p:nvPr/>
+        </p:nvSpPr>
+        <p:spPr>
+          <a:xfrm>
+            <a:off x="4023360" y="3145536"/>
+            <a:ext cx="1463040" cy="566928"/>
+          </a:xfrm>
+          <a:prstGeom prst="rect">
+            <a:avLst/>
+          </a:prstGeom>
+          <a:solidFill>
+            <a:srgbClr val="FFFFFF"/>
+          </a:solidFill>
+          <a:ln w="12700">
+            <a:solidFill>
+              <a:srgbClr val="CADCFC"/>
+            </a:solidFill>
+            <a:prstDash val="solid"/>
+          </a:ln>
+        </p:spPr>
+      </p:sp>
+      <p:sp>
+        <p:nvSpPr>
+          <p:cNvPr id="44" name="Text 42"/>
+          <p:cNvSpPr/>
+          <p:nvPr/>
+        </p:nvSpPr>
+        <p:spPr>
+          <a:xfrm>
+            <a:off x="4023360" y="3145536"/>
+            <a:ext cx="1463040" cy="566928"/>
+          </a:xfrm>
+          <a:prstGeom prst="rect">
+            <a:avLst/>
+          </a:prstGeom>
+          <a:noFill/>
+          <a:ln/>
+        </p:spPr>
+        <p:txBody>
+          <a:bodyPr wrap="square" lIns="0" tIns="0" rIns="0" bIns="0" rtlCol="0" anchor="ctr"/>
+          <a:lstStyle/>
+          <a:p>
+            <a:pPr algn="ctr" indent="0" marL="0">
+              <a:buNone/>
+            </a:pPr>
+            <a:r>
+              <a:rPr lang="en-US" sz="1150" dirty="0">
+                <a:solidFill>
+                  <a:srgbClr val="0D1B2A"/>
+                </a:solidFill>
+                <a:latin typeface="Calibri" pitchFamily="34" charset="0"/>
+                <a:ea typeface="Calibri" pitchFamily="34" charset="-122"/>
+                <a:cs typeface="Calibri" pitchFamily="34" charset="-120"/>
+              </a:rPr>
+              <a:t>0.001540</a:t>
+            </a:r>
+            <a:endParaRPr lang="en-US" sz="1150" dirty="0"/>
+          </a:p>
+        </p:txBody>
+      </p:sp>
+      <p:sp>
+        <p:nvSpPr>
+          <p:cNvPr id="45" name="Shape 43"/>
+          <p:cNvSpPr/>
+          <p:nvPr/>
+        </p:nvSpPr>
+        <p:spPr>
+          <a:xfrm>
+            <a:off x="5486400" y="3145536"/>
+            <a:ext cx="1463040" cy="566928"/>
+          </a:xfrm>
+          <a:prstGeom prst="rect">
+            <a:avLst/>
+          </a:prstGeom>
+          <a:solidFill>
+            <a:srgbClr val="FFFFFF"/>
+          </a:solidFill>
+          <a:ln w="12700">
+            <a:solidFill>
+              <a:srgbClr val="CADCFC"/>
+            </a:solidFill>
+            <a:prstDash val="solid"/>
+          </a:ln>
+        </p:spPr>
+      </p:sp>
+      <p:sp>
+        <p:nvSpPr>
+          <p:cNvPr id="46" name="Text 44"/>
+          <p:cNvSpPr/>
+          <p:nvPr/>
+        </p:nvSpPr>
+        <p:spPr>
+          <a:xfrm>
+            <a:off x="5486400" y="3145536"/>
+            <a:ext cx="1463040" cy="566928"/>
+          </a:xfrm>
+          <a:prstGeom prst="rect">
+            <a:avLst/>
+          </a:prstGeom>
+          <a:noFill/>
+          <a:ln/>
+        </p:spPr>
+        <p:txBody>
+          <a:bodyPr wrap="square" lIns="0" tIns="0" rIns="0" bIns="0" rtlCol="0" anchor="ctr"/>
+          <a:lstStyle/>
+          <a:p>
+            <a:pPr algn="ctr" indent="0" marL="0">
+              <a:buNone/>
+            </a:pPr>
+            <a:r>
+              <a:rPr lang="en-US" sz="1150" dirty="0">
+                <a:solidFill>
+                  <a:srgbClr val="0D1B2A"/>
+                </a:solidFill>
+                <a:latin typeface="Calibri" pitchFamily="34" charset="0"/>
+                <a:ea typeface="Calibri" pitchFamily="34" charset="-122"/>
+                <a:cs typeface="Calibri" pitchFamily="34" charset="-120"/>
+              </a:rPr>
+              <a:t>0.001112</a:t>
+            </a:r>
+            <a:endParaRPr lang="en-US" sz="1150" dirty="0"/>
+          </a:p>
+        </p:txBody>
+      </p:sp>
+      <p:sp>
+        <p:nvSpPr>
+          <p:cNvPr id="47" name="Shape 45"/>
+          <p:cNvSpPr/>
+          <p:nvPr/>
+        </p:nvSpPr>
+        <p:spPr>
+          <a:xfrm>
+            <a:off x="6949440" y="3145536"/>
+            <a:ext cx="1463040" cy="566928"/>
+          </a:xfrm>
+          <a:prstGeom prst="rect">
+            <a:avLst/>
+          </a:prstGeom>
+          <a:solidFill>
+            <a:srgbClr val="FFFFFF"/>
+          </a:solidFill>
+          <a:ln w="12700">
+            <a:solidFill>
+              <a:srgbClr val="CADCFC"/>
+            </a:solidFill>
+            <a:prstDash val="solid"/>
+          </a:ln>
+        </p:spPr>
+      </p:sp>
+      <p:sp>
+        <p:nvSpPr>
+          <p:cNvPr id="48" name="Text 46"/>
+          <p:cNvSpPr/>
+          <p:nvPr/>
+        </p:nvSpPr>
+        <p:spPr>
+          <a:xfrm>
+            <a:off x="6949440" y="3145536"/>
+            <a:ext cx="1463040" cy="566928"/>
+          </a:xfrm>
+          <a:prstGeom prst="rect">
+            <a:avLst/>
+          </a:prstGeom>
+          <a:noFill/>
+          <a:ln/>
+        </p:spPr>
+        <p:txBody>
+          <a:bodyPr wrap="square" lIns="0" tIns="0" rIns="0" bIns="0" rtlCol="0" anchor="ctr"/>
+          <a:lstStyle/>
+          <a:p>
+            <a:pPr algn="ctr" indent="0" marL="0">
+              <a:buNone/>
+            </a:pPr>
+            <a:r>
+              <a:rPr lang="en-US" sz="1150" dirty="0">
+                <a:solidFill>
+                  <a:srgbClr val="0D1B2A"/>
+                </a:solidFill>
+                <a:latin typeface="Calibri" pitchFamily="34" charset="0"/>
+                <a:ea typeface="Calibri" pitchFamily="34" charset="-122"/>
+                <a:cs typeface="Calibri" pitchFamily="34" charset="-120"/>
+              </a:rPr>
+              <a:t>0.0133</a:t>
+            </a:r>
+            <a:endParaRPr lang="en-US" sz="1150" dirty="0"/>
+          </a:p>
+        </p:txBody>
+      </p:sp>
+      <p:sp>
+        <p:nvSpPr>
+          <p:cNvPr id="49" name="Shape 47"/>
+          <p:cNvSpPr/>
+          <p:nvPr/>
+        </p:nvSpPr>
+        <p:spPr>
+          <a:xfrm>
+            <a:off x="8412480" y="3145536"/>
+            <a:ext cx="3200400" cy="566928"/>
+          </a:xfrm>
+          <a:prstGeom prst="rect">
+            <a:avLst/>
+          </a:prstGeom>
+          <a:solidFill>
+            <a:srgbClr val="FFFFFF"/>
+          </a:solidFill>
+          <a:ln w="12700">
+            <a:solidFill>
+              <a:srgbClr val="CADCFC"/>
+            </a:solidFill>
+            <a:prstDash val="solid"/>
+          </a:ln>
+        </p:spPr>
+      </p:sp>
+      <p:sp>
+        <p:nvSpPr>
+          <p:cNvPr id="50" name="Text 48"/>
+          <p:cNvSpPr/>
+          <p:nvPr/>
+        </p:nvSpPr>
+        <p:spPr>
+          <a:xfrm>
+            <a:off x="8412480" y="3145536"/>
+            <a:ext cx="3200400" cy="566928"/>
+          </a:xfrm>
+          <a:prstGeom prst="rect">
+            <a:avLst/>
+          </a:prstGeom>
+          <a:noFill/>
+          <a:ln/>
+        </p:spPr>
+        <p:txBody>
+          <a:bodyPr wrap="square" lIns="0" tIns="0" rIns="0" bIns="0" rtlCol="0" anchor="ctr"/>
+          <a:lstStyle/>
+          <a:p>
+            <a:pPr algn="ctr" indent="0" marL="0">
+              <a:buNone/>
+            </a:pPr>
+            <a:r>
+              <a:rPr lang="en-US" sz="1150" dirty="0">
+                <a:solidFill>
+                  <a:srgbClr val="0D1B2A"/>
+                </a:solidFill>
+                <a:latin typeface="Calibri" pitchFamily="34" charset="0"/>
+                <a:ea typeface="Calibri" pitchFamily="34" charset="-122"/>
+                <a:cs typeface="Calibri" pitchFamily="34" charset="-120"/>
+              </a:rPr>
+              <a:t>Hourly</a:t>
+            </a:r>
+            <a:endParaRPr lang="en-US" sz="1150" dirty="0"/>
+          </a:p>
+        </p:txBody>
+      </p:sp>
+      <p:sp>
+        <p:nvSpPr>
+          <p:cNvPr id="51" name="Shape 49"/>
+          <p:cNvSpPr/>
+          <p:nvPr/>
+        </p:nvSpPr>
+        <p:spPr>
+          <a:xfrm>
+            <a:off x="548640" y="3712464"/>
+            <a:ext cx="3474720" cy="566928"/>
+          </a:xfrm>
+          <a:prstGeom prst="rect">
+            <a:avLst/>
+          </a:prstGeom>
+          <a:solidFill>
+            <a:srgbClr val="EEF1F5"/>
+          </a:solidFill>
+          <a:ln w="12700">
+            <a:solidFill>
+              <a:srgbClr val="CADCFC"/>
+            </a:solidFill>
+            <a:prstDash val="solid"/>
+          </a:ln>
+        </p:spPr>
+      </p:sp>
+      <p:sp>
+        <p:nvSpPr>
+          <p:cNvPr id="52" name="Text 50"/>
+          <p:cNvSpPr/>
+          <p:nvPr/>
+        </p:nvSpPr>
+        <p:spPr>
+          <a:xfrm>
+            <a:off x="548640" y="3712464"/>
+            <a:ext cx="3474720" cy="566928"/>
+          </a:xfrm>
+          <a:prstGeom prst="rect">
+            <a:avLst/>
+          </a:prstGeom>
+          <a:noFill/>
+          <a:ln/>
+        </p:spPr>
+        <p:txBody>
+          <a:bodyPr wrap="square" lIns="91440" tIns="91440" rIns="91440" bIns="91440" rtlCol="0" anchor="ctr"/>
+          <a:lstStyle/>
+          <a:p>
+            <a:pPr algn="l" indent="0" marL="0">
+              <a:buNone/>
+            </a:pPr>
+            <a:r>
+              <a:rPr lang="en-US" sz="1150" b="1" dirty="0">
+                <a:solidFill>
+                  <a:srgbClr val="0D1B2A"/>
+                </a:solidFill>
+                <a:latin typeface="Calibri" pitchFamily="34" charset="0"/>
+                <a:ea typeface="Calibri" pitchFamily="34" charset="-122"/>
+                <a:cs typeface="Calibri" pitchFamily="34" charset="-120"/>
+              </a:rPr>
+              <a:t>EWMA — 5-minute</a:t>
+            </a:r>
+            <a:endParaRPr lang="en-US" sz="1150" dirty="0"/>
+          </a:p>
+        </p:txBody>
+      </p:sp>
+      <p:sp>
+        <p:nvSpPr>
+          <p:cNvPr id="53" name="Shape 51"/>
+          <p:cNvSpPr/>
+          <p:nvPr/>
+        </p:nvSpPr>
+        <p:spPr>
+          <a:xfrm>
+            <a:off x="4023360" y="3712464"/>
+            <a:ext cx="1463040" cy="566928"/>
+          </a:xfrm>
+          <a:prstGeom prst="rect">
+            <a:avLst/>
+          </a:prstGeom>
+          <a:solidFill>
+            <a:srgbClr val="EEF1F5"/>
+          </a:solidFill>
+          <a:ln w="12700">
+            <a:solidFill>
+              <a:srgbClr val="CADCFC"/>
+            </a:solidFill>
+            <a:prstDash val="solid"/>
+          </a:ln>
+        </p:spPr>
+      </p:sp>
+      <p:sp>
+        <p:nvSpPr>
+          <p:cNvPr id="54" name="Text 52"/>
+          <p:cNvSpPr/>
+          <p:nvPr/>
+        </p:nvSpPr>
+        <p:spPr>
+          <a:xfrm>
+            <a:off x="4023360" y="3712464"/>
+            <a:ext cx="1463040" cy="566928"/>
+          </a:xfrm>
+          <a:prstGeom prst="rect">
+            <a:avLst/>
+          </a:prstGeom>
+          <a:noFill/>
+          <a:ln/>
+        </p:spPr>
+        <p:txBody>
+          <a:bodyPr wrap="square" lIns="0" tIns="0" rIns="0" bIns="0" rtlCol="0" anchor="ctr"/>
+          <a:lstStyle/>
+          <a:p>
+            <a:pPr algn="ctr" indent="0" marL="0">
+              <a:buNone/>
+            </a:pPr>
+            <a:r>
+              <a:rPr lang="en-US" sz="1150" dirty="0">
+                <a:solidFill>
+                  <a:srgbClr val="0D1B2A"/>
+                </a:solidFill>
+                <a:latin typeface="Calibri" pitchFamily="34" charset="0"/>
+                <a:ea typeface="Calibri" pitchFamily="34" charset="-122"/>
+                <a:cs typeface="Calibri" pitchFamily="34" charset="-120"/>
+              </a:rPr>
+              <a:t>0.019755</a:t>
+            </a:r>
+            <a:endParaRPr lang="en-US" sz="1150" dirty="0"/>
+          </a:p>
+        </p:txBody>
+      </p:sp>
+      <p:sp>
+        <p:nvSpPr>
+          <p:cNvPr id="55" name="Shape 53"/>
+          <p:cNvSpPr/>
+          <p:nvPr/>
+        </p:nvSpPr>
+        <p:spPr>
+          <a:xfrm>
+            <a:off x="5486400" y="3712464"/>
+            <a:ext cx="1463040" cy="566928"/>
+          </a:xfrm>
+          <a:prstGeom prst="rect">
+            <a:avLst/>
+          </a:prstGeom>
+          <a:solidFill>
+            <a:srgbClr val="EEF1F5"/>
+          </a:solidFill>
+          <a:ln w="12700">
+            <a:solidFill>
+              <a:srgbClr val="CADCFC"/>
+            </a:solidFill>
+            <a:prstDash val="solid"/>
+          </a:ln>
+        </p:spPr>
+      </p:sp>
+      <p:sp>
+        <p:nvSpPr>
+          <p:cNvPr id="56" name="Text 54"/>
+          <p:cNvSpPr/>
+          <p:nvPr/>
+        </p:nvSpPr>
+        <p:spPr>
+          <a:xfrm>
+            <a:off x="5486400" y="3712464"/>
+            <a:ext cx="1463040" cy="566928"/>
+          </a:xfrm>
+          <a:prstGeom prst="rect">
+            <a:avLst/>
+          </a:prstGeom>
+          <a:noFill/>
+          <a:ln/>
+        </p:spPr>
+        <p:txBody>
+          <a:bodyPr wrap="square" lIns="0" tIns="0" rIns="0" bIns="0" rtlCol="0" anchor="ctr"/>
+          <a:lstStyle/>
+          <a:p>
+            <a:pPr algn="ctr" indent="0" marL="0">
+              <a:buNone/>
+            </a:pPr>
+            <a:r>
+              <a:rPr lang="en-US" sz="1150" dirty="0">
+                <a:solidFill>
+                  <a:srgbClr val="0D1B2A"/>
+                </a:solidFill>
+                <a:latin typeface="Calibri" pitchFamily="34" charset="0"/>
+                <a:ea typeface="Calibri" pitchFamily="34" charset="-122"/>
+                <a:cs typeface="Calibri" pitchFamily="34" charset="-120"/>
+              </a:rPr>
+              <a:t>0.013238</a:t>
+            </a:r>
+            <a:endParaRPr lang="en-US" sz="1150" dirty="0"/>
+          </a:p>
+        </p:txBody>
+      </p:sp>
+      <p:sp>
+        <p:nvSpPr>
+          <p:cNvPr id="57" name="Shape 55"/>
+          <p:cNvSpPr/>
+          <p:nvPr/>
+        </p:nvSpPr>
+        <p:spPr>
+          <a:xfrm>
+            <a:off x="6949440" y="3712464"/>
+            <a:ext cx="1463040" cy="566928"/>
+          </a:xfrm>
+          <a:prstGeom prst="rect">
+            <a:avLst/>
+          </a:prstGeom>
+          <a:solidFill>
+            <a:srgbClr val="EEF1F5"/>
+          </a:solidFill>
+          <a:ln w="12700">
+            <a:solidFill>
+              <a:srgbClr val="CADCFC"/>
+            </a:solidFill>
+            <a:prstDash val="solid"/>
+          </a:ln>
+        </p:spPr>
+      </p:sp>
+      <p:sp>
+        <p:nvSpPr>
+          <p:cNvPr id="58" name="Text 56"/>
+          <p:cNvSpPr/>
+          <p:nvPr/>
+        </p:nvSpPr>
+        <p:spPr>
+          <a:xfrm>
+            <a:off x="6949440" y="3712464"/>
+            <a:ext cx="1463040" cy="566928"/>
+          </a:xfrm>
+          <a:prstGeom prst="rect">
+            <a:avLst/>
+          </a:prstGeom>
+          <a:noFill/>
+          <a:ln/>
+        </p:spPr>
+        <p:txBody>
+          <a:bodyPr wrap="square" lIns="0" tIns="0" rIns="0" bIns="0" rtlCol="0" anchor="ctr"/>
+          <a:lstStyle/>
+          <a:p>
+            <a:pPr algn="ctr" indent="0" marL="0">
+              <a:buNone/>
+            </a:pPr>
+            <a:r>
+              <a:rPr lang="en-US" sz="1150" dirty="0">
+                <a:solidFill>
+                  <a:srgbClr val="0D1B2A"/>
+                </a:solidFill>
+                <a:latin typeface="Calibri" pitchFamily="34" charset="0"/>
+                <a:ea typeface="Calibri" pitchFamily="34" charset="-122"/>
+                <a:cs typeface="Calibri" pitchFamily="34" charset="-120"/>
+              </a:rPr>
+              <a:t>0.1470</a:t>
+            </a:r>
+            <a:endParaRPr lang="en-US" sz="1150" dirty="0"/>
+          </a:p>
+        </p:txBody>
+      </p:sp>
+      <p:sp>
+        <p:nvSpPr>
+          <p:cNvPr id="59" name="Shape 57"/>
+          <p:cNvSpPr/>
+          <p:nvPr/>
+        </p:nvSpPr>
+        <p:spPr>
+          <a:xfrm>
+            <a:off x="8412480" y="3712464"/>
+            <a:ext cx="3200400" cy="566928"/>
+          </a:xfrm>
+          <a:prstGeom prst="rect">
+            <a:avLst/>
+          </a:prstGeom>
+          <a:solidFill>
+            <a:srgbClr val="EEF1F5"/>
+          </a:solidFill>
+          <a:ln w="12700">
+            <a:solidFill>
+              <a:srgbClr val="CADCFC"/>
+            </a:solidFill>
+            <a:prstDash val="solid"/>
+          </a:ln>
+        </p:spPr>
+      </p:sp>
+      <p:sp>
+        <p:nvSpPr>
+          <p:cNvPr id="60" name="Text 58"/>
+          <p:cNvSpPr/>
+          <p:nvPr/>
+        </p:nvSpPr>
+        <p:spPr>
+          <a:xfrm>
+            <a:off x="8412480" y="3712464"/>
+            <a:ext cx="3200400" cy="566928"/>
+          </a:xfrm>
+          <a:prstGeom prst="rect">
+            <a:avLst/>
+          </a:prstGeom>
+          <a:noFill/>
+          <a:ln/>
+        </p:spPr>
+        <p:txBody>
+          <a:bodyPr wrap="square" lIns="0" tIns="0" rIns="0" bIns="0" rtlCol="0" anchor="ctr"/>
+          <a:lstStyle/>
+          <a:p>
+            <a:pPr algn="ctr" indent="0" marL="0">
+              <a:buNone/>
+            </a:pPr>
+            <a:r>
+              <a:rPr lang="en-US" sz="1150" dirty="0">
+                <a:solidFill>
+                  <a:srgbClr val="0D1B2A"/>
+                </a:solidFill>
+                <a:latin typeface="Calibri" pitchFamily="34" charset="0"/>
+                <a:ea typeface="Calibri" pitchFamily="34" charset="-122"/>
+                <a:cs typeface="Calibri" pitchFamily="34" charset="-120"/>
+              </a:rPr>
+              <a:t>5-minute</a:t>
+            </a:r>
+            <a:endParaRPr lang="en-US" sz="1150" dirty="0"/>
+          </a:p>
+        </p:txBody>
+      </p:sp>
+      <p:sp>
+        <p:nvSpPr>
+          <p:cNvPr id="71" name="Text 69"/>
+          <p:cNvSpPr/>
+          <p:nvPr/>
+        </p:nvSpPr>
+        <p:spPr>
+          <a:xfrm>
+            <a:off x="548640" y="4389120"/>
+            <a:ext cx="11064240" cy="274320"/>
+          </a:xfrm>
+          <a:prstGeom prst="rect">
+            <a:avLst/>
+          </a:prstGeom>
+          <a:noFill/>
+          <a:ln/>
+        </p:spPr>
+        <p:txBody>
+          <a:bodyPr wrap="square" rtlCol="0" anchor="ctr"/>
+          <a:lstStyle/>
+          <a:p>
+            <a:pPr algn="ctr" indent="0" marL="0">
+              <a:buNone/>
+            </a:pPr>
+            <a:r>
+              <a:rPr lang="en-US" sz="1050" i="1" dirty="0">
+                <a:solidFill>
+                  <a:srgbClr val="5C6B7A"/>
+                </a:solidFill>
+                <a:latin typeface="Calibri" pitchFamily="34" charset="0"/>
+                <a:ea typeface="Calibri" pitchFamily="34" charset="-122"/>
+                <a:cs typeface="Calibri" pitchFamily="34" charset="-120"/>
+              </a:rPr>
+              <a:t>RMSE isn't directly comparable across resolutions — the target's absolute scale changes by construction. R² is the fair comparison.</a:t>
+            </a:r>
+            <a:endParaRPr lang="en-US" sz="1050" dirty="0"/>
+          </a:p>
+        </p:txBody>
+      </p:sp>
+      <p:sp>
+        <p:nvSpPr>
+          <p:cNvPr id="72" name="Shape 70"/>
+          <p:cNvSpPr/>
+          <p:nvPr/>
+        </p:nvSpPr>
+        <p:spPr>
+          <a:xfrm>
+            <a:off x="548640" y="4782312"/>
+            <a:ext cx="11064240" cy="914400"/>
+          </a:xfrm>
+          <a:prstGeom prst="roundRect">
+            <a:avLst>
+              <a:gd name="adj" fmla="val 8000"/>
+            </a:avLst>
+          </a:prstGeom>
+          <a:solidFill>
+            <a:srgbClr val="FFFFFF"/>
+          </a:solidFill>
+          <a:ln w="19050">
+            <a:solidFill>
+              <a:srgbClr val="F7931A"/>
+            </a:solidFill>
+            <a:prstDash val="solid"/>
+          </a:ln>
+        </p:spPr>
+      </p:sp>
+      <p:sp>
+        <p:nvSpPr>
+          <p:cNvPr id="73" name="Text 71"/>
+          <p:cNvSpPr/>
+          <p:nvPr/>
+        </p:nvSpPr>
+        <p:spPr>
+          <a:xfrm>
+            <a:off x="822960" y="4901184"/>
+            <a:ext cx="10515600" cy="731520"/>
+          </a:xfrm>
+          <a:prstGeom prst="rect">
+            <a:avLst/>
+          </a:prstGeom>
+          <a:noFill/>
+          <a:ln/>
+        </p:spPr>
+        <p:txBody>
+          <a:bodyPr wrap="square" rtlCol="0" anchor="t"/>
+          <a:lstStyle/>
+          <a:p>
+            <a:pPr indent="0" marL="0">
+              <a:lnSpc>
+                <a:spcPct val="112000"/>
+              </a:lnSpc>
+              <a:buNone/>
+            </a:pPr>
+            <a:r>
+              <a:rPr lang="en-US" sz="1200" b="1" dirty="0">
+                <a:solidFill>
+                  <a:srgbClr val="F7931A"/>
+                </a:solidFill>
+                <a:latin typeface="Calibri" pitchFamily="34" charset="0"/>
+                <a:ea typeface="Calibri" pitchFamily="34" charset="-122"/>
+                <a:cs typeface="Calibri" pitchFamily="34" charset="-120"/>
+              </a:rPr>
+              <a:t>Key finding:  both models improve substantially on live data at 5-minute resolution — HAR-RV-X's R² more than triples (0.061 → 0.204); EWMA's improves even more (0.013 → 0.147), closing most of the gap to HAR-RV-X. GARCH and Holt-Winters were not re-fit at this resolution (cost/benefit reasoning in the report).</a:t>
+            </a:r>
+            <a:pPr indent="0" marL="0">
+              <a:lnSpc>
+                <a:spcPct val="112000"/>
+              </a:lnSpc>
+              <a:buNone/>
+            </a:pPr>
+            <a:r>
+              <a:rPr lang="en-US" sz="1200" dirty="0">
+                <a:solidFill>
+                  <a:srgbClr val="0D1B2A"/>
+                </a:solidFill>
+                <a:latin typeface="Calibri" pitchFamily="34" charset="0"/>
+                <a:ea typeface="Calibri" pitchFamily="34" charset="-122"/>
+                <a:cs typeface="Calibri" pitchFamily="34" charset="-120"/>
+              </a:rPr>
+              <a:t/>
+            </a:r>
+            <a:endParaRPr lang="en-US" sz="1200" dirty="0"/>
+          </a:p>
+        </p:txBody>
+      </p:sp>
+    </p:spTree>
+  </p:cSld>
+  <p:clrMapOvr>
+    <a:masterClrMapping/>
+  </p:clrMapOvr>
+</p:sld>
+</file>
+
+<file path=ppt/slides/slide14.xml><?xml version="1.0" encoding="utf-8"?>
 <p:sld xmlns:a="http://schemas.openxmlformats.org/drawingml/2006/main" xmlns:r="http://schemas.openxmlformats.org/officeDocument/2006/relationships" xmlns:p="http://schemas.openxmlformats.org/presentationml/2006/main">
   <p:cSld name="Slide 12">
     <p:bg>
@@ -8026,7 +10038,7 @@
                 <a:ea typeface="Calibri" pitchFamily="34" charset="-122"/>
                 <a:cs typeface="Calibri" pitchFamily="34" charset="-120"/>
               </a:rPr>
-              <a:t>13</a:t>
+              <a:t>14</a:t>
             </a:r>
             <a:endParaRPr lang="en-US" sz="900" dirty="0"/>
           </a:p>
@@ -8664,7 +10676,7 @@
 </p:sld>
 </file>
 
-<file path=ppt/slides/slide14.xml><?xml version="1.0" encoding="utf-8"?>
+<file path=ppt/slides/slide15.xml><?xml version="1.0" encoding="utf-8"?>
 <p:sld xmlns:a="http://schemas.openxmlformats.org/drawingml/2006/main" xmlns:r="http://schemas.openxmlformats.org/officeDocument/2006/relationships" xmlns:p="http://schemas.openxmlformats.org/presentationml/2006/main">
   <p:cSld name="Slide 13">
     <p:bg>

--- a/presentation/capstone-btc-volatility.pptx
+++ b/presentation/capstone-btc-volatility.pptx
@@ -9652,7 +9652,7 @@
                 <a:ea typeface="Calibri" pitchFamily="34" charset="-122"/>
                 <a:cs typeface="Calibri" pitchFamily="34" charset="-120"/>
               </a:rPr>
-              <a:t>RMSE isn't directly comparable across resolutions — the target's absolute scale changes by construction. R² is the fair comparison.</a:t>
+              <a:t>RMSE isn't directly comparable across resolutions — the target's absolute scale changes by construction. R² is the fair comparison. Documented as Check 11 in the main notebook — the one confirmed win among its eleven robustness checks.</a:t>
             </a:r>
             <a:endParaRPr lang="en-US" sz="1050" dirty="0"/>
           </a:p>

--- a/presentation/capstone-btc-volatility.pptx
+++ b/presentation/capstone-btc-volatility.pptx
@@ -10430,7 +10430,7 @@
                 <a:ea typeface="Calibri" pitchFamily="34" charset="-122"/>
                 <a:cs typeface="Calibri" pitchFamily="34" charset="-120"/>
               </a:rPr>
-              <a:t>RSI/EMA/MACD/Bollinger width as extra regressors, and a HAR-RV-X + EWMA ensemble, were both tested and didn't survive proper validation</a:t>
+              <a:t>Twelve robustness checks tested (XGBoost, LSTM, stacked ensembles, ETH spillover, winsorizing, and more) — two adopted, ten didn't survive validation</a:t>
             </a:r>
             <a:endParaRPr lang="en-US" sz="1100" dirty="0"/>
           </a:p>
@@ -10662,7 +10662,7 @@
                 <a:ea typeface="Calibri" pitchFamily="34" charset="-122"/>
                 <a:cs typeface="Calibri" pitchFamily="34" charset="-120"/>
               </a:rPr>
-              <a:t>A genuine stacked ensemble (learned, not the fixed blend that failed validation)</a:t>
+              <a:t>On-chain metrics (exchange netflows, active addresses) — a genuinely independent information source, distinct from every price-history feature tested so far</a:t>
             </a:r>
             <a:endParaRPr lang="en-US" sz="1100" dirty="0"/>
           </a:p>

--- a/presentation/capstone-btc-volatility.pptx
+++ b/presentation/capstone-btc-volatility.pptx
@@ -3874,7 +3874,7 @@
                 <a:ea typeface="Calibri" pitchFamily="34" charset="-122"/>
                 <a:cs typeface="Calibri" pitchFamily="34" charset="-120"/>
               </a:rPr>
-              <a:t>HAR-RV → HAR-RV-X</a:t>
+              <a:t>HAR-RV → HAR-RV-X (Final)</a:t>
             </a:r>
             <a:endParaRPr lang="en-US" sz="1150" dirty="0"/>
           </a:p>
@@ -3938,7 +3938,7 @@
                 <a:ea typeface="Calibri" pitchFamily="34" charset="-122"/>
                 <a:cs typeface="Calibri" pitchFamily="34" charset="-120"/>
               </a:rPr>
-              <a:t>0.001418</a:t>
+              <a:t>0.001405</a:t>
             </a:r>
             <a:endParaRPr lang="en-US" sz="1150" dirty="0"/>
           </a:p>
@@ -4002,7 +4002,7 @@
                 <a:ea typeface="Calibri" pitchFamily="34" charset="-122"/>
                 <a:cs typeface="Calibri" pitchFamily="34" charset="-120"/>
               </a:rPr>
-              <a:t>0.001118</a:t>
+              <a:t>0.001110</a:t>
             </a:r>
             <a:endParaRPr lang="en-US" sz="1150" dirty="0"/>
           </a:p>
@@ -4066,7 +4066,7 @@
                 <a:ea typeface="Calibri" pitchFamily="34" charset="-122"/>
                 <a:cs typeface="Calibri" pitchFamily="34" charset="-120"/>
               </a:rPr>
-              <a:t>0.1840</a:t>
+              <a:t>0.1992</a:t>
             </a:r>
             <a:endParaRPr lang="en-US" sz="1150" dirty="0"/>
           </a:p>
@@ -4575,7 +4575,7 @@
                 <a:ea typeface="Calibri" pitchFamily="34" charset="-122"/>
                 <a:cs typeface="Calibri" pitchFamily="34" charset="-120"/>
               </a:rPr>
-              <a:t>HAR-RV-X (Tuned), by a margin of 14.0% lower RMSE than naive persistence — a genuine, working model, not an artifact. EWMA is a close second and also beats persistence. GARCH and Holt-Winters both underperform naive persistence badly at this horizon. The Live Testing section (next) checks whether this ranking holds on genuinely unseen data.</a:t>
+              <a:t>HAR-RV-X (Final, + EWMA_X + SKEW_X), by a margin of 14.8% lower RMSE than naive persistence — a genuine, working model, not an artifact. EWMA is a close second and also beats persistence. GARCH and Holt-Winters both underperform naive persistence badly at this horizon. The Live Testing section (next) checks whether this ranking holds on genuinely unseen data.</a:t>
             </a:r>
             <a:endParaRPr lang="en-US" sz="1200" dirty="0"/>
           </a:p>
@@ -6450,7 +6450,7 @@
                 <a:ea typeface="Calibri" pitchFamily="34" charset="-122"/>
                 <a:cs typeface="Calibri" pitchFamily="34" charset="-120"/>
               </a:rPr>
-              <a:t>0.001502</a:t>
+              <a:t>0.001453</a:t>
             </a:r>
             <a:endParaRPr lang="en-US" sz="1150" dirty="0"/>
           </a:p>
@@ -6514,7 +6514,7 @@
                 <a:ea typeface="Calibri" pitchFamily="34" charset="-122"/>
                 <a:cs typeface="Calibri" pitchFamily="34" charset="-120"/>
               </a:rPr>
-              <a:t>0.001259</a:t>
+              <a:t>0.001204</a:t>
             </a:r>
             <a:endParaRPr lang="en-US" sz="1150" dirty="0"/>
           </a:p>
@@ -6578,7 +6578,7 @@
                 <a:ea typeface="Calibri" pitchFamily="34" charset="-122"/>
                 <a:cs typeface="Calibri" pitchFamily="34" charset="-120"/>
               </a:rPr>
-              <a:t>0.0610</a:t>
+              <a:t>0.1217</a:t>
             </a:r>
             <a:endParaRPr lang="en-US" sz="1150" dirty="0"/>
           </a:p>
@@ -7727,7 +7727,7 @@
                 <a:ea typeface="Calibri" pitchFamily="34" charset="-122"/>
                 <a:cs typeface="Calibri" pitchFamily="34" charset="-120"/>
               </a:rPr>
-              <a:t>HAR-RV-X, the strongest model on every metric on genuinely unseen data (RMSE 0.001502, R² 0.0610). EWMA is a close second and has the lowest MAPE of any model (22.90%). Naive persistence, no longer propped up by an easy horizon, posts a negative R². GARCH collapses entirely (R² -110.7, MAPE 409%) — a structural weakness at this horizon, not a bug.</a:t>
+              <a:t>HAR-RV-X (Final, + EWMA_X + SKEW_X), the strongest model on every metric on genuinely unseen data (RMSE 0.001453, R² 0.1217). EWMA is a close second and has the lowest MAPE of any model (22.90%). Naive persistence, no longer propped up by an easy horizon, posts a negative R². GARCH collapses entirely (R² -110.7, MAPE 409%) — a structural weakness at this horizon, not a bug.</a:t>
             </a:r>
             <a:endParaRPr lang="en-US" sz="1200" dirty="0"/>
           </a:p>
@@ -8461,7 +8461,7 @@
                 <a:ea typeface="Calibri" pitchFamily="34" charset="-122"/>
                 <a:cs typeface="Calibri" pitchFamily="34" charset="-120"/>
               </a:rPr>
-              <a:t>0.001502</a:t>
+              <a:t>0.001453</a:t>
             </a:r>
             <a:endParaRPr lang="en-US" sz="1150" dirty="0"/>
           </a:p>
@@ -8525,7 +8525,7 @@
                 <a:ea typeface="Calibri" pitchFamily="34" charset="-122"/>
                 <a:cs typeface="Calibri" pitchFamily="34" charset="-120"/>
               </a:rPr>
-              <a:t>0.001259</a:t>
+              <a:t>0.001204</a:t>
             </a:r>
             <a:endParaRPr lang="en-US" sz="1150" dirty="0"/>
           </a:p>
@@ -8589,7 +8589,7 @@
                 <a:ea typeface="Calibri" pitchFamily="34" charset="-122"/>
                 <a:cs typeface="Calibri" pitchFamily="34" charset="-120"/>
               </a:rPr>
-              <a:t>0.0610</a:t>
+              <a:t>0.1217</a:t>
             </a:r>
             <a:endParaRPr lang="en-US" sz="1150" dirty="0"/>
           </a:p>
@@ -9652,7 +9652,7 @@
                 <a:ea typeface="Calibri" pitchFamily="34" charset="-122"/>
                 <a:cs typeface="Calibri" pitchFamily="34" charset="-120"/>
               </a:rPr>
-              <a:t>RMSE isn't directly comparable across resolutions — the target's absolute scale changes by construction. R² is the fair comparison. Documented as Check 11 in the main notebook — the one confirmed win among its eleven robustness checks.</a:t>
+              <a:t>RMSE isn't directly comparable across resolutions — the target's absolute scale changes by construction. R² is the fair comparison. Documented as Check 11 in the main notebook — one of two checks (of fourteen) that survived validation.</a:t>
             </a:r>
             <a:endParaRPr lang="en-US" sz="1050" dirty="0"/>
           </a:p>
@@ -9721,7 +9721,7 @@
                 <a:ea typeface="Calibri" pitchFamily="34" charset="-122"/>
                 <a:cs typeface="Calibri" pitchFamily="34" charset="-120"/>
               </a:rPr>
-              <a:t>Key finding:  both models improve substantially on live data at 5-minute resolution — HAR-RV-X's R² more than triples (0.061 → 0.204); EWMA's improves even more (0.013 → 0.147), closing most of the gap to HAR-RV-X. GARCH and Holt-Winters were not re-fit at this resolution (cost/benefit reasoning in the report).</a:t>
+              <a:t>Key finding:  both models improve on live data at 5-minute resolution, though by different margins now that HAR-RV-X's hourly baseline is stronger (a later robustness check promoted two more regressors into it) — HAR-RV-X's R² goes from 0.122 to 0.204 (about 1.7x); EWMA's improves far more, from 0.013 to 0.147 (about 11x), closing most of the gap to HAR-RV-X. GARCH and Holt-Winters were not re-fit at this resolution (cost/benefit reasoning in the report).</a:t>
             </a:r>
             <a:pPr indent="0" marL="0">
               <a:lnSpc>
@@ -10430,7 +10430,7 @@
                 <a:ea typeface="Calibri" pitchFamily="34" charset="-122"/>
                 <a:cs typeface="Calibri" pitchFamily="34" charset="-120"/>
               </a:rPr>
-              <a:t>Twelve robustness checks tested (XGBoost, LSTM, stacked ensembles, ETH spillover, winsorizing, and more) — two adopted, ten didn't survive validation</a:t>
+              <a:t>Fourteen robustness checks tested (XGBoost, LSTM, stacked ensembles, ETH spillover, winsorizing, and more) — two survived validation and were adopted, twelve didn't</a:t>
             </a:r>
             <a:endParaRPr lang="en-US" sz="1100" dirty="0"/>
           </a:p>
@@ -18310,7 +18310,7 @@
                 <a:ea typeface="Calibri" pitchFamily="34" charset="-122"/>
                 <a:cs typeface="Calibri" pitchFamily="34" charset="-120"/>
               </a:rPr>
-              <a:t>The best model in this deck on both the historical split and live, unseen data — coefficients are directly readable, and the fix that got it here came from investigating a suspicious result rather than accepting it.</a:t>
+              <a:t>The best model in this deck on both the historical split and live, unseen data — coefficients are directly readable, and the fix that got it here came from investigating a suspicious result rather than accepting it. A later robustness check added two more regressors (EWMA's own sigma, realized skewness), validated on live data before adoption — R² 0.1992 historical / 0.1217 live (slides 10, 12).</a:t>
             </a:r>
             <a:endParaRPr lang="en-US" sz="1050" dirty="0"/>
           </a:p>

--- a/presentation/capstone-btc-volatility.pptx
+++ b/presentation/capstone-btc-volatility.pptx
@@ -9652,7 +9652,7 @@
                 <a:ea typeface="Calibri" pitchFamily="34" charset="-122"/>
                 <a:cs typeface="Calibri" pitchFamily="34" charset="-120"/>
               </a:rPr>
-              <a:t>RMSE isn't directly comparable across resolutions — the target's absolute scale changes by construction. R² is the fair comparison. Documented as Check 11 in the main notebook — one of two checks (of fourteen) that survived validation.</a:t>
+              <a:t>RMSE isn't directly comparable across resolutions — the target's absolute scale changes by construction. R² is the fair comparison. Documented as Check 11 in the main notebook — one of two checks (of sixteen) that survived validation.</a:t>
             </a:r>
             <a:endParaRPr lang="en-US" sz="1050" dirty="0"/>
           </a:p>
@@ -10430,7 +10430,7 @@
                 <a:ea typeface="Calibri" pitchFamily="34" charset="-122"/>
                 <a:cs typeface="Calibri" pitchFamily="34" charset="-120"/>
               </a:rPr>
-              <a:t>Fourteen robustness checks tested (XGBoost, LSTM, stacked ensembles, ETH spillover, winsorizing, and more) — two survived validation and were adopted, twelve didn't</a:t>
+              <a:t>Sixteen robustness checks tested (XGBoost, LSTM, stacked ensembles, ETH spillover, winsorizing, and more) — two survived validation and were adopted, fourteen didn't</a:t>
             </a:r>
             <a:endParaRPr lang="en-US" sz="1100" dirty="0"/>
           </a:p>

--- a/presentation/capstone-btc-volatility.pptx
+++ b/presentation/capstone-btc-volatility.pptx
@@ -8781,7 +8781,7 @@
                 <a:ea typeface="Calibri" pitchFamily="34" charset="-122"/>
                 <a:cs typeface="Calibri" pitchFamily="34" charset="-120"/>
               </a:rPr>
-              <a:t>0.019080</a:t>
+              <a:t>0.018645</a:t>
             </a:r>
             <a:endParaRPr lang="en-US" sz="1150" dirty="0"/>
           </a:p>
@@ -8845,7 +8845,7 @@
                 <a:ea typeface="Calibri" pitchFamily="34" charset="-122"/>
                 <a:cs typeface="Calibri" pitchFamily="34" charset="-120"/>
               </a:rPr>
-              <a:t>0.015477</a:t>
+              <a:t>0.014949</a:t>
             </a:r>
             <a:endParaRPr lang="en-US" sz="1150" dirty="0"/>
           </a:p>
@@ -8909,7 +8909,7 @@
                 <a:ea typeface="Calibri" pitchFamily="34" charset="-122"/>
                 <a:cs typeface="Calibri" pitchFamily="34" charset="-120"/>
               </a:rPr>
-              <a:t>0.2043</a:t>
+              <a:t>0.2401</a:t>
             </a:r>
             <a:endParaRPr lang="en-US" sz="1150" dirty="0"/>
           </a:p>
@@ -9721,7 +9721,7 @@
                 <a:ea typeface="Calibri" pitchFamily="34" charset="-122"/>
                 <a:cs typeface="Calibri" pitchFamily="34" charset="-120"/>
               </a:rPr>
-              <a:t>Key finding:  both models improve on live data at 5-minute resolution, though by different margins now that HAR-RV-X's hourly baseline is stronger (a later robustness check promoted two more regressors into it) — HAR-RV-X's R² goes from 0.122 to 0.204 (about 1.7x); EWMA's improves far more, from 0.013 to 0.147 (about 11x), closing most of the gap to HAR-RV-X. GARCH and Holt-Winters were not re-fit at this resolution (cost/benefit reasoning in the report).</a:t>
+              <a:t>Key finding:  both models improve on live data at 5-minute resolution - HAR-RV-X's own promotion (EWMA_X + SKEW_X, Section 7.4.4) has since been ported here too, so both rows reflect the same model. HAR-RV-X's R² goes from 0.122 to 0.240 (about 2.0x); EWMA's improves far more, from 0.013 to 0.147 (about 11x). GARCH and Holt-Winters were not re-fit at this resolution (cost/benefit reasoning in the report).</a:t>
             </a:r>
             <a:pPr indent="0" marL="0">
               <a:lnSpc>

--- a/presentation/capstone-btc-volatility.pptx
+++ b/presentation/capstone-btc-volatility.pptx
@@ -3938,7 +3938,7 @@
                 <a:ea typeface="Calibri" pitchFamily="34" charset="-122"/>
                 <a:cs typeface="Calibri" pitchFamily="34" charset="-120"/>
               </a:rPr>
-              <a:t>0.001405</a:t>
+              <a:t>0.001367</a:t>
             </a:r>
             <a:endParaRPr lang="en-US" sz="1150" dirty="0"/>
           </a:p>
@@ -4002,7 +4002,7 @@
                 <a:ea typeface="Calibri" pitchFamily="34" charset="-122"/>
                 <a:cs typeface="Calibri" pitchFamily="34" charset="-120"/>
               </a:rPr>
-              <a:t>0.001110</a:t>
+              <a:t>0.001036</a:t>
             </a:r>
             <a:endParaRPr lang="en-US" sz="1150" dirty="0"/>
           </a:p>
@@ -4066,7 +4066,7 @@
                 <a:ea typeface="Calibri" pitchFamily="34" charset="-122"/>
                 <a:cs typeface="Calibri" pitchFamily="34" charset="-120"/>
               </a:rPr>
-              <a:t>0.1992</a:t>
+              <a:t>0.2419</a:t>
             </a:r>
             <a:endParaRPr lang="en-US" sz="1150" dirty="0"/>
           </a:p>
@@ -4575,7 +4575,7 @@
                 <a:ea typeface="Calibri" pitchFamily="34" charset="-122"/>
                 <a:cs typeface="Calibri" pitchFamily="34" charset="-120"/>
               </a:rPr>
-              <a:t>HAR-RV-X (Final, + EWMA_X + SKEW_X), by a margin of 14.8% lower RMSE than naive persistence — a genuine, working model, not an artifact. EWMA is a close second and also beats persistence. GARCH and Holt-Winters both underperform naive persistence badly at this horizon. The Live Testing section (next) checks whether this ranking holds on genuinely unseen data.</a:t>
+              <a:t>HAR-RV-X (Final, + EWMA_X + SKEW_X, log target), by a margin of 17.1% lower RMSE than naive persistence — a genuine, working model, not an artifact. EWMA is a close second and also beats persistence. GARCH and Holt-Winters both underperform naive persistence badly at this horizon. The Live Testing section (next) checks whether this ranking holds on genuinely unseen data.</a:t>
             </a:r>
             <a:endParaRPr lang="en-US" sz="1200" dirty="0"/>
           </a:p>
@@ -6450,7 +6450,7 @@
                 <a:ea typeface="Calibri" pitchFamily="34" charset="-122"/>
                 <a:cs typeface="Calibri" pitchFamily="34" charset="-120"/>
               </a:rPr>
-              <a:t>0.001453</a:t>
+              <a:t>0.001406</a:t>
             </a:r>
             <a:endParaRPr lang="en-US" sz="1150" dirty="0"/>
           </a:p>
@@ -6514,7 +6514,7 @@
                 <a:ea typeface="Calibri" pitchFamily="34" charset="-122"/>
                 <a:cs typeface="Calibri" pitchFamily="34" charset="-120"/>
               </a:rPr>
-              <a:t>0.001204</a:t>
+              <a:t>0.001139</a:t>
             </a:r>
             <a:endParaRPr lang="en-US" sz="1150" dirty="0"/>
           </a:p>
@@ -6578,7 +6578,7 @@
                 <a:ea typeface="Calibri" pitchFamily="34" charset="-122"/>
                 <a:cs typeface="Calibri" pitchFamily="34" charset="-120"/>
               </a:rPr>
-              <a:t>0.1217</a:t>
+              <a:t>0.1779</a:t>
             </a:r>
             <a:endParaRPr lang="en-US" sz="1150" dirty="0"/>
           </a:p>
@@ -7727,7 +7727,7 @@
                 <a:ea typeface="Calibri" pitchFamily="34" charset="-122"/>
                 <a:cs typeface="Calibri" pitchFamily="34" charset="-120"/>
               </a:rPr>
-              <a:t>HAR-RV-X (Final, + EWMA_X + SKEW_X), the strongest model on every metric on genuinely unseen data (RMSE 0.001453, R² 0.1217). EWMA is a close second and has the lowest MAPE of any model (22.90%). Naive persistence, no longer propped up by an easy horizon, posts a negative R². GARCH collapses entirely (R² -110.7, MAPE 409%) — a structural weakness at this horizon, not a bug.</a:t>
+              <a:t>HAR-RV-X (Final, + EWMA_X + SKEW_X, log target), the strongest model on every metric on genuinely unseen data (RMSE 0.001406, R² 0.1779). EWMA is a close second and has the lowest MAPE of any model (22.90%). Naive persistence, no longer propped up by an easy horizon, posts a negative R². GARCH collapses entirely (R² -110.7, MAPE 409%) — a structural weakness at this horizon, not a bug.</a:t>
             </a:r>
             <a:endParaRPr lang="en-US" sz="1200" dirty="0"/>
           </a:p>
@@ -8461,7 +8461,7 @@
                 <a:ea typeface="Calibri" pitchFamily="34" charset="-122"/>
                 <a:cs typeface="Calibri" pitchFamily="34" charset="-120"/>
               </a:rPr>
-              <a:t>0.001453</a:t>
+              <a:t>0.001406</a:t>
             </a:r>
             <a:endParaRPr lang="en-US" sz="1150" dirty="0"/>
           </a:p>
@@ -8525,7 +8525,7 @@
                 <a:ea typeface="Calibri" pitchFamily="34" charset="-122"/>
                 <a:cs typeface="Calibri" pitchFamily="34" charset="-120"/>
               </a:rPr>
-              <a:t>0.001204</a:t>
+              <a:t>0.001139</a:t>
             </a:r>
             <a:endParaRPr lang="en-US" sz="1150" dirty="0"/>
           </a:p>
@@ -8589,7 +8589,7 @@
                 <a:ea typeface="Calibri" pitchFamily="34" charset="-122"/>
                 <a:cs typeface="Calibri" pitchFamily="34" charset="-120"/>
               </a:rPr>
-              <a:t>0.1217</a:t>
+              <a:t>0.1779</a:t>
             </a:r>
             <a:endParaRPr lang="en-US" sz="1150" dirty="0"/>
           </a:p>
@@ -9652,7 +9652,7 @@
                 <a:ea typeface="Calibri" pitchFamily="34" charset="-122"/>
                 <a:cs typeface="Calibri" pitchFamily="34" charset="-120"/>
               </a:rPr>
-              <a:t>RMSE isn't directly comparable across resolutions — the target's absolute scale changes by construction. R² is the fair comparison. Documented as Check 11 in the main notebook — one of two checks (of sixteen) that survived validation.</a:t>
+              <a:t>RMSE isn't directly comparable across resolutions — the target's absolute scale changes by construction. R² is the fair comparison. Documented as Check 11 in the main notebook — one of four checks (of eighteen) that survived validation.</a:t>
             </a:r>
             <a:endParaRPr lang="en-US" sz="1050" dirty="0"/>
           </a:p>
@@ -9721,7 +9721,7 @@
                 <a:ea typeface="Calibri" pitchFamily="34" charset="-122"/>
                 <a:cs typeface="Calibri" pitchFamily="34" charset="-120"/>
               </a:rPr>
-              <a:t>Key finding:  both models improve on live data at 5-minute resolution - HAR-RV-X's own promotion (EWMA_X + SKEW_X, Section 7.4.4) has since been ported here too, so both rows reflect the same model. HAR-RV-X's R² goes from 0.122 to 0.240 (about 2.0x); EWMA's improves far more, from 0.013 to 0.147 (about 11x). GARCH and Holt-Winters were not re-fit at this resolution (cost/benefit reasoning in the report).</a:t>
+              <a:t>Key finding:  both models improve on live data at 5-minute resolution, though the gap has narrowed further since HAR-RV-X's hourly baseline picked up a log(target) transform that failed live-validation at 5-minute resolution and was rejected there (see the report). HAR-RV-X's R² goes from 0.178 to 0.240 (about 1.3x); EWMA's improves far more, from 0.013 to 0.147 (about 11x).</a:t>
             </a:r>
             <a:pPr indent="0" marL="0">
               <a:lnSpc>
@@ -10430,7 +10430,7 @@
                 <a:ea typeface="Calibri" pitchFamily="34" charset="-122"/>
                 <a:cs typeface="Calibri" pitchFamily="34" charset="-120"/>
               </a:rPr>
-              <a:t>Sixteen robustness checks tested (XGBoost, LSTM, stacked ensembles, ETH spillover, winsorizing, and more) — two survived validation and were adopted, fourteen didn't</a:t>
+              <a:t>Eighteen robustness checks tested (XGBoost, LSTM, stacked ensembles, ETH spillover, winsorizing, and more) — four survived validation and were adopted, fourteen didn't</a:t>
             </a:r>
             <a:endParaRPr lang="en-US" sz="1100" dirty="0"/>
           </a:p>
@@ -18310,7 +18310,7 @@
                 <a:ea typeface="Calibri" pitchFamily="34" charset="-122"/>
                 <a:cs typeface="Calibri" pitchFamily="34" charset="-120"/>
               </a:rPr>
-              <a:t>The best model in this deck on both the historical split and live, unseen data — coefficients are directly readable, and the fix that got it here came from investigating a suspicious result rather than accepting it. A later robustness check added two more regressors (EWMA's own sigma, realized skewness), validated on live data before adoption — R² 0.1992 historical / 0.1217 live (slides 10, 12).</a:t>
+              <a:t>The best model in this deck on both the historical split and live, unseen data — coefficients are directly readable, and the fix that got it here came from investigating a suspicious result rather than accepting it. Later checks added two more regressors and a log(target) transform, both live-validated and found to stack — R² 0.2419 historical / 0.1779 live (slides 10, 12).</a:t>
             </a:r>
             <a:endParaRPr lang="en-US" sz="1050" dirty="0"/>
           </a:p>

--- a/presentation/capstone-btc-volatility.pptx
+++ b/presentation/capstone-btc-volatility.pptx
@@ -19,6 +19,8 @@
     <p:sldId id="269" r:id="rId20"/>
     <p:sldId id="270" r:id="rId21"/>
     <p:sldId id="267" r:id="rId13"/>
+    <p:sldId id="271" r:id="rId22"/>
+    <p:sldId id="272" r:id="rId23"/>
     <p:sldId id="268" r:id="rId14"/>
   </p:sldIdLst>
   <p:notesMasterIdLst>
@@ -10677,6 +10679,2260 @@
 </file>
 
 <file path=ppt/slides/slide15.xml><?xml version="1.0" encoding="utf-8"?>
+<p:sld xmlns:a="http://schemas.openxmlformats.org/drawingml/2006/main" xmlns:r="http://schemas.openxmlformats.org/officeDocument/2006/relationships" xmlns:p="http://schemas.openxmlformats.org/presentationml/2006/main">
+  <p:cSld name="Slide 11">
+    <p:bg>
+      <p:bgPr>
+        <a:solidFill>
+          <a:srgbClr val="F7F8FA"/>
+        </a:solidFill>
+      </p:bgPr>
+    </p:bg>
+    <p:spTree>
+      <p:nvGrpSpPr>
+        <p:cNvPr id="1" name=""/>
+        <p:cNvGrpSpPr/>
+        <p:nvPr/>
+      </p:nvGrpSpPr>
+      <p:grpSpPr>
+        <a:xfrm>
+          <a:off x="0" y="0"/>
+          <a:ext cx="0" cy="0"/>
+          <a:chOff x="0" y="0"/>
+          <a:chExt cx="0" cy="0"/>
+        </a:xfrm>
+      </p:grpSpPr>
+      <p:sp>
+        <p:nvSpPr>
+          <p:cNvPr id="2" name="Shape 0"/>
+          <p:cNvSpPr/>
+          <p:nvPr/>
+        </p:nvSpPr>
+        <p:spPr>
+          <a:xfrm>
+            <a:off x="10972800" y="365760"/>
+            <a:ext cx="731520" cy="731520"/>
+          </a:xfrm>
+          <a:prstGeom prst="ellipse">
+            <a:avLst/>
+          </a:prstGeom>
+          <a:solidFill>
+            <a:srgbClr val="0D1B2A"/>
+          </a:solidFill>
+          <a:ln/>
+        </p:spPr>
+        <p:txBody>
+          <a:bodyPr/>
+          <a:p/>
+        </p:txBody>
+      </p:sp>
+      <p:sp>
+        <p:nvSpPr>
+          <p:cNvPr id="3" name="Shape 1"/>
+          <p:cNvSpPr/>
+          <p:nvPr/>
+        </p:nvSpPr>
+        <p:spPr>
+          <a:xfrm flipV="1">
+            <a:off x="11133734" y="588142"/>
+            <a:ext cx="122895" cy="204826"/>
+          </a:xfrm>
+          <a:prstGeom prst="line">
+            <a:avLst/>
+          </a:prstGeom>
+          <a:noFill/>
+          <a:ln w="25400">
+            <a:solidFill>
+              <a:srgbClr val="F7931A"/>
+            </a:solidFill>
+            <a:prstDash val="solid"/>
+          </a:ln>
+        </p:spPr>
+        <p:txBody>
+          <a:bodyPr/>
+          <a:p/>
+        </p:txBody>
+      </p:sp>
+      <p:sp>
+        <p:nvSpPr>
+          <p:cNvPr id="4" name="Shape 2"/>
+          <p:cNvSpPr/>
+          <p:nvPr/>
+        </p:nvSpPr>
+        <p:spPr>
+          <a:xfrm>
+            <a:off x="11256630" y="588142"/>
+            <a:ext cx="81930" cy="245791"/>
+          </a:xfrm>
+          <a:prstGeom prst="line">
+            <a:avLst/>
+          </a:prstGeom>
+          <a:noFill/>
+          <a:ln w="25400">
+            <a:solidFill>
+              <a:srgbClr val="F7931A"/>
+            </a:solidFill>
+            <a:prstDash val="solid"/>
+          </a:ln>
+        </p:spPr>
+        <p:txBody>
+          <a:bodyPr/>
+          <a:p/>
+        </p:txBody>
+      </p:sp>
+      <p:sp>
+        <p:nvSpPr>
+          <p:cNvPr id="5" name="Shape 3"/>
+          <p:cNvSpPr/>
+          <p:nvPr/>
+        </p:nvSpPr>
+        <p:spPr>
+          <a:xfrm flipV="1">
+            <a:off x="11338560" y="526694"/>
+            <a:ext cx="102413" cy="307238"/>
+          </a:xfrm>
+          <a:prstGeom prst="line">
+            <a:avLst/>
+          </a:prstGeom>
+          <a:noFill/>
+          <a:ln w="25400">
+            <a:solidFill>
+              <a:srgbClr val="F7931A"/>
+            </a:solidFill>
+            <a:prstDash val="solid"/>
+          </a:ln>
+        </p:spPr>
+        <p:txBody>
+          <a:bodyPr/>
+          <a:p/>
+        </p:txBody>
+      </p:sp>
+      <p:sp>
+        <p:nvSpPr>
+          <p:cNvPr id="6" name="Shape 4"/>
+          <p:cNvSpPr/>
+          <p:nvPr/>
+        </p:nvSpPr>
+        <p:spPr>
+          <a:xfrm>
+            <a:off x="11440973" y="526694"/>
+            <a:ext cx="102413" cy="184343"/>
+          </a:xfrm>
+          <a:prstGeom prst="line">
+            <a:avLst/>
+          </a:prstGeom>
+          <a:noFill/>
+          <a:ln w="25400">
+            <a:solidFill>
+              <a:srgbClr val="F7931A"/>
+            </a:solidFill>
+            <a:prstDash val="solid"/>
+          </a:ln>
+        </p:spPr>
+        <p:txBody>
+          <a:bodyPr/>
+          <a:p/>
+        </p:txBody>
+      </p:sp>
+      <p:sp>
+        <p:nvSpPr>
+          <p:cNvPr id="7" name="Text 5"/>
+          <p:cNvSpPr/>
+          <p:nvPr/>
+        </p:nvSpPr>
+        <p:spPr>
+          <a:xfrm>
+            <a:off x="548640" y="365760"/>
+            <a:ext cx="10058400" cy="640080"/>
+          </a:xfrm>
+          <a:prstGeom prst="rect">
+            <a:avLst/>
+          </a:prstGeom>
+          <a:noFill/>
+          <a:ln/>
+        </p:spPr>
+        <p:txBody>
+          <a:bodyPr wrap="square" rtlCol="0" anchor="ctr"/>
+          <a:lstStyle/>
+          <a:p>
+            <a:pPr indent="0" marL="0">
+              <a:buNone/>
+            </a:pPr>
+            <a:r>
+              <a:rPr lang="en-US" sz="3000" b="1" dirty="0">
+                <a:solidFill>
+                  <a:srgbClr val="0D1B2A"/>
+                </a:solidFill>
+                <a:latin typeface="Cambria" pitchFamily="34" charset="0"/>
+                <a:ea typeface="Cambria" pitchFamily="34" charset="-122"/>
+                <a:cs typeface="Cambria" pitchFamily="34" charset="-120"/>
+              </a:rPr>
+              <a:t>Practical Application: Sizing a Trade</a:t>
+            </a:r>
+            <a:endParaRPr lang="en-US" sz="3000" dirty="0"/>
+          </a:p>
+        </p:txBody>
+      </p:sp>
+      <p:sp>
+        <p:nvSpPr>
+          <p:cNvPr id="8" name="Text 6"/>
+          <p:cNvSpPr/>
+          <p:nvPr/>
+        </p:nvSpPr>
+        <p:spPr>
+          <a:xfrm>
+            <a:off x="548640" y="932688"/>
+            <a:ext cx="10515600" cy="365760"/>
+          </a:xfrm>
+          <a:prstGeom prst="rect">
+            <a:avLst/>
+          </a:prstGeom>
+          <a:noFill/>
+          <a:ln/>
+        </p:spPr>
+        <p:txBody>
+          <a:bodyPr wrap="square" rtlCol="0" anchor="ctr"/>
+          <a:lstStyle/>
+          <a:p>
+            <a:pPr indent="0" marL="0">
+              <a:buNone/>
+            </a:pPr>
+            <a:r>
+              <a:rPr lang="en-US" sz="1400" i="1" dirty="0">
+                <a:solidFill>
+                  <a:srgbClr val="5C6B7A"/>
+                </a:solidFill>
+                <a:latin typeface="Calibri" pitchFamily="34" charset="0"/>
+                <a:ea typeface="Calibri" pitchFamily="34" charset="-122"/>
+                <a:cs typeface="Calibri" pitchFamily="34" charset="-120"/>
+              </a:rPr>
+              <a:t>Turning this week's real forecast into a position size and a risk estimate</a:t>
+            </a:r>
+            <a:endParaRPr lang="en-US" sz="1400" dirty="0"/>
+          </a:p>
+        </p:txBody>
+      </p:sp>
+      <p:sp>
+        <p:nvSpPr>
+          <p:cNvPr id="9" name="Text 7"/>
+          <p:cNvSpPr/>
+          <p:nvPr/>
+        </p:nvSpPr>
+        <p:spPr>
+          <a:xfrm>
+            <a:off x="457200" y="6537960"/>
+            <a:ext cx="7315200" cy="274320"/>
+          </a:xfrm>
+          <a:prstGeom prst="rect">
+            <a:avLst/>
+          </a:prstGeom>
+          <a:noFill/>
+          <a:ln/>
+        </p:spPr>
+        <p:txBody>
+          <a:bodyPr wrap="square" rtlCol="0" anchor="ctr"/>
+          <a:lstStyle/>
+          <a:p>
+            <a:pPr indent="0" marL="0">
+              <a:buNone/>
+            </a:pPr>
+            <a:r>
+              <a:rPr lang="en-US" sz="900" dirty="0">
+                <a:solidFill>
+                  <a:srgbClr val="5C6B7A"/>
+                </a:solidFill>
+                <a:latin typeface="Calibri" pitchFamily="34" charset="0"/>
+                <a:ea typeface="Calibri" pitchFamily="34" charset="-122"/>
+                <a:cs typeface="Calibri" pitchFamily="34" charset="-120"/>
+              </a:rPr>
+              <a:t>BTC Volatility Prediction  |  Capstone</a:t>
+            </a:r>
+            <a:endParaRPr lang="en-US" sz="900" dirty="0"/>
+          </a:p>
+        </p:txBody>
+      </p:sp>
+      <p:sp>
+        <p:nvSpPr>
+          <p:cNvPr id="10" name="Text 8"/>
+          <p:cNvSpPr/>
+          <p:nvPr/>
+        </p:nvSpPr>
+        <p:spPr>
+          <a:xfrm>
+            <a:off x="11521440" y="6537960"/>
+            <a:ext cx="457200" cy="274320"/>
+          </a:xfrm>
+          <a:prstGeom prst="rect">
+            <a:avLst/>
+          </a:prstGeom>
+          <a:noFill/>
+          <a:ln/>
+        </p:spPr>
+        <p:txBody>
+          <a:bodyPr wrap="square" rtlCol="0" anchor="ctr"/>
+          <a:lstStyle/>
+          <a:p>
+            <a:pPr algn="r" indent="0" marL="0">
+              <a:buNone/>
+            </a:pPr>
+            <a:r>
+              <a:rPr lang="en-US" sz="900" dirty="0">
+                <a:solidFill>
+                  <a:srgbClr val="5C6B7A"/>
+                </a:solidFill>
+                <a:latin typeface="Calibri" pitchFamily="34" charset="0"/>
+                <a:ea typeface="Calibri" pitchFamily="34" charset="-122"/>
+                <a:cs typeface="Calibri" pitchFamily="34" charset="-120"/>
+              </a:rPr>
+              <a:t>16</a:t>
+            </a:r>
+            <a:endParaRPr lang="en-US" sz="900" dirty="0"/>
+          </a:p>
+        </p:txBody>
+      </p:sp>
+      <p:sp>
+        <p:nvSpPr>
+          <p:cNvPr id="11" name="Shape 9"/>
+          <p:cNvSpPr/>
+          <p:nvPr/>
+        </p:nvSpPr>
+        <p:spPr>
+          <a:xfrm>
+            <a:off x="548640" y="1645920"/>
+            <a:ext cx="2697480" cy="2377440"/>
+          </a:xfrm>
+          <a:prstGeom prst="roundRect">
+            <a:avLst>
+              <a:gd name="adj" fmla="val 3077"/>
+            </a:avLst>
+          </a:prstGeom>
+          <a:solidFill>
+            <a:srgbClr val="FFFFFF"/>
+          </a:solidFill>
+          <a:ln w="12700">
+            <a:solidFill>
+              <a:srgbClr val="CADCFC"/>
+            </a:solidFill>
+            <a:prstDash val="solid"/>
+          </a:ln>
+        </p:spPr>
+        <p:txBody>
+          <a:bodyPr/>
+          <a:p/>
+        </p:txBody>
+      </p:sp>
+      <p:sp>
+        <p:nvSpPr>
+          <p:cNvPr id="12" name="Shape 10"/>
+          <p:cNvSpPr/>
+          <p:nvPr/>
+        </p:nvSpPr>
+        <p:spPr>
+          <a:xfrm>
+            <a:off x="1645920" y="1828800"/>
+            <a:ext cx="502920" cy="502920"/>
+          </a:xfrm>
+          <a:prstGeom prst="ellipse">
+            <a:avLst/>
+          </a:prstGeom>
+          <a:solidFill>
+            <a:srgbClr val="1B4965"/>
+          </a:solidFill>
+          <a:ln/>
+        </p:spPr>
+        <p:txBody>
+          <a:bodyPr/>
+          <a:p/>
+        </p:txBody>
+      </p:sp>
+      <p:sp>
+        <p:nvSpPr>
+          <p:cNvPr id="13" name="Text 11"/>
+          <p:cNvSpPr/>
+          <p:nvPr/>
+        </p:nvSpPr>
+        <p:spPr>
+          <a:xfrm>
+            <a:off x="1645920" y="1828800"/>
+            <a:ext cx="502920" cy="502920"/>
+          </a:xfrm>
+          <a:prstGeom prst="rect">
+            <a:avLst/>
+          </a:prstGeom>
+          <a:noFill/>
+          <a:ln/>
+        </p:spPr>
+        <p:txBody>
+          <a:bodyPr wrap="square" rtlCol="0" anchor="ctr"/>
+          <a:lstStyle/>
+          <a:p>
+            <a:pPr algn="ctr" indent="0" marL="0">
+              <a:buNone/>
+            </a:pPr>
+            <a:r>
+              <a:rPr lang="en-US" sz="1700" b="1" dirty="0">
+                <a:solidFill>
+                  <a:srgbClr val="F7931A"/>
+                </a:solidFill>
+                <a:latin typeface="Cambria" pitchFamily="34" charset="0"/>
+                <a:ea typeface="Cambria" pitchFamily="34" charset="-122"/>
+                <a:cs typeface="Cambria" pitchFamily="34" charset="-120"/>
+              </a:rPr>
+              <a:t>1</a:t>
+            </a:r>
+            <a:endParaRPr lang="en-US" sz="1700" dirty="0"/>
+          </a:p>
+        </p:txBody>
+      </p:sp>
+      <p:sp>
+        <p:nvSpPr>
+          <p:cNvPr id="14" name="Text 12"/>
+          <p:cNvSpPr/>
+          <p:nvPr/>
+        </p:nvSpPr>
+        <p:spPr>
+          <a:xfrm>
+            <a:off x="731520" y="2450592"/>
+            <a:ext cx="2331720" cy="320040"/>
+          </a:xfrm>
+          <a:prstGeom prst="rect">
+            <a:avLst/>
+          </a:prstGeom>
+          <a:noFill/>
+          <a:ln/>
+        </p:spPr>
+        <p:txBody>
+          <a:bodyPr wrap="square" rtlCol="0" anchor="ctr"/>
+          <a:lstStyle/>
+          <a:p>
+            <a:pPr algn="ctr" indent="0" marL="0">
+              <a:buNone/>
+            </a:pPr>
+            <a:r>
+              <a:rPr lang="en-US" sz="1300" b="1" dirty="0">
+                <a:solidFill>
+                  <a:srgbClr val="0D1B2A"/>
+                </a:solidFill>
+                <a:latin typeface="Cambria" pitchFamily="34" charset="0"/>
+                <a:ea typeface="Cambria" pitchFamily="34" charset="-122"/>
+                <a:cs typeface="Cambria" pitchFamily="34" charset="-120"/>
+              </a:rPr>
+              <a:t>Forecast the move</a:t>
+            </a:r>
+            <a:endParaRPr lang="en-US" sz="1300" dirty="0"/>
+          </a:p>
+        </p:txBody>
+      </p:sp>
+      <p:sp>
+        <p:nvSpPr>
+          <p:cNvPr id="15" name="Text 13"/>
+          <p:cNvSpPr/>
+          <p:nvPr/>
+        </p:nvSpPr>
+        <p:spPr>
+          <a:xfrm>
+            <a:off x="731520" y="2788920"/>
+            <a:ext cx="2331720" cy="1097280"/>
+          </a:xfrm>
+          <a:prstGeom prst="rect">
+            <a:avLst/>
+          </a:prstGeom>
+          <a:noFill/>
+          <a:ln/>
+        </p:spPr>
+        <p:txBody>
+          <a:bodyPr wrap="square" rtlCol="0" anchor="t"/>
+          <a:lstStyle/>
+          <a:p>
+            <a:pPr algn="ctr" indent="0" marL="0">
+              <a:lnSpc>
+                <a:spcPct val="110000"/>
+              </a:lnSpc>
+              <a:buNone/>
+            </a:pPr>
+            <a:r>
+              <a:rPr lang="en-US" sz="1100" dirty="0">
+                <a:solidFill>
+                  <a:srgbClr val="0D1B2A"/>
+                </a:solidFill>
+                <a:latin typeface="Calibri" pitchFamily="34" charset="0"/>
+                <a:ea typeface="Calibri" pitchFamily="34" charset="-122"/>
+                <a:cs typeface="Calibri" pitchFamily="34" charset="-120"/>
+              </a:rPr>
+              <a:t>On 2026-08-25, the model predicted BTC would swing about 6% over the coming week — its real, live forecast, not a hypothetical.</a:t>
+            </a:r>
+            <a:endParaRPr lang="en-US" sz="1100" dirty="0"/>
+          </a:p>
+        </p:txBody>
+      </p:sp>
+      <p:sp>
+        <p:nvSpPr>
+          <p:cNvPr id="16" name="Shape 14"/>
+          <p:cNvSpPr/>
+          <p:nvPr/>
+        </p:nvSpPr>
+        <p:spPr>
+          <a:xfrm>
+            <a:off x="3383280" y="1645920"/>
+            <a:ext cx="2697480" cy="2377440"/>
+          </a:xfrm>
+          <a:prstGeom prst="roundRect">
+            <a:avLst>
+              <a:gd name="adj" fmla="val 3077"/>
+            </a:avLst>
+          </a:prstGeom>
+          <a:solidFill>
+            <a:srgbClr val="FFFFFF"/>
+          </a:solidFill>
+          <a:ln w="12700">
+            <a:solidFill>
+              <a:srgbClr val="CADCFC"/>
+            </a:solidFill>
+            <a:prstDash val="solid"/>
+          </a:ln>
+        </p:spPr>
+        <p:txBody>
+          <a:bodyPr/>
+          <a:p/>
+        </p:txBody>
+      </p:sp>
+      <p:sp>
+        <p:nvSpPr>
+          <p:cNvPr id="17" name="Shape 15"/>
+          <p:cNvSpPr/>
+          <p:nvPr/>
+        </p:nvSpPr>
+        <p:spPr>
+          <a:xfrm>
+            <a:off x="4480560" y="1828800"/>
+            <a:ext cx="502920" cy="502920"/>
+          </a:xfrm>
+          <a:prstGeom prst="ellipse">
+            <a:avLst/>
+          </a:prstGeom>
+          <a:solidFill>
+            <a:srgbClr val="1B4965"/>
+          </a:solidFill>
+          <a:ln/>
+        </p:spPr>
+        <p:txBody>
+          <a:bodyPr/>
+          <a:p/>
+        </p:txBody>
+      </p:sp>
+      <p:sp>
+        <p:nvSpPr>
+          <p:cNvPr id="18" name="Text 16"/>
+          <p:cNvSpPr/>
+          <p:nvPr/>
+        </p:nvSpPr>
+        <p:spPr>
+          <a:xfrm>
+            <a:off x="4480560" y="1828800"/>
+            <a:ext cx="502920" cy="502920"/>
+          </a:xfrm>
+          <a:prstGeom prst="rect">
+            <a:avLst/>
+          </a:prstGeom>
+          <a:noFill/>
+          <a:ln/>
+        </p:spPr>
+        <p:txBody>
+          <a:bodyPr wrap="square" rtlCol="0" anchor="ctr"/>
+          <a:lstStyle/>
+          <a:p>
+            <a:pPr algn="ctr" indent="0" marL="0">
+              <a:buNone/>
+            </a:pPr>
+            <a:r>
+              <a:rPr lang="en-US" sz="1700" b="1" dirty="0">
+                <a:solidFill>
+                  <a:srgbClr val="F7931A"/>
+                </a:solidFill>
+                <a:latin typeface="Cambria" pitchFamily="34" charset="0"/>
+                <a:ea typeface="Cambria" pitchFamily="34" charset="-122"/>
+                <a:cs typeface="Cambria" pitchFamily="34" charset="-120"/>
+              </a:rPr>
+              <a:t>2</a:t>
+            </a:r>
+            <a:endParaRPr lang="en-US" sz="1700" dirty="0"/>
+          </a:p>
+        </p:txBody>
+      </p:sp>
+      <p:sp>
+        <p:nvSpPr>
+          <p:cNvPr id="19" name="Text 17"/>
+          <p:cNvSpPr/>
+          <p:nvPr/>
+        </p:nvSpPr>
+        <p:spPr>
+          <a:xfrm>
+            <a:off x="3566160" y="2450592"/>
+            <a:ext cx="2331720" cy="320040"/>
+          </a:xfrm>
+          <a:prstGeom prst="rect">
+            <a:avLst/>
+          </a:prstGeom>
+          <a:noFill/>
+          <a:ln/>
+        </p:spPr>
+        <p:txBody>
+          <a:bodyPr wrap="square" rtlCol="0" anchor="ctr"/>
+          <a:lstStyle/>
+          <a:p>
+            <a:pPr algn="ctr" indent="0" marL="0">
+              <a:buNone/>
+            </a:pPr>
+            <a:r>
+              <a:rPr lang="en-US" sz="1300" b="1" dirty="0">
+                <a:solidFill>
+                  <a:srgbClr val="0D1B2A"/>
+                </a:solidFill>
+                <a:latin typeface="Cambria" pitchFamily="34" charset="0"/>
+                <a:ea typeface="Cambria" pitchFamily="34" charset="-122"/>
+                <a:cs typeface="Cambria" pitchFamily="34" charset="-120"/>
+              </a:rPr>
+              <a:t>Size the position</a:t>
+            </a:r>
+            <a:endParaRPr lang="en-US" sz="1300" dirty="0"/>
+          </a:p>
+        </p:txBody>
+      </p:sp>
+      <p:sp>
+        <p:nvSpPr>
+          <p:cNvPr id="20" name="Text 18"/>
+          <p:cNvSpPr/>
+          <p:nvPr/>
+        </p:nvSpPr>
+        <p:spPr>
+          <a:xfrm>
+            <a:off x="3566160" y="2788920"/>
+            <a:ext cx="2331720" cy="1097280"/>
+          </a:xfrm>
+          <a:prstGeom prst="rect">
+            <a:avLst/>
+          </a:prstGeom>
+          <a:noFill/>
+          <a:ln/>
+        </p:spPr>
+        <p:txBody>
+          <a:bodyPr wrap="square" rtlCol="0" anchor="t"/>
+          <a:lstStyle/>
+          <a:p>
+            <a:pPr algn="ctr" indent="0" marL="0">
+              <a:lnSpc>
+                <a:spcPct val="110000"/>
+              </a:lnSpc>
+              <a:buNone/>
+            </a:pPr>
+            <a:r>
+              <a:rPr lang="en-US" sz="1100" dirty="0">
+                <a:solidFill>
+                  <a:srgbClr val="0D1B2A"/>
+                </a:solidFill>
+                <a:latin typeface="Calibri" pitchFamily="34" charset="0"/>
+                <a:ea typeface="Calibri" pitchFamily="34" charset="-122"/>
+                <a:cs typeface="Calibri" pitchFamily="34" charset="-120"/>
+              </a:rPr>
+              <a:t>Risking $50,000 on a move of that size points to a position worth about $823,000 — bigger forecasted moves mean smaller positions.</a:t>
+            </a:r>
+            <a:endParaRPr lang="en-US" sz="1100" dirty="0"/>
+          </a:p>
+        </p:txBody>
+      </p:sp>
+      <p:sp>
+        <p:nvSpPr>
+          <p:cNvPr id="21" name="Shape 19"/>
+          <p:cNvSpPr/>
+          <p:nvPr/>
+        </p:nvSpPr>
+        <p:spPr>
+          <a:xfrm>
+            <a:off x="6217920" y="1645920"/>
+            <a:ext cx="2697480" cy="2377440"/>
+          </a:xfrm>
+          <a:prstGeom prst="roundRect">
+            <a:avLst>
+              <a:gd name="adj" fmla="val 3077"/>
+            </a:avLst>
+          </a:prstGeom>
+          <a:solidFill>
+            <a:srgbClr val="FFFFFF"/>
+          </a:solidFill>
+          <a:ln w="12700">
+            <a:solidFill>
+              <a:srgbClr val="CADCFC"/>
+            </a:solidFill>
+            <a:prstDash val="solid"/>
+          </a:ln>
+        </p:spPr>
+        <p:txBody>
+          <a:bodyPr/>
+          <a:p/>
+        </p:txBody>
+      </p:sp>
+      <p:sp>
+        <p:nvSpPr>
+          <p:cNvPr id="22" name="Shape 20"/>
+          <p:cNvSpPr/>
+          <p:nvPr/>
+        </p:nvSpPr>
+        <p:spPr>
+          <a:xfrm>
+            <a:off x="7315200" y="1828800"/>
+            <a:ext cx="502920" cy="502920"/>
+          </a:xfrm>
+          <a:prstGeom prst="ellipse">
+            <a:avLst/>
+          </a:prstGeom>
+          <a:solidFill>
+            <a:srgbClr val="1B4965"/>
+          </a:solidFill>
+          <a:ln/>
+        </p:spPr>
+        <p:txBody>
+          <a:bodyPr/>
+          <a:p/>
+        </p:txBody>
+      </p:sp>
+      <p:sp>
+        <p:nvSpPr>
+          <p:cNvPr id="23" name="Text 21"/>
+          <p:cNvSpPr/>
+          <p:nvPr/>
+        </p:nvSpPr>
+        <p:spPr>
+          <a:xfrm>
+            <a:off x="7315200" y="1828800"/>
+            <a:ext cx="502920" cy="502920"/>
+          </a:xfrm>
+          <a:prstGeom prst="rect">
+            <a:avLst/>
+          </a:prstGeom>
+          <a:noFill/>
+          <a:ln/>
+        </p:spPr>
+        <p:txBody>
+          <a:bodyPr wrap="square" rtlCol="0" anchor="ctr"/>
+          <a:lstStyle/>
+          <a:p>
+            <a:pPr algn="ctr" indent="0" marL="0">
+              <a:buNone/>
+            </a:pPr>
+            <a:r>
+              <a:rPr lang="en-US" sz="1700" b="1" dirty="0">
+                <a:solidFill>
+                  <a:srgbClr val="F7931A"/>
+                </a:solidFill>
+                <a:latin typeface="Cambria" pitchFamily="34" charset="0"/>
+                <a:ea typeface="Cambria" pitchFamily="34" charset="-122"/>
+                <a:cs typeface="Cambria" pitchFamily="34" charset="-120"/>
+              </a:rPr>
+              <a:t>3</a:t>
+            </a:r>
+            <a:endParaRPr lang="en-US" sz="1700" dirty="0"/>
+          </a:p>
+        </p:txBody>
+      </p:sp>
+      <p:sp>
+        <p:nvSpPr>
+          <p:cNvPr id="24" name="Text 22"/>
+          <p:cNvSpPr/>
+          <p:nvPr/>
+        </p:nvSpPr>
+        <p:spPr>
+          <a:xfrm>
+            <a:off x="6400800" y="2450592"/>
+            <a:ext cx="2331720" cy="320040"/>
+          </a:xfrm>
+          <a:prstGeom prst="rect">
+            <a:avLst/>
+          </a:prstGeom>
+          <a:noFill/>
+          <a:ln/>
+        </p:spPr>
+        <p:txBody>
+          <a:bodyPr wrap="square" rtlCol="0" anchor="ctr"/>
+          <a:lstStyle/>
+          <a:p>
+            <a:pPr algn="ctr" indent="0" marL="0">
+              <a:buNone/>
+            </a:pPr>
+            <a:r>
+              <a:rPr lang="en-US" sz="1300" b="1" dirty="0">
+                <a:solidFill>
+                  <a:srgbClr val="0D1B2A"/>
+                </a:solidFill>
+                <a:latin typeface="Cambria" pitchFamily="34" charset="0"/>
+                <a:ea typeface="Cambria" pitchFamily="34" charset="-122"/>
+                <a:cs typeface="Cambria" pitchFamily="34" charset="-120"/>
+              </a:rPr>
+              <a:t>Estimate the downside</a:t>
+            </a:r>
+            <a:endParaRPr lang="en-US" sz="1300" dirty="0"/>
+          </a:p>
+        </p:txBody>
+      </p:sp>
+      <p:sp>
+        <p:nvSpPr>
+          <p:cNvPr id="25" name="Text 23"/>
+          <p:cNvSpPr/>
+          <p:nvPr/>
+        </p:nvSpPr>
+        <p:spPr>
+          <a:xfrm>
+            <a:off x="6400800" y="2788920"/>
+            <a:ext cx="2331720" cy="1097280"/>
+          </a:xfrm>
+          <a:prstGeom prst="rect">
+            <a:avLst/>
+          </a:prstGeom>
+          <a:noFill/>
+          <a:ln/>
+        </p:spPr>
+        <p:txBody>
+          <a:bodyPr wrap="square" rtlCol="0" anchor="t"/>
+          <a:lstStyle/>
+          <a:p>
+            <a:pPr algn="ctr" indent="0" marL="0">
+              <a:lnSpc>
+                <a:spcPct val="110000"/>
+              </a:lnSpc>
+              <a:buNone/>
+            </a:pPr>
+            <a:r>
+              <a:rPr lang="en-US" sz="1100" dirty="0">
+                <a:solidFill>
+                  <a:srgbClr val="0D1B2A"/>
+                </a:solidFill>
+                <a:latin typeface="Calibri" pitchFamily="34" charset="0"/>
+                <a:ea typeface="Calibri" pitchFamily="34" charset="-122"/>
+                <a:cs typeface="Calibri" pitchFamily="34" charset="-120"/>
+              </a:rPr>
+              <a:t>That position carries roughly a 5% chance of losing more than about $82,000 over the week — the number that goes in a risk report.</a:t>
+            </a:r>
+            <a:endParaRPr lang="en-US" sz="1100" dirty="0"/>
+          </a:p>
+        </p:txBody>
+      </p:sp>
+      <p:sp>
+        <p:nvSpPr>
+          <p:cNvPr id="26" name="Shape 24"/>
+          <p:cNvSpPr/>
+          <p:nvPr/>
+        </p:nvSpPr>
+        <p:spPr>
+          <a:xfrm>
+            <a:off x="9052560" y="1645920"/>
+            <a:ext cx="2697480" cy="2377440"/>
+          </a:xfrm>
+          <a:prstGeom prst="roundRect">
+            <a:avLst>
+              <a:gd name="adj" fmla="val 3077"/>
+            </a:avLst>
+          </a:prstGeom>
+          <a:solidFill>
+            <a:srgbClr val="FFFFFF"/>
+          </a:solidFill>
+          <a:ln w="12700">
+            <a:solidFill>
+              <a:srgbClr val="CADCFC"/>
+            </a:solidFill>
+            <a:prstDash val="solid"/>
+          </a:ln>
+        </p:spPr>
+        <p:txBody>
+          <a:bodyPr/>
+          <a:p/>
+        </p:txBody>
+      </p:sp>
+      <p:sp>
+        <p:nvSpPr>
+          <p:cNvPr id="27" name="Shape 25"/>
+          <p:cNvSpPr/>
+          <p:nvPr/>
+        </p:nvSpPr>
+        <p:spPr>
+          <a:xfrm>
+            <a:off x="10149840" y="1828800"/>
+            <a:ext cx="502920" cy="502920"/>
+          </a:xfrm>
+          <a:prstGeom prst="ellipse">
+            <a:avLst/>
+          </a:prstGeom>
+          <a:solidFill>
+            <a:srgbClr val="1B4965"/>
+          </a:solidFill>
+          <a:ln/>
+        </p:spPr>
+        <p:txBody>
+          <a:bodyPr/>
+          <a:p/>
+        </p:txBody>
+      </p:sp>
+      <p:sp>
+        <p:nvSpPr>
+          <p:cNvPr id="28" name="Text 26"/>
+          <p:cNvSpPr/>
+          <p:nvPr/>
+        </p:nvSpPr>
+        <p:spPr>
+          <a:xfrm>
+            <a:off x="10149840" y="1828800"/>
+            <a:ext cx="502920" cy="502920"/>
+          </a:xfrm>
+          <a:prstGeom prst="rect">
+            <a:avLst/>
+          </a:prstGeom>
+          <a:noFill/>
+          <a:ln/>
+        </p:spPr>
+        <p:txBody>
+          <a:bodyPr wrap="square" rtlCol="0" anchor="ctr"/>
+          <a:lstStyle/>
+          <a:p>
+            <a:pPr algn="ctr" indent="0" marL="0">
+              <a:buNone/>
+            </a:pPr>
+            <a:r>
+              <a:rPr lang="en-US" sz="1700" b="1" dirty="0">
+                <a:solidFill>
+                  <a:srgbClr val="F7931A"/>
+                </a:solidFill>
+                <a:latin typeface="Cambria" pitchFamily="34" charset="0"/>
+                <a:ea typeface="Cambria" pitchFamily="34" charset="-122"/>
+                <a:cs typeface="Cambria" pitchFamily="34" charset="-120"/>
+              </a:rPr>
+              <a:t>4</a:t>
+            </a:r>
+            <a:endParaRPr lang="en-US" sz="1700" dirty="0"/>
+          </a:p>
+        </p:txBody>
+      </p:sp>
+      <p:sp>
+        <p:nvSpPr>
+          <p:cNvPr id="29" name="Text 27"/>
+          <p:cNvSpPr/>
+          <p:nvPr/>
+        </p:nvSpPr>
+        <p:spPr>
+          <a:xfrm>
+            <a:off x="9235440" y="2450592"/>
+            <a:ext cx="2331720" cy="320040"/>
+          </a:xfrm>
+          <a:prstGeom prst="rect">
+            <a:avLst/>
+          </a:prstGeom>
+          <a:noFill/>
+          <a:ln/>
+        </p:spPr>
+        <p:txBody>
+          <a:bodyPr wrap="square" rtlCol="0" anchor="ctr"/>
+          <a:lstStyle/>
+          <a:p>
+            <a:pPr algn="ctr" indent="0" marL="0">
+              <a:buNone/>
+            </a:pPr>
+            <a:r>
+              <a:rPr lang="en-US" sz="1300" b="1" dirty="0">
+                <a:solidFill>
+                  <a:srgbClr val="0D1B2A"/>
+                </a:solidFill>
+                <a:latin typeface="Cambria" pitchFamily="34" charset="0"/>
+                <a:ea typeface="Cambria" pitchFamily="34" charset="-122"/>
+                <a:cs typeface="Cambria" pitchFamily="34" charset="-120"/>
+              </a:rPr>
+              <a:t>Compare to the options market</a:t>
+            </a:r>
+            <a:endParaRPr lang="en-US" sz="1300" dirty="0"/>
+          </a:p>
+        </p:txBody>
+      </p:sp>
+      <p:sp>
+        <p:nvSpPr>
+          <p:cNvPr id="30" name="Text 28"/>
+          <p:cNvSpPr/>
+          <p:nvPr/>
+        </p:nvSpPr>
+        <p:spPr>
+          <a:xfrm>
+            <a:off x="9235440" y="2788920"/>
+            <a:ext cx="2331720" cy="1097280"/>
+          </a:xfrm>
+          <a:prstGeom prst="rect">
+            <a:avLst/>
+          </a:prstGeom>
+          <a:noFill/>
+          <a:ln/>
+        </p:spPr>
+        <p:txBody>
+          <a:bodyPr wrap="square" rtlCol="0" anchor="t"/>
+          <a:lstStyle/>
+          <a:p>
+            <a:pPr algn="ctr" indent="0" marL="0">
+              <a:lnSpc>
+                <a:spcPct val="110000"/>
+              </a:lnSpc>
+              <a:buNone/>
+            </a:pPr>
+            <a:r>
+              <a:rPr lang="en-US" sz="1100" dirty="0">
+                <a:solidFill>
+                  <a:srgbClr val="0D1B2A"/>
+                </a:solidFill>
+                <a:latin typeface="Calibri" pitchFamily="34" charset="0"/>
+                <a:ea typeface="Calibri" pitchFamily="34" charset="-122"/>
+                <a:cs typeface="Calibri" pitchFamily="34" charset="-120"/>
+              </a:rPr>
+              <a:t>If options are pricing in far more movement than this, they may be overpriced relative to what the model expects — worth a closer look.</a:t>
+            </a:r>
+            <a:endParaRPr lang="en-US" sz="1100" dirty="0"/>
+          </a:p>
+        </p:txBody>
+      </p:sp>
+      <p:sp>
+        <p:nvSpPr>
+          <p:cNvPr id="31" name="Shape 29"/>
+          <p:cNvSpPr/>
+          <p:nvPr/>
+        </p:nvSpPr>
+        <p:spPr>
+          <a:xfrm>
+            <a:off x="548640" y="4297680"/>
+            <a:ext cx="11064240" cy="1737360"/>
+          </a:xfrm>
+          <a:prstGeom prst="roundRect">
+            <a:avLst>
+              <a:gd name="adj" fmla="val 4211"/>
+            </a:avLst>
+          </a:prstGeom>
+          <a:solidFill>
+            <a:srgbClr val="0D1B2A"/>
+          </a:solidFill>
+          <a:ln/>
+        </p:spPr>
+        <p:txBody>
+          <a:bodyPr/>
+          <a:p/>
+        </p:txBody>
+      </p:sp>
+      <p:sp>
+        <p:nvSpPr>
+          <p:cNvPr id="32" name="Text 30"/>
+          <p:cNvSpPr/>
+          <p:nvPr/>
+        </p:nvSpPr>
+        <p:spPr>
+          <a:xfrm>
+            <a:off x="868680" y="4480560"/>
+            <a:ext cx="10424160" cy="320040"/>
+          </a:xfrm>
+          <a:prstGeom prst="rect">
+            <a:avLst/>
+          </a:prstGeom>
+          <a:noFill/>
+          <a:ln/>
+        </p:spPr>
+        <p:txBody>
+          <a:bodyPr wrap="square" rtlCol="0" anchor="ctr"/>
+          <a:lstStyle/>
+          <a:p>
+            <a:pPr indent="0" marL="0">
+              <a:buNone/>
+            </a:pPr>
+            <a:r>
+              <a:rPr lang="en-US" sz="1500" b="1" dirty="0">
+                <a:solidFill>
+                  <a:srgbClr val="F7931A"/>
+                </a:solidFill>
+                <a:latin typeface="Cambria" pitchFamily="34" charset="0"/>
+                <a:ea typeface="Cambria" pitchFamily="34" charset="-122"/>
+                <a:cs typeface="Cambria" pitchFamily="34" charset="-120"/>
+              </a:rPr>
+              <a:t>Why this is one input, not the final answer</a:t>
+            </a:r>
+            <a:endParaRPr lang="en-US" sz="1500" dirty="0"/>
+          </a:p>
+        </p:txBody>
+      </p:sp>
+      <p:sp>
+        <p:nvSpPr>
+          <p:cNvPr id="33" name="Text 31"/>
+          <p:cNvSpPr/>
+          <p:nvPr/>
+        </p:nvSpPr>
+        <p:spPr>
+          <a:xfrm>
+            <a:off x="868680" y="4846320"/>
+            <a:ext cx="10424160" cy="1051560"/>
+          </a:xfrm>
+          <a:prstGeom prst="rect">
+            <a:avLst/>
+          </a:prstGeom>
+          <a:noFill/>
+          <a:ln/>
+        </p:spPr>
+        <p:txBody>
+          <a:bodyPr wrap="square" rtlCol="0" anchor="t"/>
+          <a:lstStyle/>
+          <a:p>
+            <a:pPr indent="0" marL="0">
+              <a:lnSpc>
+                <a:spcPct val="120000"/>
+              </a:lnSpc>
+              <a:buNone/>
+            </a:pPr>
+            <a:r>
+              <a:rPr lang="en-US" sz="1300" dirty="0">
+                <a:solidFill>
+                  <a:srgbClr val="FFFFFF"/>
+                </a:solidFill>
+                <a:latin typeface="Calibri" pitchFamily="34" charset="0"/>
+                <a:ea typeface="Calibri" pitchFamily="34" charset="-122"/>
+                <a:cs typeface="Calibri" pitchFamily="34" charset="-120"/>
+              </a:rPr>
+              <a:t>The model explains about 18% of real volatility swings, with typical errors around a quarter of the forecast — useful, but no substitute for market context, judgement, and other risk signals. A more traditional model (GARCH) performed far worse over this same horizon, so this is a genuine improvement, not a finished system.</a:t>
+            </a:r>
+            <a:endParaRPr lang="en-US" sz="1300" dirty="0"/>
+          </a:p>
+        </p:txBody>
+      </p:sp>
+    </p:spTree>
+  </p:cSld>
+  <p:clrMapOvr>
+    <a:masterClrMapping/>
+  </p:clrMapOvr>
+</p:sld>
+</file>
+
+<file path=ppt/slides/slide16.xml><?xml version="1.0" encoding="utf-8"?>
+<p:sld xmlns:a="http://schemas.openxmlformats.org/drawingml/2006/main" xmlns:r="http://schemas.openxmlformats.org/officeDocument/2006/relationships" xmlns:p="http://schemas.openxmlformats.org/presentationml/2006/main">
+  <p:cSld name="Slide 11">
+    <p:bg>
+      <p:bgPr>
+        <a:solidFill>
+          <a:srgbClr val="F7F8FA"/>
+        </a:solidFill>
+      </p:bgPr>
+    </p:bg>
+    <p:spTree>
+      <p:nvGrpSpPr>
+        <p:cNvPr id="1" name=""/>
+        <p:cNvGrpSpPr/>
+        <p:nvPr/>
+      </p:nvGrpSpPr>
+      <p:grpSpPr>
+        <a:xfrm>
+          <a:off x="0" y="0"/>
+          <a:ext cx="0" cy="0"/>
+          <a:chOff x="0" y="0"/>
+          <a:chExt cx="0" cy="0"/>
+        </a:xfrm>
+      </p:grpSpPr>
+      <p:sp>
+        <p:nvSpPr>
+          <p:cNvPr id="2" name="Shape 0"/>
+          <p:cNvSpPr/>
+          <p:nvPr/>
+        </p:nvSpPr>
+        <p:spPr>
+          <a:xfrm>
+            <a:off x="10972800" y="365760"/>
+            <a:ext cx="731520" cy="731520"/>
+          </a:xfrm>
+          <a:prstGeom prst="ellipse">
+            <a:avLst/>
+          </a:prstGeom>
+          <a:solidFill>
+            <a:srgbClr val="0D1B2A"/>
+          </a:solidFill>
+          <a:ln/>
+        </p:spPr>
+        <p:txBody>
+          <a:bodyPr/>
+          <a:p/>
+        </p:txBody>
+      </p:sp>
+      <p:sp>
+        <p:nvSpPr>
+          <p:cNvPr id="3" name="Shape 1"/>
+          <p:cNvSpPr/>
+          <p:nvPr/>
+        </p:nvSpPr>
+        <p:spPr>
+          <a:xfrm flipV="1">
+            <a:off x="11133734" y="588142"/>
+            <a:ext cx="122895" cy="204826"/>
+          </a:xfrm>
+          <a:prstGeom prst="line">
+            <a:avLst/>
+          </a:prstGeom>
+          <a:noFill/>
+          <a:ln w="25400">
+            <a:solidFill>
+              <a:srgbClr val="F7931A"/>
+            </a:solidFill>
+            <a:prstDash val="solid"/>
+          </a:ln>
+        </p:spPr>
+        <p:txBody>
+          <a:bodyPr/>
+          <a:p/>
+        </p:txBody>
+      </p:sp>
+      <p:sp>
+        <p:nvSpPr>
+          <p:cNvPr id="4" name="Shape 2"/>
+          <p:cNvSpPr/>
+          <p:nvPr/>
+        </p:nvSpPr>
+        <p:spPr>
+          <a:xfrm>
+            <a:off x="11256630" y="588142"/>
+            <a:ext cx="81930" cy="245791"/>
+          </a:xfrm>
+          <a:prstGeom prst="line">
+            <a:avLst/>
+          </a:prstGeom>
+          <a:noFill/>
+          <a:ln w="25400">
+            <a:solidFill>
+              <a:srgbClr val="F7931A"/>
+            </a:solidFill>
+            <a:prstDash val="solid"/>
+          </a:ln>
+        </p:spPr>
+        <p:txBody>
+          <a:bodyPr/>
+          <a:p/>
+        </p:txBody>
+      </p:sp>
+      <p:sp>
+        <p:nvSpPr>
+          <p:cNvPr id="5" name="Shape 3"/>
+          <p:cNvSpPr/>
+          <p:nvPr/>
+        </p:nvSpPr>
+        <p:spPr>
+          <a:xfrm flipV="1">
+            <a:off x="11338560" y="526694"/>
+            <a:ext cx="102413" cy="307238"/>
+          </a:xfrm>
+          <a:prstGeom prst="line">
+            <a:avLst/>
+          </a:prstGeom>
+          <a:noFill/>
+          <a:ln w="25400">
+            <a:solidFill>
+              <a:srgbClr val="F7931A"/>
+            </a:solidFill>
+            <a:prstDash val="solid"/>
+          </a:ln>
+        </p:spPr>
+        <p:txBody>
+          <a:bodyPr/>
+          <a:p/>
+        </p:txBody>
+      </p:sp>
+      <p:sp>
+        <p:nvSpPr>
+          <p:cNvPr id="6" name="Shape 4"/>
+          <p:cNvSpPr/>
+          <p:nvPr/>
+        </p:nvSpPr>
+        <p:spPr>
+          <a:xfrm>
+            <a:off x="11440973" y="526694"/>
+            <a:ext cx="102413" cy="184343"/>
+          </a:xfrm>
+          <a:prstGeom prst="line">
+            <a:avLst/>
+          </a:prstGeom>
+          <a:noFill/>
+          <a:ln w="25400">
+            <a:solidFill>
+              <a:srgbClr val="F7931A"/>
+            </a:solidFill>
+            <a:prstDash val="solid"/>
+          </a:ln>
+        </p:spPr>
+        <p:txBody>
+          <a:bodyPr/>
+          <a:p/>
+        </p:txBody>
+      </p:sp>
+      <p:sp>
+        <p:nvSpPr>
+          <p:cNvPr id="7" name="Text 5"/>
+          <p:cNvSpPr/>
+          <p:nvPr/>
+        </p:nvSpPr>
+        <p:spPr>
+          <a:xfrm>
+            <a:off x="548640" y="365760"/>
+            <a:ext cx="10058400" cy="640080"/>
+          </a:xfrm>
+          <a:prstGeom prst="rect">
+            <a:avLst/>
+          </a:prstGeom>
+          <a:noFill/>
+          <a:ln/>
+        </p:spPr>
+        <p:txBody>
+          <a:bodyPr wrap="square" rtlCol="0" anchor="ctr"/>
+          <a:lstStyle/>
+          <a:p>
+            <a:pPr indent="0" marL="0">
+              <a:buNone/>
+            </a:pPr>
+            <a:r>
+              <a:rPr lang="en-US" sz="3000" b="1" dirty="0">
+                <a:solidFill>
+                  <a:srgbClr val="0D1B2A"/>
+                </a:solidFill>
+                <a:latin typeface="Cambria" pitchFamily="34" charset="0"/>
+                <a:ea typeface="Cambria" pitchFamily="34" charset="-122"/>
+                <a:cs typeface="Cambria" pitchFamily="34" charset="-120"/>
+              </a:rPr>
+              <a:t>Practical Application: Pricing an Option</a:t>
+            </a:r>
+            <a:endParaRPr lang="en-US" sz="3000" dirty="0"/>
+          </a:p>
+        </p:txBody>
+      </p:sp>
+      <p:sp>
+        <p:nvSpPr>
+          <p:cNvPr id="8" name="Text 6"/>
+          <p:cNvSpPr/>
+          <p:nvPr/>
+        </p:nvSpPr>
+        <p:spPr>
+          <a:xfrm>
+            <a:off x="548640" y="932688"/>
+            <a:ext cx="10515600" cy="365760"/>
+          </a:xfrm>
+          <a:prstGeom prst="rect">
+            <a:avLst/>
+          </a:prstGeom>
+          <a:noFill/>
+          <a:ln/>
+        </p:spPr>
+        <p:txBody>
+          <a:bodyPr wrap="square" rtlCol="0" anchor="ctr"/>
+          <a:lstStyle/>
+          <a:p>
+            <a:pPr indent="0" marL="0">
+              <a:buNone/>
+            </a:pPr>
+            <a:r>
+              <a:rPr lang="en-US" sz="1400" i="1" dirty="0">
+                <a:solidFill>
+                  <a:srgbClr val="5C6B7A"/>
+                </a:solidFill>
+                <a:latin typeface="Calibri" pitchFamily="34" charset="0"/>
+                <a:ea typeface="Calibri" pitchFamily="34" charset="-122"/>
+                <a:cs typeface="Calibri" pitchFamily="34" charset="-120"/>
+              </a:rPr>
+              <a:t>Comparing the model's forecast to how the options market is pricing risk</a:t>
+            </a:r>
+            <a:endParaRPr lang="en-US" sz="1400" dirty="0"/>
+          </a:p>
+        </p:txBody>
+      </p:sp>
+      <p:sp>
+        <p:nvSpPr>
+          <p:cNvPr id="9" name="Text 7"/>
+          <p:cNvSpPr/>
+          <p:nvPr/>
+        </p:nvSpPr>
+        <p:spPr>
+          <a:xfrm>
+            <a:off x="457200" y="6537960"/>
+            <a:ext cx="7315200" cy="274320"/>
+          </a:xfrm>
+          <a:prstGeom prst="rect">
+            <a:avLst/>
+          </a:prstGeom>
+          <a:noFill/>
+          <a:ln/>
+        </p:spPr>
+        <p:txBody>
+          <a:bodyPr wrap="square" rtlCol="0" anchor="ctr"/>
+          <a:lstStyle/>
+          <a:p>
+            <a:pPr indent="0" marL="0">
+              <a:buNone/>
+            </a:pPr>
+            <a:r>
+              <a:rPr lang="en-US" sz="900" dirty="0">
+                <a:solidFill>
+                  <a:srgbClr val="5C6B7A"/>
+                </a:solidFill>
+                <a:latin typeface="Calibri" pitchFamily="34" charset="0"/>
+                <a:ea typeface="Calibri" pitchFamily="34" charset="-122"/>
+                <a:cs typeface="Calibri" pitchFamily="34" charset="-120"/>
+              </a:rPr>
+              <a:t>BTC Volatility Prediction  |  Capstone</a:t>
+            </a:r>
+            <a:endParaRPr lang="en-US" sz="900" dirty="0"/>
+          </a:p>
+        </p:txBody>
+      </p:sp>
+      <p:sp>
+        <p:nvSpPr>
+          <p:cNvPr id="10" name="Text 8"/>
+          <p:cNvSpPr/>
+          <p:nvPr/>
+        </p:nvSpPr>
+        <p:spPr>
+          <a:xfrm>
+            <a:off x="11521440" y="6537960"/>
+            <a:ext cx="457200" cy="274320"/>
+          </a:xfrm>
+          <a:prstGeom prst="rect">
+            <a:avLst/>
+          </a:prstGeom>
+          <a:noFill/>
+          <a:ln/>
+        </p:spPr>
+        <p:txBody>
+          <a:bodyPr wrap="square" rtlCol="0" anchor="ctr"/>
+          <a:lstStyle/>
+          <a:p>
+            <a:pPr algn="r" indent="0" marL="0">
+              <a:buNone/>
+            </a:pPr>
+            <a:r>
+              <a:rPr lang="en-US" sz="900" dirty="0">
+                <a:solidFill>
+                  <a:srgbClr val="5C6B7A"/>
+                </a:solidFill>
+                <a:latin typeface="Calibri" pitchFamily="34" charset="0"/>
+                <a:ea typeface="Calibri" pitchFamily="34" charset="-122"/>
+                <a:cs typeface="Calibri" pitchFamily="34" charset="-120"/>
+              </a:rPr>
+              <a:t>17</a:t>
+            </a:r>
+            <a:endParaRPr lang="en-US" sz="900" dirty="0"/>
+          </a:p>
+        </p:txBody>
+      </p:sp>
+      <p:sp>
+        <p:nvSpPr>
+          <p:cNvPr id="11" name="Shape 9"/>
+          <p:cNvSpPr/>
+          <p:nvPr/>
+        </p:nvSpPr>
+        <p:spPr>
+          <a:xfrm>
+            <a:off x="548640" y="1645920"/>
+            <a:ext cx="2697480" cy="2377440"/>
+          </a:xfrm>
+          <a:prstGeom prst="roundRect">
+            <a:avLst>
+              <a:gd name="adj" fmla="val 3077"/>
+            </a:avLst>
+          </a:prstGeom>
+          <a:solidFill>
+            <a:srgbClr val="FFFFFF"/>
+          </a:solidFill>
+          <a:ln w="12700">
+            <a:solidFill>
+              <a:srgbClr val="CADCFC"/>
+            </a:solidFill>
+            <a:prstDash val="solid"/>
+          </a:ln>
+        </p:spPr>
+        <p:txBody>
+          <a:bodyPr/>
+          <a:p/>
+        </p:txBody>
+      </p:sp>
+      <p:sp>
+        <p:nvSpPr>
+          <p:cNvPr id="12" name="Shape 10"/>
+          <p:cNvSpPr/>
+          <p:nvPr/>
+        </p:nvSpPr>
+        <p:spPr>
+          <a:xfrm>
+            <a:off x="1645920" y="1828800"/>
+            <a:ext cx="502920" cy="502920"/>
+          </a:xfrm>
+          <a:prstGeom prst="ellipse">
+            <a:avLst/>
+          </a:prstGeom>
+          <a:solidFill>
+            <a:srgbClr val="1B4965"/>
+          </a:solidFill>
+          <a:ln/>
+        </p:spPr>
+        <p:txBody>
+          <a:bodyPr/>
+          <a:p/>
+        </p:txBody>
+      </p:sp>
+      <p:sp>
+        <p:nvSpPr>
+          <p:cNvPr id="13" name="Text 11"/>
+          <p:cNvSpPr/>
+          <p:nvPr/>
+        </p:nvSpPr>
+        <p:spPr>
+          <a:xfrm>
+            <a:off x="1645920" y="1828800"/>
+            <a:ext cx="502920" cy="502920"/>
+          </a:xfrm>
+          <a:prstGeom prst="rect">
+            <a:avLst/>
+          </a:prstGeom>
+          <a:noFill/>
+          <a:ln/>
+        </p:spPr>
+        <p:txBody>
+          <a:bodyPr wrap="square" rtlCol="0" anchor="ctr"/>
+          <a:lstStyle/>
+          <a:p>
+            <a:pPr algn="ctr" indent="0" marL="0">
+              <a:buNone/>
+            </a:pPr>
+            <a:r>
+              <a:rPr lang="en-US" sz="1700" b="1" dirty="0">
+                <a:solidFill>
+                  <a:srgbClr val="F7931A"/>
+                </a:solidFill>
+                <a:latin typeface="Cambria" pitchFamily="34" charset="0"/>
+                <a:ea typeface="Cambria" pitchFamily="34" charset="-122"/>
+                <a:cs typeface="Cambria" pitchFamily="34" charset="-120"/>
+              </a:rPr>
+              <a:t>1</a:t>
+            </a:r>
+            <a:endParaRPr lang="en-US" sz="1700" dirty="0"/>
+          </a:p>
+        </p:txBody>
+      </p:sp>
+      <p:sp>
+        <p:nvSpPr>
+          <p:cNvPr id="14" name="Text 12"/>
+          <p:cNvSpPr/>
+          <p:nvPr/>
+        </p:nvSpPr>
+        <p:spPr>
+          <a:xfrm>
+            <a:off x="731520" y="2450592"/>
+            <a:ext cx="2331720" cy="320040"/>
+          </a:xfrm>
+          <a:prstGeom prst="rect">
+            <a:avLst/>
+          </a:prstGeom>
+          <a:noFill/>
+          <a:ln/>
+        </p:spPr>
+        <p:txBody>
+          <a:bodyPr wrap="square" rtlCol="0" anchor="ctr"/>
+          <a:lstStyle/>
+          <a:p>
+            <a:pPr algn="ctr" indent="0" marL="0">
+              <a:buNone/>
+            </a:pPr>
+            <a:r>
+              <a:rPr lang="en-US" sz="1300" b="1" dirty="0">
+                <a:solidFill>
+                  <a:srgbClr val="0D1B2A"/>
+                </a:solidFill>
+                <a:latin typeface="Cambria" pitchFamily="34" charset="0"/>
+                <a:ea typeface="Cambria" pitchFamily="34" charset="-122"/>
+                <a:cs typeface="Cambria" pitchFamily="34" charset="-120"/>
+              </a:rPr>
+              <a:t>Convert to a yearly figure</a:t>
+            </a:r>
+            <a:endParaRPr lang="en-US" sz="1300" dirty="0"/>
+          </a:p>
+        </p:txBody>
+      </p:sp>
+      <p:sp>
+        <p:nvSpPr>
+          <p:cNvPr id="15" name="Text 13"/>
+          <p:cNvSpPr/>
+          <p:nvPr/>
+        </p:nvSpPr>
+        <p:spPr>
+          <a:xfrm>
+            <a:off x="731520" y="2788920"/>
+            <a:ext cx="2331720" cy="1097280"/>
+          </a:xfrm>
+          <a:prstGeom prst="rect">
+            <a:avLst/>
+          </a:prstGeom>
+          <a:noFill/>
+          <a:ln/>
+        </p:spPr>
+        <p:txBody>
+          <a:bodyPr wrap="square" rtlCol="0" anchor="t"/>
+          <a:lstStyle/>
+          <a:p>
+            <a:pPr algn="ctr" indent="0" marL="0">
+              <a:lnSpc>
+                <a:spcPct val="110000"/>
+              </a:lnSpc>
+              <a:buNone/>
+            </a:pPr>
+            <a:r>
+              <a:rPr lang="en-US" sz="1100" dirty="0">
+                <a:solidFill>
+                  <a:srgbClr val="0D1B2A"/>
+                </a:solidFill>
+                <a:latin typeface="Calibri" pitchFamily="34" charset="0"/>
+                <a:ea typeface="Calibri" pitchFamily="34" charset="-122"/>
+                <a:cs typeface="Calibri" pitchFamily="34" charset="-120"/>
+              </a:rPr>
+              <a:t>The model's short-term forecast, scaled to the yearly figure options pricing uses, comes out to about 44% annualized volatility.</a:t>
+            </a:r>
+            <a:endParaRPr lang="en-US" sz="1100" dirty="0"/>
+          </a:p>
+        </p:txBody>
+      </p:sp>
+      <p:sp>
+        <p:nvSpPr>
+          <p:cNvPr id="16" name="Shape 14"/>
+          <p:cNvSpPr/>
+          <p:nvPr/>
+        </p:nvSpPr>
+        <p:spPr>
+          <a:xfrm>
+            <a:off x="3383280" y="1645920"/>
+            <a:ext cx="2697480" cy="2377440"/>
+          </a:xfrm>
+          <a:prstGeom prst="roundRect">
+            <a:avLst>
+              <a:gd name="adj" fmla="val 3077"/>
+            </a:avLst>
+          </a:prstGeom>
+          <a:solidFill>
+            <a:srgbClr val="FFFFFF"/>
+          </a:solidFill>
+          <a:ln w="12700">
+            <a:solidFill>
+              <a:srgbClr val="CADCFC"/>
+            </a:solidFill>
+            <a:prstDash val="solid"/>
+          </a:ln>
+        </p:spPr>
+        <p:txBody>
+          <a:bodyPr/>
+          <a:p/>
+        </p:txBody>
+      </p:sp>
+      <p:sp>
+        <p:nvSpPr>
+          <p:cNvPr id="17" name="Shape 15"/>
+          <p:cNvSpPr/>
+          <p:nvPr/>
+        </p:nvSpPr>
+        <p:spPr>
+          <a:xfrm>
+            <a:off x="4480560" y="1828800"/>
+            <a:ext cx="502920" cy="502920"/>
+          </a:xfrm>
+          <a:prstGeom prst="ellipse">
+            <a:avLst/>
+          </a:prstGeom>
+          <a:solidFill>
+            <a:srgbClr val="1B4965"/>
+          </a:solidFill>
+          <a:ln/>
+        </p:spPr>
+        <p:txBody>
+          <a:bodyPr/>
+          <a:p/>
+        </p:txBody>
+      </p:sp>
+      <p:sp>
+        <p:nvSpPr>
+          <p:cNvPr id="18" name="Text 16"/>
+          <p:cNvSpPr/>
+          <p:nvPr/>
+        </p:nvSpPr>
+        <p:spPr>
+          <a:xfrm>
+            <a:off x="4480560" y="1828800"/>
+            <a:ext cx="502920" cy="502920"/>
+          </a:xfrm>
+          <a:prstGeom prst="rect">
+            <a:avLst/>
+          </a:prstGeom>
+          <a:noFill/>
+          <a:ln/>
+        </p:spPr>
+        <p:txBody>
+          <a:bodyPr wrap="square" rtlCol="0" anchor="ctr"/>
+          <a:lstStyle/>
+          <a:p>
+            <a:pPr algn="ctr" indent="0" marL="0">
+              <a:buNone/>
+            </a:pPr>
+            <a:r>
+              <a:rPr lang="en-US" sz="1700" b="1" dirty="0">
+                <a:solidFill>
+                  <a:srgbClr val="F7931A"/>
+                </a:solidFill>
+                <a:latin typeface="Cambria" pitchFamily="34" charset="0"/>
+                <a:ea typeface="Cambria" pitchFamily="34" charset="-122"/>
+                <a:cs typeface="Cambria" pitchFamily="34" charset="-120"/>
+              </a:rPr>
+              <a:t>2</a:t>
+            </a:r>
+            <a:endParaRPr lang="en-US" sz="1700" dirty="0"/>
+          </a:p>
+        </p:txBody>
+      </p:sp>
+      <p:sp>
+        <p:nvSpPr>
+          <p:cNvPr id="19" name="Text 17"/>
+          <p:cNvSpPr/>
+          <p:nvPr/>
+        </p:nvSpPr>
+        <p:spPr>
+          <a:xfrm>
+            <a:off x="3566160" y="2450592"/>
+            <a:ext cx="2331720" cy="320040"/>
+          </a:xfrm>
+          <a:prstGeom prst="rect">
+            <a:avLst/>
+          </a:prstGeom>
+          <a:noFill/>
+          <a:ln/>
+        </p:spPr>
+        <p:txBody>
+          <a:bodyPr wrap="square" rtlCol="0" anchor="ctr"/>
+          <a:lstStyle/>
+          <a:p>
+            <a:pPr algn="ctr" indent="0" marL="0">
+              <a:buNone/>
+            </a:pPr>
+            <a:r>
+              <a:rPr lang="en-US" sz="1300" b="1" dirty="0">
+                <a:solidFill>
+                  <a:srgbClr val="0D1B2A"/>
+                </a:solidFill>
+                <a:latin typeface="Cambria" pitchFamily="34" charset="0"/>
+                <a:ea typeface="Cambria" pitchFamily="34" charset="-122"/>
+                <a:cs typeface="Cambria" pitchFamily="34" charset="-120"/>
+              </a:rPr>
+              <a:t>Price a hypothetical option</a:t>
+            </a:r>
+            <a:endParaRPr lang="en-US" sz="1300" dirty="0"/>
+          </a:p>
+        </p:txBody>
+      </p:sp>
+      <p:sp>
+        <p:nvSpPr>
+          <p:cNvPr id="20" name="Text 18"/>
+          <p:cNvSpPr/>
+          <p:nvPr/>
+        </p:nvSpPr>
+        <p:spPr>
+          <a:xfrm>
+            <a:off x="3566160" y="2788920"/>
+            <a:ext cx="2331720" cy="1097280"/>
+          </a:xfrm>
+          <a:prstGeom prst="rect">
+            <a:avLst/>
+          </a:prstGeom>
+          <a:noFill/>
+          <a:ln/>
+        </p:spPr>
+        <p:txBody>
+          <a:bodyPr wrap="square" rtlCol="0" anchor="t"/>
+          <a:lstStyle/>
+          <a:p>
+            <a:pPr algn="ctr" indent="0" marL="0">
+              <a:lnSpc>
+                <a:spcPct val="110000"/>
+              </a:lnSpc>
+              <a:buNone/>
+            </a:pPr>
+            <a:r>
+              <a:rPr lang="en-US" sz="1100" dirty="0">
+                <a:solidFill>
+                  <a:srgbClr val="0D1B2A"/>
+                </a:solidFill>
+                <a:latin typeface="Calibri" pitchFamily="34" charset="0"/>
+                <a:ea typeface="Calibri" pitchFamily="34" charset="-122"/>
+                <a:cs typeface="Calibri" pitchFamily="34" charset="-120"/>
+              </a:rPr>
+              <a:t>A 7-day BTC option priced at that 44% figure is worth about $1,177 — the model's own fair-value estimate.</a:t>
+            </a:r>
+            <a:endParaRPr lang="en-US" sz="1100" dirty="0"/>
+          </a:p>
+        </p:txBody>
+      </p:sp>
+      <p:sp>
+        <p:nvSpPr>
+          <p:cNvPr id="21" name="Shape 19"/>
+          <p:cNvSpPr/>
+          <p:nvPr/>
+        </p:nvSpPr>
+        <p:spPr>
+          <a:xfrm>
+            <a:off x="6217920" y="1645920"/>
+            <a:ext cx="2697480" cy="2377440"/>
+          </a:xfrm>
+          <a:prstGeom prst="roundRect">
+            <a:avLst>
+              <a:gd name="adj" fmla="val 3077"/>
+            </a:avLst>
+          </a:prstGeom>
+          <a:solidFill>
+            <a:srgbClr val="FFFFFF"/>
+          </a:solidFill>
+          <a:ln w="12700">
+            <a:solidFill>
+              <a:srgbClr val="CADCFC"/>
+            </a:solidFill>
+            <a:prstDash val="solid"/>
+          </a:ln>
+        </p:spPr>
+        <p:txBody>
+          <a:bodyPr/>
+          <a:p/>
+        </p:txBody>
+      </p:sp>
+      <p:sp>
+        <p:nvSpPr>
+          <p:cNvPr id="22" name="Shape 20"/>
+          <p:cNvSpPr/>
+          <p:nvPr/>
+        </p:nvSpPr>
+        <p:spPr>
+          <a:xfrm>
+            <a:off x="7315200" y="1828800"/>
+            <a:ext cx="502920" cy="502920"/>
+          </a:xfrm>
+          <a:prstGeom prst="ellipse">
+            <a:avLst/>
+          </a:prstGeom>
+          <a:solidFill>
+            <a:srgbClr val="1B4965"/>
+          </a:solidFill>
+          <a:ln/>
+        </p:spPr>
+        <p:txBody>
+          <a:bodyPr/>
+          <a:p/>
+        </p:txBody>
+      </p:sp>
+      <p:sp>
+        <p:nvSpPr>
+          <p:cNvPr id="23" name="Text 21"/>
+          <p:cNvSpPr/>
+          <p:nvPr/>
+        </p:nvSpPr>
+        <p:spPr>
+          <a:xfrm>
+            <a:off x="7315200" y="1828800"/>
+            <a:ext cx="502920" cy="502920"/>
+          </a:xfrm>
+          <a:prstGeom prst="rect">
+            <a:avLst/>
+          </a:prstGeom>
+          <a:noFill/>
+          <a:ln/>
+        </p:spPr>
+        <p:txBody>
+          <a:bodyPr wrap="square" rtlCol="0" anchor="ctr"/>
+          <a:lstStyle/>
+          <a:p>
+            <a:pPr algn="ctr" indent="0" marL="0">
+              <a:buNone/>
+            </a:pPr>
+            <a:r>
+              <a:rPr lang="en-US" sz="1700" b="1" dirty="0">
+                <a:solidFill>
+                  <a:srgbClr val="F7931A"/>
+                </a:solidFill>
+                <a:latin typeface="Cambria" pitchFamily="34" charset="0"/>
+                <a:ea typeface="Cambria" pitchFamily="34" charset="-122"/>
+                <a:cs typeface="Cambria" pitchFamily="34" charset="-120"/>
+              </a:rPr>
+              <a:t>3</a:t>
+            </a:r>
+            <a:endParaRPr lang="en-US" sz="1700" dirty="0"/>
+          </a:p>
+        </p:txBody>
+      </p:sp>
+      <p:sp>
+        <p:nvSpPr>
+          <p:cNvPr id="24" name="Text 22"/>
+          <p:cNvSpPr/>
+          <p:nvPr/>
+        </p:nvSpPr>
+        <p:spPr>
+          <a:xfrm>
+            <a:off x="6400800" y="2450592"/>
+            <a:ext cx="2331720" cy="320040"/>
+          </a:xfrm>
+          <a:prstGeom prst="rect">
+            <a:avLst/>
+          </a:prstGeom>
+          <a:noFill/>
+          <a:ln/>
+        </p:spPr>
+        <p:txBody>
+          <a:bodyPr wrap="square" rtlCol="0" anchor="ctr"/>
+          <a:lstStyle/>
+          <a:p>
+            <a:pPr algn="ctr" indent="0" marL="0">
+              <a:buNone/>
+            </a:pPr>
+            <a:r>
+              <a:rPr lang="en-US" sz="1300" b="1" dirty="0">
+                <a:solidFill>
+                  <a:srgbClr val="0D1B2A"/>
+                </a:solidFill>
+                <a:latin typeface="Cambria" pitchFamily="34" charset="0"/>
+                <a:ea typeface="Cambria" pitchFamily="34" charset="-122"/>
+                <a:cs typeface="Cambria" pitchFamily="34" charset="-120"/>
+              </a:rPr>
+              <a:t>Compare to market pricing</a:t>
+            </a:r>
+            <a:endParaRPr lang="en-US" sz="1300" dirty="0"/>
+          </a:p>
+        </p:txBody>
+      </p:sp>
+      <p:sp>
+        <p:nvSpPr>
+          <p:cNvPr id="25" name="Text 23"/>
+          <p:cNvSpPr/>
+          <p:nvPr/>
+        </p:nvSpPr>
+        <p:spPr>
+          <a:xfrm>
+            <a:off x="6400800" y="2788920"/>
+            <a:ext cx="2331720" cy="1097280"/>
+          </a:xfrm>
+          <a:prstGeom prst="rect">
+            <a:avLst/>
+          </a:prstGeom>
+          <a:noFill/>
+          <a:ln/>
+        </p:spPr>
+        <p:txBody>
+          <a:bodyPr wrap="square" rtlCol="0" anchor="t"/>
+          <a:lstStyle/>
+          <a:p>
+            <a:pPr algn="ctr" indent="0" marL="0">
+              <a:lnSpc>
+                <a:spcPct val="110000"/>
+              </a:lnSpc>
+              <a:buNone/>
+            </a:pPr>
+            <a:r>
+              <a:rPr lang="en-US" sz="1100" dirty="0">
+                <a:solidFill>
+                  <a:srgbClr val="0D1B2A"/>
+                </a:solidFill>
+                <a:latin typeface="Calibri" pitchFamily="34" charset="0"/>
+                <a:ea typeface="Calibri" pitchFamily="34" charset="-122"/>
+                <a:cs typeface="Calibri" pitchFamily="34" charset="-120"/>
+              </a:rPr>
+              <a:t>If the market prices that same option using 50% volatility instead, it comes out near $1,454 — about $280 more expensive than the model suggests is fair.</a:t>
+            </a:r>
+            <a:endParaRPr lang="en-US" sz="1100" dirty="0"/>
+          </a:p>
+        </p:txBody>
+      </p:sp>
+      <p:sp>
+        <p:nvSpPr>
+          <p:cNvPr id="26" name="Shape 24"/>
+          <p:cNvSpPr/>
+          <p:nvPr/>
+        </p:nvSpPr>
+        <p:spPr>
+          <a:xfrm>
+            <a:off x="9052560" y="1645920"/>
+            <a:ext cx="2697480" cy="2377440"/>
+          </a:xfrm>
+          <a:prstGeom prst="roundRect">
+            <a:avLst>
+              <a:gd name="adj" fmla="val 3077"/>
+            </a:avLst>
+          </a:prstGeom>
+          <a:solidFill>
+            <a:srgbClr val="FFFFFF"/>
+          </a:solidFill>
+          <a:ln w="12700">
+            <a:solidFill>
+              <a:srgbClr val="CADCFC"/>
+            </a:solidFill>
+            <a:prstDash val="solid"/>
+          </a:ln>
+        </p:spPr>
+        <p:txBody>
+          <a:bodyPr/>
+          <a:p/>
+        </p:txBody>
+      </p:sp>
+      <p:sp>
+        <p:nvSpPr>
+          <p:cNvPr id="27" name="Shape 25"/>
+          <p:cNvSpPr/>
+          <p:nvPr/>
+        </p:nvSpPr>
+        <p:spPr>
+          <a:xfrm>
+            <a:off x="10149840" y="1828800"/>
+            <a:ext cx="502920" cy="502920"/>
+          </a:xfrm>
+          <a:prstGeom prst="ellipse">
+            <a:avLst/>
+          </a:prstGeom>
+          <a:solidFill>
+            <a:srgbClr val="1B4965"/>
+          </a:solidFill>
+          <a:ln/>
+        </p:spPr>
+        <p:txBody>
+          <a:bodyPr/>
+          <a:p/>
+        </p:txBody>
+      </p:sp>
+      <p:sp>
+        <p:nvSpPr>
+          <p:cNvPr id="28" name="Text 26"/>
+          <p:cNvSpPr/>
+          <p:nvPr/>
+        </p:nvSpPr>
+        <p:spPr>
+          <a:xfrm>
+            <a:off x="10149840" y="1828800"/>
+            <a:ext cx="502920" cy="502920"/>
+          </a:xfrm>
+          <a:prstGeom prst="rect">
+            <a:avLst/>
+          </a:prstGeom>
+          <a:noFill/>
+          <a:ln/>
+        </p:spPr>
+        <p:txBody>
+          <a:bodyPr wrap="square" rtlCol="0" anchor="ctr"/>
+          <a:lstStyle/>
+          <a:p>
+            <a:pPr algn="ctr" indent="0" marL="0">
+              <a:buNone/>
+            </a:pPr>
+            <a:r>
+              <a:rPr lang="en-US" sz="1700" b="1" dirty="0">
+                <a:solidFill>
+                  <a:srgbClr val="F7931A"/>
+                </a:solidFill>
+                <a:latin typeface="Cambria" pitchFamily="34" charset="0"/>
+                <a:ea typeface="Cambria" pitchFamily="34" charset="-122"/>
+                <a:cs typeface="Cambria" pitchFamily="34" charset="-120"/>
+              </a:rPr>
+              <a:t>4</a:t>
+            </a:r>
+            <a:endParaRPr lang="en-US" sz="1700" dirty="0"/>
+          </a:p>
+        </p:txBody>
+      </p:sp>
+      <p:sp>
+        <p:nvSpPr>
+          <p:cNvPr id="29" name="Text 27"/>
+          <p:cNvSpPr/>
+          <p:nvPr/>
+        </p:nvSpPr>
+        <p:spPr>
+          <a:xfrm>
+            <a:off x="9235440" y="2450592"/>
+            <a:ext cx="2331720" cy="320040"/>
+          </a:xfrm>
+          <a:prstGeom prst="rect">
+            <a:avLst/>
+          </a:prstGeom>
+          <a:noFill/>
+          <a:ln/>
+        </p:spPr>
+        <p:txBody>
+          <a:bodyPr wrap="square" rtlCol="0" anchor="ctr"/>
+          <a:lstStyle/>
+          <a:p>
+            <a:pPr algn="ctr" indent="0" marL="0">
+              <a:buNone/>
+            </a:pPr>
+            <a:r>
+              <a:rPr lang="en-US" sz="1300" b="1" dirty="0">
+                <a:solidFill>
+                  <a:srgbClr val="0D1B2A"/>
+                </a:solidFill>
+                <a:latin typeface="Cambria" pitchFamily="34" charset="0"/>
+                <a:ea typeface="Cambria" pitchFamily="34" charset="-122"/>
+                <a:cs typeface="Cambria" pitchFamily="34" charset="-120"/>
+              </a:rPr>
+              <a:t>Spot the opportunity</a:t>
+            </a:r>
+            <a:endParaRPr lang="en-US" sz="1300" dirty="0"/>
+          </a:p>
+        </p:txBody>
+      </p:sp>
+      <p:sp>
+        <p:nvSpPr>
+          <p:cNvPr id="30" name="Text 28"/>
+          <p:cNvSpPr/>
+          <p:nvPr/>
+        </p:nvSpPr>
+        <p:spPr>
+          <a:xfrm>
+            <a:off x="9235440" y="2788920"/>
+            <a:ext cx="2331720" cy="1097280"/>
+          </a:xfrm>
+          <a:prstGeom prst="rect">
+            <a:avLst/>
+          </a:prstGeom>
+          <a:noFill/>
+          <a:ln/>
+        </p:spPr>
+        <p:txBody>
+          <a:bodyPr wrap="square" rtlCol="0" anchor="t"/>
+          <a:lstStyle/>
+          <a:p>
+            <a:pPr algn="ctr" indent="0" marL="0">
+              <a:lnSpc>
+                <a:spcPct val="110000"/>
+              </a:lnSpc>
+              <a:buNone/>
+            </a:pPr>
+            <a:r>
+              <a:rPr lang="en-US" sz="1100" dirty="0">
+                <a:solidFill>
+                  <a:srgbClr val="0D1B2A"/>
+                </a:solidFill>
+                <a:latin typeface="Calibri" pitchFamily="34" charset="0"/>
+                <a:ea typeface="Calibri" pitchFamily="34" charset="-122"/>
+                <a:cs typeface="Calibri" pitchFamily="34" charset="-120"/>
+              </a:rPr>
+              <a:t>Pricier than the model expects may be worth selling; cheaper (e.g. a 35% assumption, ~$792) may be worth buying — always alongside the market's own price, never instead of it.</a:t>
+            </a:r>
+            <a:endParaRPr lang="en-US" sz="1100" dirty="0"/>
+          </a:p>
+        </p:txBody>
+      </p:sp>
+      <p:sp>
+        <p:nvSpPr>
+          <p:cNvPr id="31" name="Shape 29"/>
+          <p:cNvSpPr/>
+          <p:nvPr/>
+        </p:nvSpPr>
+        <p:spPr>
+          <a:xfrm>
+            <a:off x="548640" y="4297680"/>
+            <a:ext cx="11064240" cy="1737360"/>
+          </a:xfrm>
+          <a:prstGeom prst="roundRect">
+            <a:avLst>
+              <a:gd name="adj" fmla="val 4211"/>
+            </a:avLst>
+          </a:prstGeom>
+          <a:solidFill>
+            <a:srgbClr val="0D1B2A"/>
+          </a:solidFill>
+          <a:ln/>
+        </p:spPr>
+        <p:txBody>
+          <a:bodyPr/>
+          <a:p/>
+        </p:txBody>
+      </p:sp>
+      <p:sp>
+        <p:nvSpPr>
+          <p:cNvPr id="32" name="Text 30"/>
+          <p:cNvSpPr/>
+          <p:nvPr/>
+        </p:nvSpPr>
+        <p:spPr>
+          <a:xfrm>
+            <a:off x="868680" y="4480560"/>
+            <a:ext cx="10424160" cy="320040"/>
+          </a:xfrm>
+          <a:prstGeom prst="rect">
+            <a:avLst/>
+          </a:prstGeom>
+          <a:noFill/>
+          <a:ln/>
+        </p:spPr>
+        <p:txBody>
+          <a:bodyPr wrap="square" rtlCol="0" anchor="ctr"/>
+          <a:lstStyle/>
+          <a:p>
+            <a:pPr indent="0" marL="0">
+              <a:buNone/>
+            </a:pPr>
+            <a:r>
+              <a:rPr lang="en-US" sz="1500" b="1" dirty="0">
+                <a:solidFill>
+                  <a:srgbClr val="F7931A"/>
+                </a:solidFill>
+                <a:latin typeface="Cambria" pitchFamily="34" charset="0"/>
+                <a:ea typeface="Cambria" pitchFamily="34" charset="-122"/>
+                <a:cs typeface="Cambria" pitchFamily="34" charset="-120"/>
+              </a:rPr>
+              <a:t>Why this is a signal, not a system</a:t>
+            </a:r>
+            <a:endParaRPr lang="en-US" sz="1500" dirty="0"/>
+          </a:p>
+        </p:txBody>
+      </p:sp>
+      <p:sp>
+        <p:nvSpPr>
+          <p:cNvPr id="33" name="Text 31"/>
+          <p:cNvSpPr/>
+          <p:nvPr/>
+        </p:nvSpPr>
+        <p:spPr>
+          <a:xfrm>
+            <a:off x="868680" y="4846320"/>
+            <a:ext cx="10424160" cy="1051560"/>
+          </a:xfrm>
+          <a:prstGeom prst="rect">
+            <a:avLst/>
+          </a:prstGeom>
+          <a:noFill/>
+          <a:ln/>
+        </p:spPr>
+        <p:txBody>
+          <a:bodyPr wrap="square" rtlCol="0" anchor="t"/>
+          <a:lstStyle/>
+          <a:p>
+            <a:pPr indent="0" marL="0">
+              <a:lnSpc>
+                <a:spcPct val="120000"/>
+              </a:lnSpc>
+              <a:buNone/>
+            </a:pPr>
+            <a:r>
+              <a:rPr lang="en-US" sz="1300" dirty="0">
+                <a:solidFill>
+                  <a:srgbClr val="FFFFFF"/>
+                </a:solidFill>
+                <a:latin typeface="Calibri" pitchFamily="34" charset="0"/>
+                <a:ea typeface="Calibri" pitchFamily="34" charset="-122"/>
+                <a:cs typeface="Calibri" pitchFamily="34" charset="-120"/>
+              </a:rPr>
+              <a:t>This never overrides a liquid market's own quoted price. It's most useful when no market price exists at all, or for spotting relative mispricing — and even then, it would be sized carefully and combined with other information, not traded on alone.</a:t>
+            </a:r>
+            <a:endParaRPr lang="en-US" sz="1300" dirty="0"/>
+          </a:p>
+        </p:txBody>
+      </p:sp>
+    </p:spTree>
+  </p:cSld>
+  <p:clrMapOvr>
+    <a:masterClrMapping/>
+  </p:clrMapOvr>
+</p:sld>
+</file>
+
+<file path=ppt/slides/slide17.xml><?xml version="1.0" encoding="utf-8"?>
 <p:sld xmlns:a="http://schemas.openxmlformats.org/drawingml/2006/main" xmlns:r="http://schemas.openxmlformats.org/officeDocument/2006/relationships" xmlns:p="http://schemas.openxmlformats.org/presentationml/2006/main">
   <p:cSld name="Slide 13">
     <p:bg>

--- a/presentation/capstone-btc-volatility.pptx
+++ b/presentation/capstone-btc-volatility.pptx
@@ -10457,6 +10457,30 @@
                 <a:cs typeface="Calibri" pitchFamily="34" charset="-120"/>
               </a:rPr>
               <a:t>Single asset: no cross-asset spillover signal from other coins is used</a:t>
+            </a:r>
+            <a:endParaRPr lang="en-US" sz="1100" dirty="0"/>
+          </a:p>
+          <a:p>
+            <a:pPr marL="342900" indent="-342900">
+              <a:lnSpc>
+                <a:spcPct val="115000"/>
+              </a:lnSpc>
+              <a:spcAft>
+                <a:spcPts val="1000"/>
+              </a:spcAft>
+              <a:buSzPct val="100000"/>
+              <a:buChar char="●"/>
+            </a:pPr>
+            <a:r>
+              <a:rPr lang="en-US" sz="1100" dirty="0">
+                <a:solidFill>
+                  <a:srgbClr val="0D1B2A"/>
+                </a:solidFill>
+                <a:latin typeface="Calibri" pitchFamily="34" charset="0"/>
+                <a:ea typeface="Calibri" pitchFamily="34" charset="-122"/>
+                <a:cs typeface="Calibri" pitchFamily="34" charset="-120"/>
+              </a:rPr>
+              <a:t>Check 19: this notebook's stricter scikit-learn R² vs. the literature's own Mincer-Zarnowitz convention — recomputed that way, HAR-RV-X scores higher (0.27 historical / 0.24 live)</a:t>
             </a:r>
             <a:endParaRPr lang="en-US" sz="1100" dirty="0"/>
           </a:p>

--- a/presentation/capstone-btc-volatility.pptx
+++ b/presentation/capstone-btc-volatility.pptx
@@ -10432,7 +10432,7 @@
                 <a:ea typeface="Calibri" pitchFamily="34" charset="-122"/>
                 <a:cs typeface="Calibri" pitchFamily="34" charset="-120"/>
               </a:rPr>
-              <a:t>Eighteen robustness checks tested (XGBoost, LSTM, stacked ensembles, ETH spillover, winsorizing, and more) — four survived validation and were adopted, fourteen didn't</a:t>
+              <a:t>Twenty-two robustness checks tested (XGBoost, LSTM, ARIMA/ARIMAX, stacked ensembles, ETH spillover, winsorizing, and more) - four survived validation and were adopted, the rest didn't</a:t>
             </a:r>
             <a:endParaRPr lang="en-US" sz="1100" dirty="0"/>
           </a:p>
@@ -10480,7 +10480,7 @@
                 <a:ea typeface="Calibri" pitchFamily="34" charset="-122"/>
                 <a:cs typeface="Calibri" pitchFamily="34" charset="-120"/>
               </a:rPr>
-              <a:t>Check 19: this notebook's stricter scikit-learn R² vs. the literature's own Mincer-Zarnowitz convention — recomputed that way, HAR-RV-X scores higher (0.27 historical / 0.24 live)</a:t>
+              <a:t>Checks 19-22: R² here is a stricter convention than the literature's; ARIMA, ARIMAX, and an LSTM classifier also didn't beat HAR-RV-X (Final)</a:t>
             </a:r>
             <a:endParaRPr lang="en-US" sz="1100" dirty="0"/>
           </a:p>
